--- a/Natural Draft Fired Heater Ver 1/NDFH_Ver1_student_github/NDFH-V1-PID-001.pptx
+++ b/Natural Draft Fired Heater Ver 1/NDFH_Ver1_student_github/NDFH-V1-PID-001.pptx
@@ -5160,7 +5160,7 @@
         </p:nvSpPr>
         <p:spPr>
           <a:xfrm>
-            <a:off x="2875889" y="5212080"/>
+            <a:off x="2949041" y="5212080"/>
             <a:ext cx="905052" cy="109728"/>
           </a:xfrm>
           <a:prstGeom prst="rect">
@@ -5343,6 +5343,108 @@
       <p:sp>
         <p:nvSpPr>
           <p:cNvPr id="53" name="Freeform 52"/>
+          <p:cNvSpPr/>
+          <p:nvPr/>
+        </p:nvSpPr>
+        <p:spPr>
+          <a:xfrm>
+            <a:off x="2569464" y="3543300"/>
+            <a:ext cx="201168" cy="137160"/>
+          </a:xfrm>
+          <a:custGeom>
+            <a:avLst/>
+            <a:gdLst/>
+            <a:ahLst/>
+            <a:cxnLst/>
+            <a:rect l="l" t="t" r="r" b="b"/>
+            <a:pathLst>
+              <a:path w="201168" h="137160">
+                <a:moveTo>
+                  <a:pt x="0" y="0"/>
+                </a:moveTo>
+                <a:lnTo>
+                  <a:pt x="201168" y="137160"/>
+                </a:lnTo>
+                <a:lnTo>
+                  <a:pt x="201168" y="0"/>
+                </a:lnTo>
+                <a:lnTo>
+                  <a:pt x="0" y="137160"/>
+                </a:lnTo>
+                <a:close/>
+              </a:path>
+            </a:pathLst>
+          </a:custGeom>
+          <a:solidFill>
+            <a:srgbClr val="FFFFFF"/>
+          </a:solidFill>
+          <a:ln w="13970">
+            <a:solidFill>
+              <a:srgbClr val="000000"/>
+            </a:solidFill>
+          </a:ln>
+          <a:effectLst/>
+        </p:spPr>
+        <p:style>
+          <a:lnRef idx="1">
+            <a:schemeClr val="accent1"/>
+          </a:lnRef>
+          <a:fillRef idx="3">
+            <a:schemeClr val="accent1"/>
+          </a:fillRef>
+          <a:effectRef idx="2">
+            <a:schemeClr val="accent1"/>
+          </a:effectRef>
+          <a:fontRef idx="minor">
+            <a:schemeClr val="lt1"/>
+          </a:fontRef>
+        </p:style>
+        <p:txBody>
+          <a:bodyPr rtlCol="0" anchor="ctr"/>
+          <a:lstStyle/>
+          <a:p>
+            <a:pPr algn="ctr"/>
+          </a:p>
+        </p:txBody>
+      </p:sp>
+      <p:sp>
+        <p:nvSpPr>
+          <p:cNvPr id="54" name="TextBox 53"/>
+          <p:cNvSpPr txBox="1"/>
+          <p:nvPr/>
+        </p:nvSpPr>
+        <p:spPr>
+          <a:xfrm>
+            <a:off x="2470658" y="3712464"/>
+            <a:ext cx="398780" cy="109728"/>
+          </a:xfrm>
+          <a:prstGeom prst="rect">
+            <a:avLst/>
+          </a:prstGeom>
+          <a:noFill/>
+        </p:spPr>
+        <p:txBody>
+          <a:bodyPr wrap="square" lIns="0" rIns="0" tIns="0" bIns="0" anchor="ctr">
+            <a:spAutoFit/>
+          </a:bodyPr>
+          <a:lstStyle/>
+          <a:p>
+            <a:pPr algn="ctr"/>
+            <a:r>
+              <a:rPr sz="550" b="1">
+                <a:solidFill>
+                  <a:srgbClr val="000000"/>
+                </a:solidFill>
+                <a:latin typeface="Arial"/>
+              </a:rPr>
+              <a:t>V-401</a:t>
+            </a:r>
+          </a:p>
+        </p:txBody>
+      </p:sp>
+      <p:sp>
+        <p:nvSpPr>
+          <p:cNvPr id="55" name="Freeform 54"/>
           <p:cNvSpPr/>
           <p:nvPr/>
         </p:nvSpPr>
@@ -5409,7 +5511,7 @@
       </p:sp>
       <p:sp>
         <p:nvSpPr>
-          <p:cNvPr id="54" name="TextBox 53"/>
+          <p:cNvPr id="56" name="TextBox 55"/>
           <p:cNvSpPr txBox="1"/>
           <p:nvPr/>
         </p:nvSpPr>
@@ -5444,7 +5546,7 @@
       </p:sp>
       <p:sp>
         <p:nvSpPr>
-          <p:cNvPr id="55" name="Oval 54"/>
+          <p:cNvPr id="57" name="Oval 56"/>
           <p:cNvSpPr/>
           <p:nvPr/>
         </p:nvSpPr>
@@ -5490,7 +5592,7 @@
       </p:sp>
       <p:cxnSp>
         <p:nvCxnSpPr>
-          <p:cNvPr id="56" name="Connector 55"/>
+          <p:cNvPr id="58" name="Connector 57"/>
           <p:cNvCxnSpPr/>
           <p:nvPr/>
         </p:nvCxnSpPr>
@@ -5525,7 +5627,7 @@
       </p:cxnSp>
       <p:sp>
         <p:nvSpPr>
-          <p:cNvPr id="57" name="Oval 56"/>
+          <p:cNvPr id="59" name="Oval 58"/>
           <p:cNvSpPr/>
           <p:nvPr/>
         </p:nvSpPr>
@@ -5592,7 +5694,7 @@
       </p:sp>
       <p:cxnSp>
         <p:nvCxnSpPr>
-          <p:cNvPr id="58" name="Connector 57"/>
+          <p:cNvPr id="60" name="Connector 59"/>
           <p:cNvCxnSpPr/>
           <p:nvPr/>
         </p:nvCxnSpPr>
@@ -5628,14 +5730,81 @@
       </p:cxnSp>
       <p:sp>
         <p:nvSpPr>
-          <p:cNvPr id="59" name="TextBox 58"/>
+          <p:cNvPr id="61" name="Freeform 60"/>
+          <p:cNvSpPr/>
+          <p:nvPr/>
+        </p:nvSpPr>
+        <p:spPr>
+          <a:xfrm>
+            <a:off x="2948939" y="5358383"/>
+            <a:ext cx="137161" cy="201169"/>
+          </a:xfrm>
+          <a:custGeom>
+            <a:avLst/>
+            <a:gdLst/>
+            <a:ahLst/>
+            <a:cxnLst/>
+            <a:rect l="l" t="t" r="r" b="b"/>
+            <a:pathLst>
+              <a:path w="137161" h="201169">
+                <a:moveTo>
+                  <a:pt x="0" y="0"/>
+                </a:moveTo>
+                <a:lnTo>
+                  <a:pt x="137161" y="201169"/>
+                </a:lnTo>
+                <a:lnTo>
+                  <a:pt x="0" y="201169"/>
+                </a:lnTo>
+                <a:lnTo>
+                  <a:pt x="137161" y="0"/>
+                </a:lnTo>
+                <a:close/>
+              </a:path>
+            </a:pathLst>
+          </a:custGeom>
+          <a:solidFill>
+            <a:srgbClr val="FFFFFF"/>
+          </a:solidFill>
+          <a:ln w="13970">
+            <a:solidFill>
+              <a:srgbClr val="000000"/>
+            </a:solidFill>
+          </a:ln>
+          <a:effectLst/>
+        </p:spPr>
+        <p:style>
+          <a:lnRef idx="1">
+            <a:schemeClr val="accent1"/>
+          </a:lnRef>
+          <a:fillRef idx="3">
+            <a:schemeClr val="accent1"/>
+          </a:fillRef>
+          <a:effectRef idx="2">
+            <a:schemeClr val="accent1"/>
+          </a:effectRef>
+          <a:fontRef idx="minor">
+            <a:schemeClr val="lt1"/>
+          </a:fontRef>
+        </p:style>
+        <p:txBody>
+          <a:bodyPr rtlCol="0" anchor="ctr"/>
+          <a:lstStyle/>
+          <a:p>
+            <a:pPr algn="ctr"/>
+          </a:p>
+        </p:txBody>
+      </p:sp>
+      <p:sp>
+        <p:nvSpPr>
+          <p:cNvPr id="62" name="TextBox 61"/>
           <p:cNvSpPr txBox="1"/>
           <p:nvPr/>
         </p:nvSpPr>
         <p:spPr>
           <a:xfrm>
-            <a:off x="3081528" y="5596128"/>
-            <a:ext cx="644652" cy="181610"/>
+            <a:off x="2518155" y="5404104"/>
+            <a:ext cx="398780" cy="109728"/>
           </a:xfrm>
           <a:prstGeom prst="rect">
             <a:avLst/>
@@ -5648,6 +5817,41 @@
           </a:bodyPr>
           <a:lstStyle/>
           <a:p>
+            <a:pPr algn="r"/>
+            <a:r>
+              <a:rPr sz="550" b="1">
+                <a:solidFill>
+                  <a:srgbClr val="000000"/>
+                </a:solidFill>
+                <a:latin typeface="Arial"/>
+              </a:rPr>
+              <a:t>V-402</a:t>
+            </a:r>
+          </a:p>
+        </p:txBody>
+      </p:sp>
+      <p:sp>
+        <p:nvSpPr>
+          <p:cNvPr id="63" name="TextBox 62"/>
+          <p:cNvSpPr txBox="1"/>
+          <p:nvPr/>
+        </p:nvSpPr>
+        <p:spPr>
+          <a:xfrm>
+            <a:off x="3081528" y="5596128"/>
+            <a:ext cx="644652" cy="181610"/>
+          </a:xfrm>
+          <a:prstGeom prst="rect">
+            <a:avLst/>
+          </a:prstGeom>
+          <a:noFill/>
+        </p:spPr>
+        <p:txBody>
+          <a:bodyPr wrap="square" lIns="0" rIns="0" tIns="0" bIns="0" anchor="ctr">
+            <a:spAutoFit/>
+          </a:bodyPr>
+          <a:lstStyle/>
+          <a:p>
             <a:pPr algn="l"/>
             <a:r>
               <a:rPr sz="550" b="1">
@@ -5675,7 +5879,7 @@
       </p:sp>
       <p:cxnSp>
         <p:nvCxnSpPr>
-          <p:cNvPr id="60" name="Connector 59"/>
+          <p:cNvPr id="64" name="Connector 63"/>
           <p:cNvCxnSpPr/>
           <p:nvPr/>
         </p:nvCxnSpPr>
@@ -5710,7 +5914,7 @@
       </p:cxnSp>
       <p:sp>
         <p:nvSpPr>
-          <p:cNvPr id="61" name="Freeform 60"/>
+          <p:cNvPr id="65" name="Freeform 64"/>
           <p:cNvSpPr/>
           <p:nvPr/>
         </p:nvSpPr>
@@ -5777,7 +5981,7 @@
       </p:sp>
       <p:cxnSp>
         <p:nvCxnSpPr>
-          <p:cNvPr id="62" name="Connector 61"/>
+          <p:cNvPr id="66" name="Connector 65"/>
           <p:cNvCxnSpPr/>
           <p:nvPr/>
         </p:nvCxnSpPr>
@@ -5813,7 +6017,7 @@
       </p:cxnSp>
       <p:sp>
         <p:nvSpPr>
-          <p:cNvPr id="63" name="TextBox 62"/>
+          <p:cNvPr id="67" name="TextBox 66"/>
           <p:cNvSpPr txBox="1"/>
           <p:nvPr/>
         </p:nvSpPr>
@@ -5848,7 +6052,42 @@
       </p:sp>
       <p:sp>
         <p:nvSpPr>
-          <p:cNvPr id="64" name="Oval 63"/>
+          <p:cNvPr id="68" name="TextBox 67"/>
+          <p:cNvSpPr txBox="1"/>
+          <p:nvPr/>
+        </p:nvSpPr>
+        <p:spPr>
+          <a:xfrm>
+            <a:off x="3173983" y="5440680"/>
+            <a:ext cx="538480" cy="109728"/>
+          </a:xfrm>
+          <a:prstGeom prst="rect">
+            <a:avLst/>
+          </a:prstGeom>
+          <a:noFill/>
+        </p:spPr>
+        <p:txBody>
+          <a:bodyPr wrap="square" lIns="0" rIns="0" tIns="0" bIns="0" anchor="ctr">
+            <a:spAutoFit/>
+          </a:bodyPr>
+          <a:lstStyle/>
+          <a:p>
+            <a:pPr algn="r"/>
+            <a:r>
+              <a:rPr sz="500" b="1">
+                <a:solidFill>
+                  <a:srgbClr val="000000"/>
+                </a:solidFill>
+                <a:latin typeface="Arial"/>
+              </a:rPr>
+              <a:t>V-109 LC</a:t>
+            </a:r>
+          </a:p>
+        </p:txBody>
+      </p:sp>
+      <p:sp>
+        <p:nvSpPr>
+          <p:cNvPr id="69" name="Oval 68"/>
           <p:cNvSpPr/>
           <p:nvPr/>
         </p:nvSpPr>
@@ -5894,7 +6133,7 @@
       </p:sp>
       <p:cxnSp>
         <p:nvCxnSpPr>
-          <p:cNvPr id="65" name="Connector 64"/>
+          <p:cNvPr id="70" name="Connector 69"/>
           <p:cNvCxnSpPr/>
           <p:nvPr/>
         </p:nvCxnSpPr>
@@ -5929,7 +6168,7 @@
       </p:cxnSp>
       <p:sp>
         <p:nvSpPr>
-          <p:cNvPr id="66" name="Freeform 65"/>
+          <p:cNvPr id="71" name="Freeform 70"/>
           <p:cNvSpPr/>
           <p:nvPr/>
         </p:nvSpPr>
@@ -5994,9 +6233,111 @@
           </a:p>
         </p:txBody>
       </p:sp>
+      <p:sp>
+        <p:nvSpPr>
+          <p:cNvPr id="72" name="Freeform 71"/>
+          <p:cNvSpPr/>
+          <p:nvPr/>
+        </p:nvSpPr>
+        <p:spPr>
+          <a:xfrm>
+            <a:off x="3913632" y="4654296"/>
+            <a:ext cx="91440" cy="128016"/>
+          </a:xfrm>
+          <a:custGeom>
+            <a:avLst/>
+            <a:gdLst/>
+            <a:ahLst/>
+            <a:cxnLst/>
+            <a:rect l="l" t="t" r="r" b="b"/>
+            <a:pathLst>
+              <a:path w="91440" h="128016">
+                <a:moveTo>
+                  <a:pt x="0" y="0"/>
+                </a:moveTo>
+                <a:lnTo>
+                  <a:pt x="91440" y="128016"/>
+                </a:lnTo>
+                <a:lnTo>
+                  <a:pt x="0" y="128016"/>
+                </a:lnTo>
+                <a:lnTo>
+                  <a:pt x="91440" y="0"/>
+                </a:lnTo>
+                <a:close/>
+              </a:path>
+            </a:pathLst>
+          </a:custGeom>
+          <a:solidFill>
+            <a:srgbClr val="FFFFFF"/>
+          </a:solidFill>
+          <a:ln w="8890">
+            <a:solidFill>
+              <a:srgbClr val="000000"/>
+            </a:solidFill>
+          </a:ln>
+          <a:effectLst/>
+        </p:spPr>
+        <p:style>
+          <a:lnRef idx="1">
+            <a:schemeClr val="accent1"/>
+          </a:lnRef>
+          <a:fillRef idx="3">
+            <a:schemeClr val="accent1"/>
+          </a:fillRef>
+          <a:effectRef idx="2">
+            <a:schemeClr val="accent1"/>
+          </a:effectRef>
+          <a:fontRef idx="minor">
+            <a:schemeClr val="lt1"/>
+          </a:fontRef>
+        </p:style>
+        <p:txBody>
+          <a:bodyPr rtlCol="0" anchor="ctr"/>
+          <a:lstStyle/>
+          <a:p>
+            <a:pPr algn="ctr"/>
+          </a:p>
+        </p:txBody>
+      </p:sp>
+      <p:sp>
+        <p:nvSpPr>
+          <p:cNvPr id="73" name="TextBox 72"/>
+          <p:cNvSpPr txBox="1"/>
+          <p:nvPr/>
+        </p:nvSpPr>
+        <p:spPr>
+          <a:xfrm>
+            <a:off x="4050791" y="4645152"/>
+            <a:ext cx="883920" cy="109728"/>
+          </a:xfrm>
+          <a:prstGeom prst="rect">
+            <a:avLst/>
+          </a:prstGeom>
+          <a:noFill/>
+        </p:spPr>
+        <p:txBody>
+          <a:bodyPr wrap="square" lIns="0" rIns="0" tIns="0" bIns="0" anchor="ctr">
+            <a:spAutoFit/>
+          </a:bodyPr>
+          <a:lstStyle/>
+          <a:p>
+            <a:pPr algn="l"/>
+            <a:r>
+              <a:rPr sz="500" b="0">
+                <a:solidFill>
+                  <a:srgbClr val="000000"/>
+                </a:solidFill>
+                <a:latin typeface="Arial"/>
+              </a:rPr>
+              <a:t>INLET V-110 CSO</a:t>
+            </a:r>
+          </a:p>
+        </p:txBody>
+      </p:sp>
       <p:cxnSp>
         <p:nvCxnSpPr>
-          <p:cNvPr id="67" name="Connector 66"/>
+          <p:cNvPr id="74" name="Connector 73"/>
           <p:cNvCxnSpPr/>
           <p:nvPr/>
         </p:nvCxnSpPr>
@@ -6032,7 +6373,7 @@
       </p:cxnSp>
       <p:sp>
         <p:nvSpPr>
-          <p:cNvPr id="68" name="TextBox 67"/>
+          <p:cNvPr id="75" name="TextBox 74"/>
           <p:cNvSpPr txBox="1"/>
           <p:nvPr/>
         </p:nvSpPr>
@@ -6067,14 +6408,14 @@
       </p:sp>
       <p:sp>
         <p:nvSpPr>
-          <p:cNvPr id="69" name="TextBox 68"/>
+          <p:cNvPr id="76" name="TextBox 75"/>
           <p:cNvSpPr txBox="1"/>
           <p:nvPr/>
         </p:nvSpPr>
         <p:spPr>
           <a:xfrm>
             <a:off x="4050791" y="4535424"/>
-            <a:ext cx="461264" cy="109728"/>
+            <a:ext cx="831088" cy="109728"/>
           </a:xfrm>
           <a:prstGeom prst="rect">
             <a:avLst/>
@@ -6095,14 +6436,14 @@
                 </a:solidFill>
                 <a:latin typeface="Arial"/>
               </a:rPr>
-              <a:t>SET TBC</a:t>
-            </a:r>
-          </a:p>
-        </p:txBody>
-      </p:sp>
-      <p:sp>
-        <p:nvSpPr>
-          <p:cNvPr id="70" name="TextBox 69"/>
+              <a:t>SET 1700 kPa g</a:t>
+            </a:r>
+          </a:p>
+        </p:txBody>
+      </p:sp>
+      <p:sp>
+        <p:nvSpPr>
+          <p:cNvPr id="77" name="TextBox 76"/>
           <p:cNvSpPr txBox="1"/>
           <p:nvPr/>
         </p:nvSpPr>
@@ -6137,7 +6478,7 @@
       </p:sp>
       <p:cxnSp>
         <p:nvCxnSpPr>
-          <p:cNvPr id="71" name="Connector 70"/>
+          <p:cNvPr id="78" name="Connector 77"/>
           <p:cNvCxnSpPr/>
           <p:nvPr/>
         </p:nvCxnSpPr>
@@ -6172,13 +6513,13 @@
       </p:cxnSp>
       <p:sp>
         <p:nvSpPr>
-          <p:cNvPr id="72" name="TextBox 71"/>
+          <p:cNvPr id="79" name="TextBox 78"/>
           <p:cNvSpPr txBox="1"/>
           <p:nvPr/>
         </p:nvSpPr>
         <p:spPr>
           <a:xfrm>
-            <a:off x="4041648" y="4700016"/>
+            <a:off x="4142232" y="4882896"/>
             <a:ext cx="514096" cy="109728"/>
           </a:xfrm>
           <a:prstGeom prst="rect">
@@ -6207,7 +6548,7 @@
       </p:sp>
       <p:sp>
         <p:nvSpPr>
-          <p:cNvPr id="73" name="Oval 72"/>
+          <p:cNvPr id="80" name="Oval 79"/>
           <p:cNvSpPr/>
           <p:nvPr/>
         </p:nvSpPr>
@@ -6253,7 +6594,7 @@
       </p:sp>
       <p:cxnSp>
         <p:nvCxnSpPr>
-          <p:cNvPr id="74" name="Connector 73"/>
+          <p:cNvPr id="81" name="Connector 80"/>
           <p:cNvCxnSpPr/>
           <p:nvPr/>
         </p:nvCxnSpPr>
@@ -6288,7 +6629,7 @@
       </p:cxnSp>
       <p:sp>
         <p:nvSpPr>
-          <p:cNvPr id="75" name="Oval 74"/>
+          <p:cNvPr id="82" name="Oval 81"/>
           <p:cNvSpPr/>
           <p:nvPr/>
         </p:nvSpPr>
@@ -6355,7 +6696,7 @@
       </p:sp>
       <p:cxnSp>
         <p:nvCxnSpPr>
-          <p:cNvPr id="76" name="Connector 75"/>
+          <p:cNvPr id="83" name="Connector 82"/>
           <p:cNvCxnSpPr/>
           <p:nvPr/>
         </p:nvCxnSpPr>
@@ -6390,7 +6731,7 @@
       </p:cxnSp>
       <p:cxnSp>
         <p:nvCxnSpPr>
-          <p:cNvPr id="77" name="Connector 76"/>
+          <p:cNvPr id="84" name="Connector 83"/>
           <p:cNvCxnSpPr/>
           <p:nvPr/>
         </p:nvCxnSpPr>
@@ -6425,7 +6766,7 @@
       </p:cxnSp>
       <p:sp>
         <p:nvSpPr>
-          <p:cNvPr id="78" name="TextBox 77"/>
+          <p:cNvPr id="85" name="TextBox 84"/>
           <p:cNvSpPr txBox="1"/>
           <p:nvPr/>
         </p:nvSpPr>
@@ -6460,7 +6801,7 @@
       </p:sp>
       <p:cxnSp>
         <p:nvCxnSpPr>
-          <p:cNvPr id="79" name="Connector 78"/>
+          <p:cNvPr id="86" name="Connector 85"/>
           <p:cNvCxnSpPr/>
           <p:nvPr/>
         </p:nvCxnSpPr>
@@ -6495,7 +6836,7 @@
       </p:cxnSp>
       <p:sp>
         <p:nvSpPr>
-          <p:cNvPr id="80" name="Oval 79"/>
+          <p:cNvPr id="87" name="Oval 86"/>
           <p:cNvSpPr/>
           <p:nvPr/>
         </p:nvSpPr>
@@ -6562,7 +6903,7 @@
       </p:sp>
       <p:sp>
         <p:nvSpPr>
-          <p:cNvPr id="81" name="Oval 80"/>
+          <p:cNvPr id="88" name="Oval 87"/>
           <p:cNvSpPr/>
           <p:nvPr/>
         </p:nvSpPr>
@@ -6629,335 +6970,13 @@
       </p:sp>
       <p:cxnSp>
         <p:nvCxnSpPr>
-          <p:cNvPr id="82" name="Connector 81"/>
-          <p:cNvCxnSpPr/>
-          <p:nvPr/>
-        </p:nvCxnSpPr>
-        <p:spPr>
-          <a:xfrm>
-            <a:off x="4407408" y="3639312"/>
-            <a:ext cx="329184" cy="0"/>
-          </a:xfrm>
-          <a:prstGeom prst="line">
-            <a:avLst/>
-          </a:prstGeom>
-          <a:ln w="8890">
-            <a:solidFill>
-              <a:srgbClr val="000000"/>
-            </a:solidFill>
-          </a:ln>
-        </p:spPr>
-        <p:style>
-          <a:lnRef idx="2">
-            <a:schemeClr val="accent1"/>
-          </a:lnRef>
-          <a:fillRef idx="0">
-            <a:schemeClr val="accent1"/>
-          </a:fillRef>
-          <a:effectRef idx="1">
-            <a:schemeClr val="accent1"/>
-          </a:effectRef>
-          <a:fontRef idx="minor">
-            <a:schemeClr val="tx1"/>
-          </a:fontRef>
-        </p:style>
-      </p:cxnSp>
-      <p:cxnSp>
-        <p:nvCxnSpPr>
-          <p:cNvPr id="83" name="Connector 82"/>
-          <p:cNvCxnSpPr/>
-          <p:nvPr/>
-        </p:nvCxnSpPr>
-        <p:spPr>
-          <a:xfrm flipV="1">
-            <a:off x="4572000" y="3803904"/>
-            <a:ext cx="0" cy="237744"/>
-          </a:xfrm>
-          <a:prstGeom prst="line">
-            <a:avLst/>
-          </a:prstGeom>
-          <a:ln w="8890">
-            <a:solidFill>
-              <a:srgbClr val="000000"/>
-            </a:solidFill>
-            <a:prstDash val="dash"/>
-          </a:ln>
-        </p:spPr>
-        <p:style>
-          <a:lnRef idx="2">
-            <a:schemeClr val="accent1"/>
-          </a:lnRef>
-          <a:fillRef idx="0">
-            <a:schemeClr val="accent1"/>
-          </a:fillRef>
-          <a:effectRef idx="1">
-            <a:schemeClr val="accent1"/>
-          </a:effectRef>
-          <a:fontRef idx="minor">
-            <a:schemeClr val="tx1"/>
-          </a:fontRef>
-        </p:style>
-      </p:cxnSp>
-      <p:sp>
-        <p:nvSpPr>
-          <p:cNvPr id="84" name="Rectangle 83"/>
-          <p:cNvSpPr/>
-          <p:nvPr/>
-        </p:nvSpPr>
-        <p:spPr>
-          <a:xfrm>
-            <a:off x="4937760" y="3200400"/>
-            <a:ext cx="402336" cy="402336"/>
-          </a:xfrm>
-          <a:prstGeom prst="rect">
-            <a:avLst/>
-          </a:prstGeom>
-          <a:solidFill>
-            <a:srgbClr val="FFFFFF"/>
-          </a:solidFill>
-          <a:ln w="8890">
-            <a:solidFill>
-              <a:srgbClr val="000000"/>
-            </a:solidFill>
-          </a:ln>
-          <a:effectLst/>
-        </p:spPr>
-        <p:style>
-          <a:lnRef idx="1">
-            <a:schemeClr val="accent1"/>
-          </a:lnRef>
-          <a:fillRef idx="3">
-            <a:schemeClr val="accent1"/>
-          </a:fillRef>
-          <a:effectRef idx="2">
-            <a:schemeClr val="accent1"/>
-          </a:effectRef>
-          <a:fontRef idx="minor">
-            <a:schemeClr val="lt1"/>
-          </a:fontRef>
-        </p:style>
-        <p:txBody>
-          <a:bodyPr rtlCol="0" anchor="ctr"/>
-          <a:lstStyle/>
-          <a:p>
-            <a:pPr algn="ctr"/>
-          </a:p>
-        </p:txBody>
-      </p:sp>
-      <p:sp>
-        <p:nvSpPr>
-          <p:cNvPr id="85" name="Oval 84"/>
-          <p:cNvSpPr/>
-          <p:nvPr/>
-        </p:nvSpPr>
-        <p:spPr>
-          <a:xfrm>
-            <a:off x="4974336" y="3236976"/>
-            <a:ext cx="329184" cy="329184"/>
-          </a:xfrm>
-          <a:prstGeom prst="ellipse">
-            <a:avLst/>
-          </a:prstGeom>
-          <a:solidFill>
-            <a:srgbClr val="FFFFFF"/>
-          </a:solidFill>
-          <a:ln w="13970">
-            <a:solidFill>
-              <a:srgbClr val="000000"/>
-            </a:solidFill>
-          </a:ln>
-          <a:effectLst/>
-        </p:spPr>
-        <p:style>
-          <a:lnRef idx="1">
-            <a:schemeClr val="accent1"/>
-          </a:lnRef>
-          <a:fillRef idx="3">
-            <a:schemeClr val="accent1"/>
-          </a:fillRef>
-          <a:effectRef idx="2">
-            <a:schemeClr val="accent1"/>
-          </a:effectRef>
-          <a:fontRef idx="minor">
-            <a:schemeClr val="lt1"/>
-          </a:fontRef>
-        </p:style>
-        <p:txBody>
-          <a:bodyPr rtlCol="0" anchor="ctr" wrap="none" lIns="0" rIns="0" tIns="0" bIns="0"/>
-          <a:lstStyle/>
-          <a:p>
-            <a:pPr algn="ctr"/>
-            <a:r>
-              <a:rPr sz="550" b="1">
-                <a:solidFill>
-                  <a:srgbClr val="000000"/>
-                </a:solidFill>
-                <a:latin typeface="Arial"/>
-              </a:rPr>
-              <a:t>FSLL</a:t>
-            </a:r>
-          </a:p>
-          <a:p>
-            <a:pPr algn="ctr"/>
-            <a:r>
-              <a:rPr sz="550" b="1">
-                <a:solidFill>
-                  <a:srgbClr val="000000"/>
-                </a:solidFill>
-                <a:latin typeface="Arial"/>
-              </a:rPr>
-              <a:t>008</a:t>
-            </a:r>
-          </a:p>
-        </p:txBody>
-      </p:sp>
-      <p:cxnSp>
-        <p:nvCxnSpPr>
-          <p:cNvPr id="86" name="Connector 85"/>
-          <p:cNvCxnSpPr/>
-          <p:nvPr/>
-        </p:nvCxnSpPr>
-        <p:spPr>
-          <a:xfrm>
-            <a:off x="4974336" y="3401568"/>
-            <a:ext cx="329184" cy="0"/>
-          </a:xfrm>
-          <a:prstGeom prst="line">
-            <a:avLst/>
-          </a:prstGeom>
-          <a:ln w="8890">
-            <a:solidFill>
-              <a:srgbClr val="000000"/>
-            </a:solidFill>
-          </a:ln>
-        </p:spPr>
-        <p:style>
-          <a:lnRef idx="2">
-            <a:schemeClr val="accent1"/>
-          </a:lnRef>
-          <a:fillRef idx="0">
-            <a:schemeClr val="accent1"/>
-          </a:fillRef>
-          <a:effectRef idx="1">
-            <a:schemeClr val="accent1"/>
-          </a:effectRef>
-          <a:fontRef idx="minor">
-            <a:schemeClr val="tx1"/>
-          </a:fontRef>
-        </p:style>
-      </p:cxnSp>
-      <p:cxnSp>
-        <p:nvCxnSpPr>
-          <p:cNvPr id="87" name="Connector 86"/>
-          <p:cNvCxnSpPr/>
-          <p:nvPr/>
-        </p:nvCxnSpPr>
-        <p:spPr>
-          <a:xfrm>
-            <a:off x="4736592" y="3639312"/>
-            <a:ext cx="201168" cy="0"/>
-          </a:xfrm>
-          <a:prstGeom prst="line">
-            <a:avLst/>
-          </a:prstGeom>
-          <a:ln w="8890">
-            <a:solidFill>
-              <a:srgbClr val="000000"/>
-            </a:solidFill>
-            <a:prstDash val="dash"/>
-          </a:ln>
-        </p:spPr>
-        <p:style>
-          <a:lnRef idx="2">
-            <a:schemeClr val="accent1"/>
-          </a:lnRef>
-          <a:fillRef idx="0">
-            <a:schemeClr val="accent1"/>
-          </a:fillRef>
-          <a:effectRef idx="1">
-            <a:schemeClr val="accent1"/>
-          </a:effectRef>
-          <a:fontRef idx="minor">
-            <a:schemeClr val="tx1"/>
-          </a:fontRef>
-        </p:style>
-      </p:cxnSp>
-      <p:sp>
-        <p:nvSpPr>
-          <p:cNvPr id="88" name="Oval 87"/>
-          <p:cNvSpPr/>
-          <p:nvPr/>
-        </p:nvSpPr>
-        <p:spPr>
-          <a:xfrm>
-            <a:off x="5230368" y="3904488"/>
-            <a:ext cx="329184" cy="329184"/>
-          </a:xfrm>
-          <a:prstGeom prst="ellipse">
-            <a:avLst/>
-          </a:prstGeom>
-          <a:solidFill>
-            <a:srgbClr val="FFFFFF"/>
-          </a:solidFill>
-          <a:ln w="13970">
-            <a:solidFill>
-              <a:srgbClr val="000000"/>
-            </a:solidFill>
-          </a:ln>
-          <a:effectLst/>
-        </p:spPr>
-        <p:style>
-          <a:lnRef idx="1">
-            <a:schemeClr val="accent1"/>
-          </a:lnRef>
-          <a:fillRef idx="3">
-            <a:schemeClr val="accent1"/>
-          </a:fillRef>
-          <a:effectRef idx="2">
-            <a:schemeClr val="accent1"/>
-          </a:effectRef>
-          <a:fontRef idx="minor">
-            <a:schemeClr val="lt1"/>
-          </a:fontRef>
-        </p:style>
-        <p:txBody>
-          <a:bodyPr rtlCol="0" anchor="ctr" wrap="none" lIns="0" rIns="0" tIns="0" bIns="0"/>
-          <a:lstStyle/>
-          <a:p>
-            <a:pPr algn="ctr"/>
-            <a:r>
-              <a:rPr sz="550" b="1">
-                <a:solidFill>
-                  <a:srgbClr val="000000"/>
-                </a:solidFill>
-                <a:latin typeface="Arial"/>
-              </a:rPr>
-              <a:t>FIC</a:t>
-            </a:r>
-          </a:p>
-          <a:p>
-            <a:pPr algn="ctr"/>
-            <a:r>
-              <a:rPr sz="550" b="1">
-                <a:solidFill>
-                  <a:srgbClr val="000000"/>
-                </a:solidFill>
-                <a:latin typeface="Arial"/>
-              </a:rPr>
-              <a:t>003</a:t>
-            </a:r>
-          </a:p>
-        </p:txBody>
-      </p:sp>
-      <p:cxnSp>
-        <p:nvCxnSpPr>
           <p:cNvPr id="89" name="Connector 88"/>
           <p:cNvCxnSpPr/>
           <p:nvPr/>
         </p:nvCxnSpPr>
         <p:spPr>
           <a:xfrm>
-            <a:off x="5230368" y="4069080"/>
+            <a:off x="4407408" y="3639312"/>
             <a:ext cx="329184" cy="0"/>
           </a:xfrm>
           <a:prstGeom prst="line">
@@ -6992,6 +7011,328 @@
         </p:nvCxnSpPr>
         <p:spPr>
           <a:xfrm flipV="1">
+            <a:off x="4572000" y="3803904"/>
+            <a:ext cx="0" cy="237744"/>
+          </a:xfrm>
+          <a:prstGeom prst="line">
+            <a:avLst/>
+          </a:prstGeom>
+          <a:ln w="8890">
+            <a:solidFill>
+              <a:srgbClr val="000000"/>
+            </a:solidFill>
+            <a:prstDash val="dash"/>
+          </a:ln>
+        </p:spPr>
+        <p:style>
+          <a:lnRef idx="2">
+            <a:schemeClr val="accent1"/>
+          </a:lnRef>
+          <a:fillRef idx="0">
+            <a:schemeClr val="accent1"/>
+          </a:fillRef>
+          <a:effectRef idx="1">
+            <a:schemeClr val="accent1"/>
+          </a:effectRef>
+          <a:fontRef idx="minor">
+            <a:schemeClr val="tx1"/>
+          </a:fontRef>
+        </p:style>
+      </p:cxnSp>
+      <p:sp>
+        <p:nvSpPr>
+          <p:cNvPr id="91" name="Rectangle 90"/>
+          <p:cNvSpPr/>
+          <p:nvPr/>
+        </p:nvSpPr>
+        <p:spPr>
+          <a:xfrm>
+            <a:off x="4937760" y="3200400"/>
+            <a:ext cx="402336" cy="402336"/>
+          </a:xfrm>
+          <a:prstGeom prst="rect">
+            <a:avLst/>
+          </a:prstGeom>
+          <a:solidFill>
+            <a:srgbClr val="FFFFFF"/>
+          </a:solidFill>
+          <a:ln w="8890">
+            <a:solidFill>
+              <a:srgbClr val="000000"/>
+            </a:solidFill>
+          </a:ln>
+          <a:effectLst/>
+        </p:spPr>
+        <p:style>
+          <a:lnRef idx="1">
+            <a:schemeClr val="accent1"/>
+          </a:lnRef>
+          <a:fillRef idx="3">
+            <a:schemeClr val="accent1"/>
+          </a:fillRef>
+          <a:effectRef idx="2">
+            <a:schemeClr val="accent1"/>
+          </a:effectRef>
+          <a:fontRef idx="minor">
+            <a:schemeClr val="lt1"/>
+          </a:fontRef>
+        </p:style>
+        <p:txBody>
+          <a:bodyPr rtlCol="0" anchor="ctr"/>
+          <a:lstStyle/>
+          <a:p>
+            <a:pPr algn="ctr"/>
+          </a:p>
+        </p:txBody>
+      </p:sp>
+      <p:sp>
+        <p:nvSpPr>
+          <p:cNvPr id="92" name="Oval 91"/>
+          <p:cNvSpPr/>
+          <p:nvPr/>
+        </p:nvSpPr>
+        <p:spPr>
+          <a:xfrm>
+            <a:off x="4974336" y="3236976"/>
+            <a:ext cx="329184" cy="329184"/>
+          </a:xfrm>
+          <a:prstGeom prst="ellipse">
+            <a:avLst/>
+          </a:prstGeom>
+          <a:solidFill>
+            <a:srgbClr val="FFFFFF"/>
+          </a:solidFill>
+          <a:ln w="13970">
+            <a:solidFill>
+              <a:srgbClr val="000000"/>
+            </a:solidFill>
+          </a:ln>
+          <a:effectLst/>
+        </p:spPr>
+        <p:style>
+          <a:lnRef idx="1">
+            <a:schemeClr val="accent1"/>
+          </a:lnRef>
+          <a:fillRef idx="3">
+            <a:schemeClr val="accent1"/>
+          </a:fillRef>
+          <a:effectRef idx="2">
+            <a:schemeClr val="accent1"/>
+          </a:effectRef>
+          <a:fontRef idx="minor">
+            <a:schemeClr val="lt1"/>
+          </a:fontRef>
+        </p:style>
+        <p:txBody>
+          <a:bodyPr rtlCol="0" anchor="ctr" wrap="none" lIns="0" rIns="0" tIns="0" bIns="0"/>
+          <a:lstStyle/>
+          <a:p>
+            <a:pPr algn="ctr"/>
+            <a:r>
+              <a:rPr sz="550" b="1">
+                <a:solidFill>
+                  <a:srgbClr val="000000"/>
+                </a:solidFill>
+                <a:latin typeface="Arial"/>
+              </a:rPr>
+              <a:t>FSLL</a:t>
+            </a:r>
+          </a:p>
+          <a:p>
+            <a:pPr algn="ctr"/>
+            <a:r>
+              <a:rPr sz="550" b="1">
+                <a:solidFill>
+                  <a:srgbClr val="000000"/>
+                </a:solidFill>
+                <a:latin typeface="Arial"/>
+              </a:rPr>
+              <a:t>008</a:t>
+            </a:r>
+          </a:p>
+        </p:txBody>
+      </p:sp>
+      <p:cxnSp>
+        <p:nvCxnSpPr>
+          <p:cNvPr id="93" name="Connector 92"/>
+          <p:cNvCxnSpPr/>
+          <p:nvPr/>
+        </p:nvCxnSpPr>
+        <p:spPr>
+          <a:xfrm>
+            <a:off x="4974336" y="3401568"/>
+            <a:ext cx="329184" cy="0"/>
+          </a:xfrm>
+          <a:prstGeom prst="line">
+            <a:avLst/>
+          </a:prstGeom>
+          <a:ln w="8890">
+            <a:solidFill>
+              <a:srgbClr val="000000"/>
+            </a:solidFill>
+          </a:ln>
+        </p:spPr>
+        <p:style>
+          <a:lnRef idx="2">
+            <a:schemeClr val="accent1"/>
+          </a:lnRef>
+          <a:fillRef idx="0">
+            <a:schemeClr val="accent1"/>
+          </a:fillRef>
+          <a:effectRef idx="1">
+            <a:schemeClr val="accent1"/>
+          </a:effectRef>
+          <a:fontRef idx="minor">
+            <a:schemeClr val="tx1"/>
+          </a:fontRef>
+        </p:style>
+      </p:cxnSp>
+      <p:cxnSp>
+        <p:nvCxnSpPr>
+          <p:cNvPr id="94" name="Connector 93"/>
+          <p:cNvCxnSpPr/>
+          <p:nvPr/>
+        </p:nvCxnSpPr>
+        <p:spPr>
+          <a:xfrm>
+            <a:off x="4736592" y="3639312"/>
+            <a:ext cx="201168" cy="0"/>
+          </a:xfrm>
+          <a:prstGeom prst="line">
+            <a:avLst/>
+          </a:prstGeom>
+          <a:ln w="8890">
+            <a:solidFill>
+              <a:srgbClr val="000000"/>
+            </a:solidFill>
+            <a:prstDash val="dash"/>
+          </a:ln>
+        </p:spPr>
+        <p:style>
+          <a:lnRef idx="2">
+            <a:schemeClr val="accent1"/>
+          </a:lnRef>
+          <a:fillRef idx="0">
+            <a:schemeClr val="accent1"/>
+          </a:fillRef>
+          <a:effectRef idx="1">
+            <a:schemeClr val="accent1"/>
+          </a:effectRef>
+          <a:fontRef idx="minor">
+            <a:schemeClr val="tx1"/>
+          </a:fontRef>
+        </p:style>
+      </p:cxnSp>
+      <p:sp>
+        <p:nvSpPr>
+          <p:cNvPr id="95" name="Oval 94"/>
+          <p:cNvSpPr/>
+          <p:nvPr/>
+        </p:nvSpPr>
+        <p:spPr>
+          <a:xfrm>
+            <a:off x="5230368" y="3904488"/>
+            <a:ext cx="329184" cy="329184"/>
+          </a:xfrm>
+          <a:prstGeom prst="ellipse">
+            <a:avLst/>
+          </a:prstGeom>
+          <a:solidFill>
+            <a:srgbClr val="FFFFFF"/>
+          </a:solidFill>
+          <a:ln w="13970">
+            <a:solidFill>
+              <a:srgbClr val="000000"/>
+            </a:solidFill>
+          </a:ln>
+          <a:effectLst/>
+        </p:spPr>
+        <p:style>
+          <a:lnRef idx="1">
+            <a:schemeClr val="accent1"/>
+          </a:lnRef>
+          <a:fillRef idx="3">
+            <a:schemeClr val="accent1"/>
+          </a:fillRef>
+          <a:effectRef idx="2">
+            <a:schemeClr val="accent1"/>
+          </a:effectRef>
+          <a:fontRef idx="minor">
+            <a:schemeClr val="lt1"/>
+          </a:fontRef>
+        </p:style>
+        <p:txBody>
+          <a:bodyPr rtlCol="0" anchor="ctr" wrap="none" lIns="0" rIns="0" tIns="0" bIns="0"/>
+          <a:lstStyle/>
+          <a:p>
+            <a:pPr algn="ctr"/>
+            <a:r>
+              <a:rPr sz="550" b="1">
+                <a:solidFill>
+                  <a:srgbClr val="000000"/>
+                </a:solidFill>
+                <a:latin typeface="Arial"/>
+              </a:rPr>
+              <a:t>FIC</a:t>
+            </a:r>
+          </a:p>
+          <a:p>
+            <a:pPr algn="ctr"/>
+            <a:r>
+              <a:rPr sz="550" b="1">
+                <a:solidFill>
+                  <a:srgbClr val="000000"/>
+                </a:solidFill>
+                <a:latin typeface="Arial"/>
+              </a:rPr>
+              <a:t>003</a:t>
+            </a:r>
+          </a:p>
+        </p:txBody>
+      </p:sp>
+      <p:cxnSp>
+        <p:nvCxnSpPr>
+          <p:cNvPr id="96" name="Connector 95"/>
+          <p:cNvCxnSpPr/>
+          <p:nvPr/>
+        </p:nvCxnSpPr>
+        <p:spPr>
+          <a:xfrm>
+            <a:off x="5230368" y="4069080"/>
+            <a:ext cx="329184" cy="0"/>
+          </a:xfrm>
+          <a:prstGeom prst="line">
+            <a:avLst/>
+          </a:prstGeom>
+          <a:ln w="8890">
+            <a:solidFill>
+              <a:srgbClr val="000000"/>
+            </a:solidFill>
+          </a:ln>
+        </p:spPr>
+        <p:style>
+          <a:lnRef idx="2">
+            <a:schemeClr val="accent1"/>
+          </a:lnRef>
+          <a:fillRef idx="0">
+            <a:schemeClr val="accent1"/>
+          </a:fillRef>
+          <a:effectRef idx="1">
+            <a:schemeClr val="accent1"/>
+          </a:effectRef>
+          <a:fontRef idx="minor">
+            <a:schemeClr val="tx1"/>
+          </a:fontRef>
+        </p:style>
+      </p:cxnSp>
+      <p:cxnSp>
+        <p:nvCxnSpPr>
+          <p:cNvPr id="97" name="Connector 96"/>
+          <p:cNvCxnSpPr/>
+          <p:nvPr/>
+        </p:nvCxnSpPr>
+        <p:spPr>
+          <a:xfrm flipV="1">
             <a:off x="4736592" y="4133087"/>
             <a:ext cx="493776" cy="73153"/>
           </a:xfrm>
@@ -7022,7 +7363,7 @@
       </p:cxnSp>
       <p:sp>
         <p:nvSpPr>
-          <p:cNvPr id="91" name="Freeform 90"/>
+          <p:cNvPr id="98" name="Freeform 97"/>
           <p:cNvSpPr/>
           <p:nvPr/>
         </p:nvSpPr>
@@ -7089,7 +7430,7 @@
       </p:sp>
       <p:sp>
         <p:nvSpPr>
-          <p:cNvPr id="92" name="TextBox 91"/>
+          <p:cNvPr id="99" name="TextBox 98"/>
           <p:cNvSpPr txBox="1"/>
           <p:nvPr/>
         </p:nvSpPr>
@@ -7124,7 +7465,7 @@
       </p:sp>
       <p:sp>
         <p:nvSpPr>
-          <p:cNvPr id="93" name="Freeform 92"/>
+          <p:cNvPr id="100" name="Freeform 99"/>
           <p:cNvSpPr/>
           <p:nvPr/>
         </p:nvSpPr>
@@ -7191,7 +7532,7 @@
       </p:sp>
       <p:cxnSp>
         <p:nvCxnSpPr>
-          <p:cNvPr id="94" name="Connector 93"/>
+          <p:cNvPr id="101" name="Connector 100"/>
           <p:cNvCxnSpPr/>
           <p:nvPr/>
         </p:nvCxnSpPr>
@@ -7226,7 +7567,7 @@
       </p:cxnSp>
       <p:sp>
         <p:nvSpPr>
-          <p:cNvPr id="95" name="Freeform 94"/>
+          <p:cNvPr id="102" name="Freeform 101"/>
           <p:cNvSpPr/>
           <p:nvPr/>
         </p:nvSpPr>
@@ -7311,7 +7652,7 @@
       </p:sp>
       <p:sp>
         <p:nvSpPr>
-          <p:cNvPr id="96" name="TextBox 95"/>
+          <p:cNvPr id="103" name="TextBox 102"/>
           <p:cNvSpPr txBox="1"/>
           <p:nvPr/>
         </p:nvSpPr>
@@ -7346,7 +7687,7 @@
       </p:sp>
       <p:cxnSp>
         <p:nvCxnSpPr>
-          <p:cNvPr id="97" name="Connector 96"/>
+          <p:cNvPr id="104" name="Connector 103"/>
           <p:cNvCxnSpPr/>
           <p:nvPr/>
         </p:nvCxnSpPr>
@@ -7382,7 +7723,7 @@
       </p:cxnSp>
       <p:sp>
         <p:nvSpPr>
-          <p:cNvPr id="98" name="Freeform 97"/>
+          <p:cNvPr id="105" name="Freeform 104"/>
           <p:cNvSpPr/>
           <p:nvPr/>
         </p:nvSpPr>
@@ -7449,7 +7790,7 @@
       </p:sp>
       <p:sp>
         <p:nvSpPr>
-          <p:cNvPr id="99" name="TextBox 98"/>
+          <p:cNvPr id="106" name="TextBox 105"/>
           <p:cNvSpPr txBox="1"/>
           <p:nvPr/>
         </p:nvSpPr>
@@ -7484,7 +7825,7 @@
       </p:sp>
       <p:sp>
         <p:nvSpPr>
-          <p:cNvPr id="100" name="Oval 99"/>
+          <p:cNvPr id="107" name="Oval 106"/>
           <p:cNvSpPr/>
           <p:nvPr/>
         </p:nvSpPr>
@@ -7530,7 +7871,7 @@
       </p:sp>
       <p:sp>
         <p:nvSpPr>
-          <p:cNvPr id="101" name="Oval 100"/>
+          <p:cNvPr id="108" name="Oval 107"/>
           <p:cNvSpPr/>
           <p:nvPr/>
         </p:nvSpPr>
@@ -7576,7 +7917,7 @@
       </p:sp>
       <p:cxnSp>
         <p:nvCxnSpPr>
-          <p:cNvPr id="102" name="Connector 101"/>
+          <p:cNvPr id="109" name="Connector 108"/>
           <p:cNvCxnSpPr/>
           <p:nvPr/>
         </p:nvCxnSpPr>
@@ -7611,7 +7952,7 @@
       </p:cxnSp>
       <p:cxnSp>
         <p:nvCxnSpPr>
-          <p:cNvPr id="103" name="Connector 102"/>
+          <p:cNvPr id="110" name="Connector 109"/>
           <p:cNvCxnSpPr/>
           <p:nvPr/>
         </p:nvCxnSpPr>
@@ -7646,7 +7987,7 @@
       </p:cxnSp>
       <p:cxnSp>
         <p:nvCxnSpPr>
-          <p:cNvPr id="104" name="Connector 103"/>
+          <p:cNvPr id="111" name="Connector 110"/>
           <p:cNvCxnSpPr/>
           <p:nvPr/>
         </p:nvCxnSpPr>
@@ -7681,7 +8022,7 @@
       </p:cxnSp>
       <p:sp>
         <p:nvSpPr>
-          <p:cNvPr id="105" name="Freeform 104"/>
+          <p:cNvPr id="112" name="Freeform 111"/>
           <p:cNvSpPr/>
           <p:nvPr/>
         </p:nvSpPr>
@@ -7748,7 +8089,7 @@
       </p:sp>
       <p:sp>
         <p:nvSpPr>
-          <p:cNvPr id="106" name="TextBox 105"/>
+          <p:cNvPr id="113" name="TextBox 112"/>
           <p:cNvSpPr txBox="1"/>
           <p:nvPr/>
         </p:nvSpPr>
@@ -7783,7 +8124,7 @@
       </p:sp>
       <p:cxnSp>
         <p:nvCxnSpPr>
-          <p:cNvPr id="107" name="Connector 106"/>
+          <p:cNvPr id="114" name="Connector 113"/>
           <p:cNvCxnSpPr/>
           <p:nvPr/>
         </p:nvCxnSpPr>
@@ -7818,7 +8159,7 @@
       </p:cxnSp>
       <p:cxnSp>
         <p:nvCxnSpPr>
-          <p:cNvPr id="108" name="Connector 107"/>
+          <p:cNvPr id="115" name="Connector 114"/>
           <p:cNvCxnSpPr/>
           <p:nvPr/>
         </p:nvCxnSpPr>
@@ -7854,7 +8195,7 @@
       </p:cxnSp>
       <p:sp>
         <p:nvSpPr>
-          <p:cNvPr id="109" name="Oval 108"/>
+          <p:cNvPr id="116" name="Oval 115"/>
           <p:cNvSpPr/>
           <p:nvPr/>
         </p:nvSpPr>
@@ -7900,7 +8241,7 @@
       </p:sp>
       <p:cxnSp>
         <p:nvCxnSpPr>
-          <p:cNvPr id="110" name="Connector 109"/>
+          <p:cNvPr id="117" name="Connector 116"/>
           <p:cNvCxnSpPr/>
           <p:nvPr/>
         </p:nvCxnSpPr>
@@ -7935,7 +8276,7 @@
       </p:cxnSp>
       <p:sp>
         <p:nvSpPr>
-          <p:cNvPr id="111" name="Freeform 110"/>
+          <p:cNvPr id="118" name="Freeform 117"/>
           <p:cNvSpPr/>
           <p:nvPr/>
         </p:nvSpPr>
@@ -8002,7 +8343,7 @@
       </p:sp>
       <p:cxnSp>
         <p:nvCxnSpPr>
-          <p:cNvPr id="112" name="Connector 111"/>
+          <p:cNvPr id="119" name="Connector 118"/>
           <p:cNvCxnSpPr/>
           <p:nvPr/>
         </p:nvCxnSpPr>
@@ -8038,7 +8379,7 @@
       </p:cxnSp>
       <p:sp>
         <p:nvSpPr>
-          <p:cNvPr id="113" name="TextBox 112"/>
+          <p:cNvPr id="120" name="TextBox 119"/>
           <p:cNvSpPr txBox="1"/>
           <p:nvPr/>
         </p:nvSpPr>
@@ -8073,14 +8414,14 @@
       </p:sp>
       <p:sp>
         <p:nvSpPr>
-          <p:cNvPr id="114" name="TextBox 113"/>
+          <p:cNvPr id="121" name="TextBox 120"/>
           <p:cNvSpPr txBox="1"/>
           <p:nvPr/>
         </p:nvSpPr>
         <p:spPr>
           <a:xfrm>
-            <a:off x="5292344" y="3749039"/>
-            <a:ext cx="514096" cy="109728"/>
+            <a:off x="5943600" y="1810512"/>
+            <a:ext cx="538480" cy="109728"/>
           </a:xfrm>
           <a:prstGeom prst="rect">
             <a:avLst/>
@@ -8093,6 +8434,41 @@
           </a:bodyPr>
           <a:lstStyle/>
           <a:p>
+            <a:pPr algn="l"/>
+            <a:r>
+              <a:rPr sz="500" b="1">
+                <a:solidFill>
+                  <a:srgbClr val="000000"/>
+                </a:solidFill>
+                <a:latin typeface="Arial"/>
+              </a:rPr>
+              <a:t>V-108 NC</a:t>
+            </a:r>
+          </a:p>
+        </p:txBody>
+      </p:sp>
+      <p:sp>
+        <p:nvSpPr>
+          <p:cNvPr id="122" name="TextBox 121"/>
+          <p:cNvSpPr txBox="1"/>
+          <p:nvPr/>
+        </p:nvSpPr>
+        <p:spPr>
+          <a:xfrm>
+            <a:off x="5292344" y="3749039"/>
+            <a:ext cx="514096" cy="109728"/>
+          </a:xfrm>
+          <a:prstGeom prst="rect">
+            <a:avLst/>
+          </a:prstGeom>
+          <a:noFill/>
+        </p:spPr>
+        <p:txBody>
+          <a:bodyPr wrap="square" lIns="0" rIns="0" tIns="0" bIns="0" anchor="ctr">
+            <a:spAutoFit/>
+          </a:bodyPr>
+          <a:lstStyle/>
+          <a:p>
             <a:pPr algn="r"/>
             <a:r>
               <a:rPr sz="500" b="0">
@@ -8108,7 +8484,7 @@
       </p:sp>
       <p:sp>
         <p:nvSpPr>
-          <p:cNvPr id="115" name="Oval 114"/>
+          <p:cNvPr id="123" name="Oval 122"/>
           <p:cNvSpPr/>
           <p:nvPr/>
         </p:nvSpPr>
@@ -8154,7 +8530,7 @@
       </p:sp>
       <p:cxnSp>
         <p:nvCxnSpPr>
-          <p:cNvPr id="116" name="Connector 115"/>
+          <p:cNvPr id="124" name="Connector 123"/>
           <p:cNvCxnSpPr/>
           <p:nvPr/>
         </p:nvCxnSpPr>
@@ -8189,7 +8565,7 @@
       </p:cxnSp>
       <p:sp>
         <p:nvSpPr>
-          <p:cNvPr id="117" name="Oval 116"/>
+          <p:cNvPr id="125" name="Oval 124"/>
           <p:cNvSpPr/>
           <p:nvPr/>
         </p:nvSpPr>
@@ -8256,7 +8632,7 @@
       </p:sp>
       <p:sp>
         <p:nvSpPr>
-          <p:cNvPr id="118" name="Oval 117"/>
+          <p:cNvPr id="126" name="Oval 125"/>
           <p:cNvSpPr/>
           <p:nvPr/>
         </p:nvSpPr>
@@ -8302,7 +8678,7 @@
       </p:sp>
       <p:cxnSp>
         <p:nvCxnSpPr>
-          <p:cNvPr id="119" name="Connector 118"/>
+          <p:cNvPr id="127" name="Connector 126"/>
           <p:cNvCxnSpPr/>
           <p:nvPr/>
         </p:nvCxnSpPr>
@@ -8337,7 +8713,7 @@
       </p:cxnSp>
       <p:sp>
         <p:nvSpPr>
-          <p:cNvPr id="120" name="Oval 119"/>
+          <p:cNvPr id="128" name="Oval 127"/>
           <p:cNvSpPr/>
           <p:nvPr/>
         </p:nvSpPr>
@@ -8404,7 +8780,7 @@
       </p:sp>
       <p:sp>
         <p:nvSpPr>
-          <p:cNvPr id="121" name="Rectangle 120"/>
+          <p:cNvPr id="129" name="Rectangle 128"/>
           <p:cNvSpPr/>
           <p:nvPr/>
         </p:nvSpPr>
@@ -8450,7 +8826,7 @@
       </p:sp>
       <p:cxnSp>
         <p:nvCxnSpPr>
-          <p:cNvPr id="122" name="Connector 121"/>
+          <p:cNvPr id="130" name="Connector 129"/>
           <p:cNvCxnSpPr/>
           <p:nvPr/>
         </p:nvCxnSpPr>
@@ -8486,7 +8862,7 @@
       </p:cxnSp>
       <p:sp>
         <p:nvSpPr>
-          <p:cNvPr id="123" name="TextBox 122"/>
+          <p:cNvPr id="131" name="TextBox 130"/>
           <p:cNvSpPr txBox="1"/>
           <p:nvPr/>
         </p:nvSpPr>
@@ -8521,7 +8897,7 @@
       </p:sp>
       <p:sp>
         <p:nvSpPr>
-          <p:cNvPr id="124" name="Freeform 123"/>
+          <p:cNvPr id="132" name="Freeform 131"/>
           <p:cNvSpPr/>
           <p:nvPr/>
         </p:nvSpPr>
@@ -8588,7 +8964,7 @@
       </p:sp>
       <p:sp>
         <p:nvSpPr>
-          <p:cNvPr id="125" name="Rectangle 124"/>
+          <p:cNvPr id="133" name="Rectangle 132"/>
           <p:cNvSpPr/>
           <p:nvPr/>
         </p:nvSpPr>
@@ -8634,7 +9010,7 @@
       </p:sp>
       <p:sp>
         <p:nvSpPr>
-          <p:cNvPr id="126" name="Freeform 125"/>
+          <p:cNvPr id="134" name="Freeform 133"/>
           <p:cNvSpPr/>
           <p:nvPr/>
         </p:nvSpPr>
@@ -8701,7 +9077,7 @@
       </p:sp>
       <p:sp>
         <p:nvSpPr>
-          <p:cNvPr id="127" name="Rectangle 126"/>
+          <p:cNvPr id="135" name="Rectangle 134"/>
           <p:cNvSpPr/>
           <p:nvPr/>
         </p:nvSpPr>
@@ -8747,7 +9123,7 @@
       </p:sp>
       <p:cxnSp>
         <p:nvCxnSpPr>
-          <p:cNvPr id="128" name="Connector 127"/>
+          <p:cNvPr id="136" name="Connector 135"/>
           <p:cNvCxnSpPr/>
           <p:nvPr/>
         </p:nvCxnSpPr>
@@ -8782,7 +9158,7 @@
       </p:cxnSp>
       <p:sp>
         <p:nvSpPr>
-          <p:cNvPr id="129" name="Oval 128"/>
+          <p:cNvPr id="137" name="Oval 136"/>
           <p:cNvSpPr/>
           <p:nvPr/>
         </p:nvSpPr>
@@ -8828,7 +9204,7 @@
       </p:sp>
       <p:cxnSp>
         <p:nvCxnSpPr>
-          <p:cNvPr id="130" name="Connector 129"/>
+          <p:cNvPr id="138" name="Connector 137"/>
           <p:cNvCxnSpPr/>
           <p:nvPr/>
         </p:nvCxnSpPr>
@@ -8863,7 +9239,7 @@
       </p:cxnSp>
       <p:sp>
         <p:nvSpPr>
-          <p:cNvPr id="131" name="Rectangle 130"/>
+          <p:cNvPr id="139" name="Rectangle 138"/>
           <p:cNvSpPr/>
           <p:nvPr/>
         </p:nvSpPr>
@@ -8909,7 +9285,7 @@
       </p:sp>
       <p:sp>
         <p:nvSpPr>
-          <p:cNvPr id="132" name="TextBox 131"/>
+          <p:cNvPr id="140" name="TextBox 139"/>
           <p:cNvSpPr txBox="1"/>
           <p:nvPr/>
         </p:nvSpPr>
@@ -8944,7 +9320,7 @@
       </p:sp>
       <p:sp>
         <p:nvSpPr>
-          <p:cNvPr id="133" name="Oval 132"/>
+          <p:cNvPr id="141" name="Oval 140"/>
           <p:cNvSpPr/>
           <p:nvPr/>
         </p:nvSpPr>
@@ -9011,7 +9387,7 @@
       </p:sp>
       <p:cxnSp>
         <p:nvCxnSpPr>
-          <p:cNvPr id="134" name="Connector 133"/>
+          <p:cNvPr id="142" name="Connector 141"/>
           <p:cNvCxnSpPr/>
           <p:nvPr/>
         </p:nvCxnSpPr>
@@ -9046,7 +9422,7 @@
       </p:cxnSp>
       <p:cxnSp>
         <p:nvCxnSpPr>
-          <p:cNvPr id="135" name="Connector 134"/>
+          <p:cNvPr id="143" name="Connector 142"/>
           <p:cNvCxnSpPr/>
           <p:nvPr/>
         </p:nvCxnSpPr>
@@ -9082,7 +9458,7 @@
       </p:cxnSp>
       <p:sp>
         <p:nvSpPr>
-          <p:cNvPr id="136" name="Oval 135"/>
+          <p:cNvPr id="144" name="Oval 143"/>
           <p:cNvSpPr/>
           <p:nvPr/>
         </p:nvSpPr>
@@ -9128,7 +9504,7 @@
       </p:sp>
       <p:cxnSp>
         <p:nvCxnSpPr>
-          <p:cNvPr id="137" name="Connector 136"/>
+          <p:cNvPr id="145" name="Connector 144"/>
           <p:cNvCxnSpPr/>
           <p:nvPr/>
         </p:nvCxnSpPr>
@@ -9163,7 +9539,7 @@
       </p:cxnSp>
       <p:sp>
         <p:nvSpPr>
-          <p:cNvPr id="138" name="Oval 137"/>
+          <p:cNvPr id="146" name="Oval 145"/>
           <p:cNvSpPr/>
           <p:nvPr/>
         </p:nvSpPr>
@@ -9230,7 +9606,7 @@
       </p:sp>
       <p:sp>
         <p:nvSpPr>
-          <p:cNvPr id="139" name="TextBox 138"/>
+          <p:cNvPr id="147" name="TextBox 146"/>
           <p:cNvSpPr txBox="1"/>
           <p:nvPr/>
         </p:nvSpPr>
@@ -9265,7 +9641,7 @@
       </p:sp>
       <p:sp>
         <p:nvSpPr>
-          <p:cNvPr id="140" name="Oval 139"/>
+          <p:cNvPr id="148" name="Oval 147"/>
           <p:cNvSpPr/>
           <p:nvPr/>
         </p:nvSpPr>
@@ -9311,7 +9687,7 @@
       </p:sp>
       <p:cxnSp>
         <p:nvCxnSpPr>
-          <p:cNvPr id="141" name="Connector 140"/>
+          <p:cNvPr id="149" name="Connector 148"/>
           <p:cNvCxnSpPr/>
           <p:nvPr/>
         </p:nvCxnSpPr>
@@ -9346,7 +9722,7 @@
       </p:cxnSp>
       <p:sp>
         <p:nvSpPr>
-          <p:cNvPr id="142" name="Oval 141"/>
+          <p:cNvPr id="150" name="Oval 149"/>
           <p:cNvSpPr/>
           <p:nvPr/>
         </p:nvSpPr>
@@ -9413,7 +9789,7 @@
       </p:sp>
       <p:sp>
         <p:nvSpPr>
-          <p:cNvPr id="143" name="Oval 142"/>
+          <p:cNvPr id="151" name="Oval 150"/>
           <p:cNvSpPr/>
           <p:nvPr/>
         </p:nvSpPr>
@@ -9459,7 +9835,7 @@
       </p:sp>
       <p:cxnSp>
         <p:nvCxnSpPr>
-          <p:cNvPr id="144" name="Connector 143"/>
+          <p:cNvPr id="152" name="Connector 151"/>
           <p:cNvCxnSpPr/>
           <p:nvPr/>
         </p:nvCxnSpPr>
@@ -9494,7 +9870,7 @@
       </p:cxnSp>
       <p:sp>
         <p:nvSpPr>
-          <p:cNvPr id="145" name="Oval 144"/>
+          <p:cNvPr id="153" name="Oval 152"/>
           <p:cNvSpPr/>
           <p:nvPr/>
         </p:nvSpPr>
@@ -9561,7 +9937,7 @@
       </p:sp>
       <p:sp>
         <p:nvSpPr>
-          <p:cNvPr id="146" name="Oval 145"/>
+          <p:cNvPr id="154" name="Oval 153"/>
           <p:cNvSpPr/>
           <p:nvPr/>
         </p:nvSpPr>
@@ -9607,7 +9983,7 @@
       </p:sp>
       <p:cxnSp>
         <p:nvCxnSpPr>
-          <p:cNvPr id="147" name="Connector 146"/>
+          <p:cNvPr id="155" name="Connector 154"/>
           <p:cNvCxnSpPr/>
           <p:nvPr/>
         </p:nvCxnSpPr>
@@ -9642,7 +10018,7 @@
       </p:cxnSp>
       <p:sp>
         <p:nvSpPr>
-          <p:cNvPr id="148" name="Oval 147"/>
+          <p:cNvPr id="156" name="Oval 155"/>
           <p:cNvSpPr/>
           <p:nvPr/>
         </p:nvSpPr>
@@ -9709,7 +10085,7 @@
       </p:sp>
       <p:sp>
         <p:nvSpPr>
-          <p:cNvPr id="149" name="TextBox 148"/>
+          <p:cNvPr id="157" name="TextBox 156"/>
           <p:cNvSpPr txBox="1"/>
           <p:nvPr/>
         </p:nvSpPr>
@@ -9744,7 +10120,7 @@
       </p:sp>
       <p:sp>
         <p:nvSpPr>
-          <p:cNvPr id="150" name="TextBox 149"/>
+          <p:cNvPr id="158" name="TextBox 157"/>
           <p:cNvSpPr txBox="1"/>
           <p:nvPr/>
         </p:nvSpPr>
@@ -9779,7 +10155,7 @@
       </p:sp>
       <p:sp>
         <p:nvSpPr>
-          <p:cNvPr id="151" name="Freeform 150"/>
+          <p:cNvPr id="159" name="Freeform 158"/>
           <p:cNvSpPr/>
           <p:nvPr/>
         </p:nvSpPr>
@@ -9849,7 +10225,7 @@
       </p:sp>
       <p:sp>
         <p:nvSpPr>
-          <p:cNvPr id="152" name="TextBox 151"/>
+          <p:cNvPr id="160" name="TextBox 159"/>
           <p:cNvSpPr txBox="1"/>
           <p:nvPr/>
         </p:nvSpPr>
@@ -9884,7 +10260,7 @@
       </p:sp>
       <p:sp>
         <p:nvSpPr>
-          <p:cNvPr id="153" name="Oval 152"/>
+          <p:cNvPr id="161" name="Oval 160"/>
           <p:cNvSpPr/>
           <p:nvPr/>
         </p:nvSpPr>
@@ -9930,7 +10306,7 @@
       </p:sp>
       <p:cxnSp>
         <p:nvCxnSpPr>
-          <p:cNvPr id="154" name="Connector 153"/>
+          <p:cNvPr id="162" name="Connector 161"/>
           <p:cNvCxnSpPr/>
           <p:nvPr/>
         </p:nvCxnSpPr>
@@ -9965,7 +10341,7 @@
       </p:cxnSp>
       <p:sp>
         <p:nvSpPr>
-          <p:cNvPr id="155" name="Oval 154"/>
+          <p:cNvPr id="163" name="Oval 162"/>
           <p:cNvSpPr/>
           <p:nvPr/>
         </p:nvSpPr>
@@ -10032,7 +10408,7 @@
       </p:sp>
       <p:cxnSp>
         <p:nvCxnSpPr>
-          <p:cNvPr id="156" name="Connector 155"/>
+          <p:cNvPr id="164" name="Connector 163"/>
           <p:cNvCxnSpPr/>
           <p:nvPr/>
         </p:nvCxnSpPr>
@@ -10067,7 +10443,7 @@
       </p:cxnSp>
       <p:cxnSp>
         <p:nvCxnSpPr>
-          <p:cNvPr id="157" name="Connector 156"/>
+          <p:cNvPr id="165" name="Connector 164"/>
           <p:cNvCxnSpPr/>
           <p:nvPr/>
         </p:nvCxnSpPr>
@@ -10102,7 +10478,7 @@
       </p:cxnSp>
       <p:cxnSp>
         <p:nvCxnSpPr>
-          <p:cNvPr id="158" name="Connector 157"/>
+          <p:cNvPr id="166" name="Connector 165"/>
           <p:cNvCxnSpPr/>
           <p:nvPr/>
         </p:nvCxnSpPr>
@@ -10138,7 +10514,7 @@
       </p:cxnSp>
       <p:sp>
         <p:nvSpPr>
-          <p:cNvPr id="159" name="TextBox 158"/>
+          <p:cNvPr id="167" name="TextBox 166"/>
           <p:cNvSpPr txBox="1"/>
           <p:nvPr/>
         </p:nvSpPr>
@@ -10173,7 +10549,7 @@
       </p:sp>
       <p:sp>
         <p:nvSpPr>
-          <p:cNvPr id="160" name="Oval 159"/>
+          <p:cNvPr id="168" name="Oval 167"/>
           <p:cNvSpPr/>
           <p:nvPr/>
         </p:nvSpPr>
@@ -10219,7 +10595,7 @@
       </p:sp>
       <p:cxnSp>
         <p:nvCxnSpPr>
-          <p:cNvPr id="161" name="Connector 160"/>
+          <p:cNvPr id="169" name="Connector 168"/>
           <p:cNvCxnSpPr/>
           <p:nvPr/>
         </p:nvCxnSpPr>
@@ -10254,7 +10630,7 @@
       </p:cxnSp>
       <p:sp>
         <p:nvSpPr>
-          <p:cNvPr id="162" name="Oval 161"/>
+          <p:cNvPr id="170" name="Oval 169"/>
           <p:cNvSpPr/>
           <p:nvPr/>
         </p:nvSpPr>
@@ -10321,7 +10697,7 @@
       </p:sp>
       <p:sp>
         <p:nvSpPr>
-          <p:cNvPr id="163" name="Freeform 162"/>
+          <p:cNvPr id="171" name="Freeform 170"/>
           <p:cNvSpPr/>
           <p:nvPr/>
         </p:nvSpPr>
@@ -10475,7 +10851,7 @@
       </p:sp>
       <p:sp>
         <p:nvSpPr>
-          <p:cNvPr id="164" name="TextBox 163"/>
+          <p:cNvPr id="172" name="TextBox 171"/>
           <p:cNvSpPr txBox="1"/>
           <p:nvPr/>
         </p:nvSpPr>
@@ -10510,7 +10886,7 @@
       </p:sp>
       <p:sp>
         <p:nvSpPr>
-          <p:cNvPr id="165" name="TextBox 164"/>
+          <p:cNvPr id="173" name="TextBox 172"/>
           <p:cNvSpPr txBox="1"/>
           <p:nvPr/>
         </p:nvSpPr>
@@ -10545,7 +10921,7 @@
       </p:sp>
       <p:sp>
         <p:nvSpPr>
-          <p:cNvPr id="166" name="TextBox 165"/>
+          <p:cNvPr id="174" name="TextBox 173"/>
           <p:cNvSpPr txBox="1"/>
           <p:nvPr/>
         </p:nvSpPr>
@@ -10580,7 +10956,7 @@
       </p:sp>
       <p:sp>
         <p:nvSpPr>
-          <p:cNvPr id="167" name="TextBox 166"/>
+          <p:cNvPr id="175" name="TextBox 174"/>
           <p:cNvSpPr txBox="1"/>
           <p:nvPr/>
         </p:nvSpPr>
@@ -10615,7 +10991,7 @@
       </p:sp>
       <p:sp>
         <p:nvSpPr>
-          <p:cNvPr id="168" name="TextBox 167"/>
+          <p:cNvPr id="176" name="TextBox 175"/>
           <p:cNvSpPr txBox="1"/>
           <p:nvPr/>
         </p:nvSpPr>
@@ -10650,7 +11026,7 @@
       </p:sp>
       <p:sp>
         <p:nvSpPr>
-          <p:cNvPr id="169" name="TextBox 168"/>
+          <p:cNvPr id="177" name="TextBox 176"/>
           <p:cNvSpPr txBox="1"/>
           <p:nvPr/>
         </p:nvSpPr>
@@ -10685,7 +11061,7 @@
       </p:sp>
       <p:sp>
         <p:nvSpPr>
-          <p:cNvPr id="170" name="Rectangle 169"/>
+          <p:cNvPr id="178" name="Rectangle 177"/>
           <p:cNvSpPr/>
           <p:nvPr/>
         </p:nvSpPr>
@@ -10731,7 +11107,7 @@
       </p:sp>
       <p:sp>
         <p:nvSpPr>
-          <p:cNvPr id="171" name="TextBox 170"/>
+          <p:cNvPr id="179" name="TextBox 178"/>
           <p:cNvSpPr txBox="1"/>
           <p:nvPr/>
         </p:nvSpPr>
@@ -10766,7 +11142,7 @@
       </p:sp>
       <p:sp>
         <p:nvSpPr>
-          <p:cNvPr id="172" name="Freeform 171"/>
+          <p:cNvPr id="180" name="Freeform 179"/>
           <p:cNvSpPr/>
           <p:nvPr/>
         </p:nvSpPr>
@@ -10827,7 +11203,7 @@
       </p:sp>
       <p:sp>
         <p:nvSpPr>
-          <p:cNvPr id="173" name="Rectangle 172"/>
+          <p:cNvPr id="181" name="Rectangle 180"/>
           <p:cNvSpPr/>
           <p:nvPr/>
         </p:nvSpPr>
@@ -10873,7 +11249,7 @@
       </p:sp>
       <p:sp>
         <p:nvSpPr>
-          <p:cNvPr id="174" name="TextBox 173"/>
+          <p:cNvPr id="182" name="TextBox 181"/>
           <p:cNvSpPr txBox="1"/>
           <p:nvPr/>
         </p:nvSpPr>
@@ -10908,7 +11284,7 @@
       </p:sp>
       <p:sp>
         <p:nvSpPr>
-          <p:cNvPr id="175" name="Oval 174"/>
+          <p:cNvPr id="183" name="Oval 182"/>
           <p:cNvSpPr/>
           <p:nvPr/>
         </p:nvSpPr>
@@ -10954,7 +11330,7 @@
       </p:sp>
       <p:cxnSp>
         <p:nvCxnSpPr>
-          <p:cNvPr id="176" name="Connector 175"/>
+          <p:cNvPr id="184" name="Connector 183"/>
           <p:cNvCxnSpPr/>
           <p:nvPr/>
         </p:nvCxnSpPr>
@@ -10989,7 +11365,7 @@
       </p:cxnSp>
       <p:sp>
         <p:nvSpPr>
-          <p:cNvPr id="177" name="Oval 176"/>
+          <p:cNvPr id="185" name="Oval 184"/>
           <p:cNvSpPr/>
           <p:nvPr/>
         </p:nvSpPr>
@@ -11056,7 +11432,7 @@
       </p:sp>
       <p:sp>
         <p:nvSpPr>
-          <p:cNvPr id="178" name="Oval 177"/>
+          <p:cNvPr id="186" name="Oval 185"/>
           <p:cNvSpPr/>
           <p:nvPr/>
         </p:nvSpPr>
@@ -11102,7 +11478,7 @@
       </p:sp>
       <p:cxnSp>
         <p:nvCxnSpPr>
-          <p:cNvPr id="179" name="Connector 178"/>
+          <p:cNvPr id="187" name="Connector 186"/>
           <p:cNvCxnSpPr/>
           <p:nvPr/>
         </p:nvCxnSpPr>
@@ -11137,7 +11513,7 @@
       </p:cxnSp>
       <p:sp>
         <p:nvSpPr>
-          <p:cNvPr id="180" name="Oval 179"/>
+          <p:cNvPr id="188" name="Oval 187"/>
           <p:cNvSpPr/>
           <p:nvPr/>
         </p:nvSpPr>
@@ -11204,7 +11580,7 @@
       </p:sp>
       <p:sp>
         <p:nvSpPr>
-          <p:cNvPr id="181" name="Oval 180"/>
+          <p:cNvPr id="189" name="Oval 188"/>
           <p:cNvSpPr/>
           <p:nvPr/>
         </p:nvSpPr>
@@ -11250,7 +11626,7 @@
       </p:sp>
       <p:cxnSp>
         <p:nvCxnSpPr>
-          <p:cNvPr id="182" name="Connector 181"/>
+          <p:cNvPr id="190" name="Connector 189"/>
           <p:cNvCxnSpPr/>
           <p:nvPr/>
         </p:nvCxnSpPr>
@@ -11285,7 +11661,7 @@
       </p:cxnSp>
       <p:sp>
         <p:nvSpPr>
-          <p:cNvPr id="183" name="Oval 182"/>
+          <p:cNvPr id="191" name="Oval 190"/>
           <p:cNvSpPr/>
           <p:nvPr/>
         </p:nvSpPr>
@@ -11352,7 +11728,7 @@
       </p:sp>
       <p:sp>
         <p:nvSpPr>
-          <p:cNvPr id="184" name="Rectangle 183"/>
+          <p:cNvPr id="192" name="Rectangle 191"/>
           <p:cNvSpPr/>
           <p:nvPr/>
         </p:nvSpPr>
@@ -11398,7 +11774,7 @@
       </p:sp>
       <p:sp>
         <p:nvSpPr>
-          <p:cNvPr id="185" name="TextBox 184"/>
+          <p:cNvPr id="193" name="TextBox 192"/>
           <p:cNvSpPr txBox="1"/>
           <p:nvPr/>
         </p:nvSpPr>
@@ -11433,7 +11809,7 @@
       </p:sp>
       <p:sp>
         <p:nvSpPr>
-          <p:cNvPr id="186" name="TextBox 185"/>
+          <p:cNvPr id="194" name="TextBox 193"/>
           <p:cNvSpPr txBox="1"/>
           <p:nvPr/>
         </p:nvSpPr>
@@ -11468,7 +11844,7 @@
       </p:sp>
       <p:sp>
         <p:nvSpPr>
-          <p:cNvPr id="187" name="Rectangle 186"/>
+          <p:cNvPr id="195" name="Rectangle 194"/>
           <p:cNvSpPr/>
           <p:nvPr/>
         </p:nvSpPr>
@@ -11514,7 +11890,7 @@
       </p:sp>
       <p:sp>
         <p:nvSpPr>
-          <p:cNvPr id="188" name="TextBox 187"/>
+          <p:cNvPr id="196" name="TextBox 195"/>
           <p:cNvSpPr txBox="1"/>
           <p:nvPr/>
         </p:nvSpPr>
@@ -11549,7 +11925,7 @@
       </p:sp>
       <p:sp>
         <p:nvSpPr>
-          <p:cNvPr id="189" name="Oval 188"/>
+          <p:cNvPr id="197" name="Oval 196"/>
           <p:cNvSpPr/>
           <p:nvPr/>
         </p:nvSpPr>
@@ -11595,7 +11971,7 @@
       </p:sp>
       <p:cxnSp>
         <p:nvCxnSpPr>
-          <p:cNvPr id="190" name="Connector 189"/>
+          <p:cNvPr id="198" name="Connector 197"/>
           <p:cNvCxnSpPr/>
           <p:nvPr/>
         </p:nvCxnSpPr>
@@ -11630,7 +12006,7 @@
       </p:cxnSp>
       <p:sp>
         <p:nvSpPr>
-          <p:cNvPr id="191" name="Oval 190"/>
+          <p:cNvPr id="199" name="Oval 198"/>
           <p:cNvSpPr/>
           <p:nvPr/>
         </p:nvSpPr>
@@ -11697,7 +12073,7 @@
       </p:sp>
       <p:sp>
         <p:nvSpPr>
-          <p:cNvPr id="192" name="TextBox 191"/>
+          <p:cNvPr id="200" name="TextBox 199"/>
           <p:cNvSpPr txBox="1"/>
           <p:nvPr/>
         </p:nvSpPr>
@@ -11732,7 +12108,7 @@
       </p:sp>
       <p:sp>
         <p:nvSpPr>
-          <p:cNvPr id="193" name="Oval 192"/>
+          <p:cNvPr id="201" name="Oval 200"/>
           <p:cNvSpPr/>
           <p:nvPr/>
         </p:nvSpPr>
@@ -11799,7 +12175,7 @@
       </p:sp>
       <p:cxnSp>
         <p:nvCxnSpPr>
-          <p:cNvPr id="194" name="Connector 193"/>
+          <p:cNvPr id="202" name="Connector 201"/>
           <p:cNvCxnSpPr/>
           <p:nvPr/>
         </p:nvCxnSpPr>
@@ -11834,7 +12210,7 @@
       </p:cxnSp>
       <p:cxnSp>
         <p:nvCxnSpPr>
-          <p:cNvPr id="195" name="Connector 194"/>
+          <p:cNvPr id="203" name="Connector 202"/>
           <p:cNvCxnSpPr/>
           <p:nvPr/>
         </p:nvCxnSpPr>
@@ -11870,7 +12246,7 @@
       </p:cxnSp>
       <p:cxnSp>
         <p:nvCxnSpPr>
-          <p:cNvPr id="196" name="Connector 195"/>
+          <p:cNvPr id="204" name="Connector 203"/>
           <p:cNvCxnSpPr/>
           <p:nvPr/>
         </p:nvCxnSpPr>
@@ -11906,7 +12282,7 @@
       </p:cxnSp>
       <p:sp>
         <p:nvSpPr>
-          <p:cNvPr id="197" name="TextBox 196"/>
+          <p:cNvPr id="205" name="TextBox 204"/>
           <p:cNvSpPr txBox="1"/>
           <p:nvPr/>
         </p:nvSpPr>
@@ -11941,7 +12317,7 @@
       </p:sp>
       <p:sp>
         <p:nvSpPr>
-          <p:cNvPr id="198" name="Oval 197"/>
+          <p:cNvPr id="206" name="Oval 205"/>
           <p:cNvSpPr/>
           <p:nvPr/>
         </p:nvSpPr>
@@ -11987,7 +12363,7 @@
       </p:sp>
       <p:cxnSp>
         <p:nvCxnSpPr>
-          <p:cNvPr id="199" name="Connector 198"/>
+          <p:cNvPr id="207" name="Connector 206"/>
           <p:cNvCxnSpPr/>
           <p:nvPr/>
         </p:nvCxnSpPr>
@@ -12022,7 +12398,7 @@
       </p:cxnSp>
       <p:sp>
         <p:nvSpPr>
-          <p:cNvPr id="200" name="Oval 199"/>
+          <p:cNvPr id="208" name="Oval 207"/>
           <p:cNvSpPr/>
           <p:nvPr/>
         </p:nvSpPr>
@@ -12089,7 +12465,7 @@
       </p:sp>
       <p:sp>
         <p:nvSpPr>
-          <p:cNvPr id="201" name="TextBox 200"/>
+          <p:cNvPr id="209" name="TextBox 208"/>
           <p:cNvSpPr txBox="1"/>
           <p:nvPr/>
         </p:nvSpPr>
@@ -12124,7 +12500,7 @@
       </p:sp>
       <p:sp>
         <p:nvSpPr>
-          <p:cNvPr id="202" name="TextBox 201"/>
+          <p:cNvPr id="210" name="TextBox 209"/>
           <p:cNvSpPr txBox="1"/>
           <p:nvPr/>
         </p:nvSpPr>
@@ -12171,7 +12547,7 @@
       </p:sp>
       <p:cxnSp>
         <p:nvCxnSpPr>
-          <p:cNvPr id="203" name="Connector 202"/>
+          <p:cNvPr id="211" name="Connector 210"/>
           <p:cNvCxnSpPr/>
           <p:nvPr/>
         </p:nvCxnSpPr>
@@ -12207,7 +12583,7 @@
       </p:cxnSp>
       <p:sp>
         <p:nvSpPr>
-          <p:cNvPr id="204" name="Freeform 203"/>
+          <p:cNvPr id="212" name="Freeform 211"/>
           <p:cNvSpPr/>
           <p:nvPr/>
         </p:nvSpPr>
@@ -12274,7 +12650,7 @@
       </p:sp>
       <p:sp>
         <p:nvSpPr>
-          <p:cNvPr id="205" name="TextBox 204"/>
+          <p:cNvPr id="213" name="TextBox 212"/>
           <p:cNvSpPr txBox="1"/>
           <p:nvPr/>
         </p:nvSpPr>
@@ -12309,7 +12685,7 @@
       </p:sp>
       <p:sp>
         <p:nvSpPr>
-          <p:cNvPr id="206" name="TextBox 205"/>
+          <p:cNvPr id="214" name="TextBox 213"/>
           <p:cNvSpPr txBox="1"/>
           <p:nvPr/>
         </p:nvSpPr>
@@ -12344,7 +12720,7 @@
       </p:sp>
       <p:sp>
         <p:nvSpPr>
-          <p:cNvPr id="207" name="Oval 206"/>
+          <p:cNvPr id="215" name="Oval 214"/>
           <p:cNvSpPr/>
           <p:nvPr/>
         </p:nvSpPr>
@@ -12390,7 +12766,7 @@
       </p:sp>
       <p:cxnSp>
         <p:nvCxnSpPr>
-          <p:cNvPr id="208" name="Connector 207"/>
+          <p:cNvPr id="216" name="Connector 215"/>
           <p:cNvCxnSpPr/>
           <p:nvPr/>
         </p:nvCxnSpPr>
@@ -12425,7 +12801,7 @@
       </p:cxnSp>
       <p:sp>
         <p:nvSpPr>
-          <p:cNvPr id="209" name="Oval 208"/>
+          <p:cNvPr id="217" name="Oval 216"/>
           <p:cNvSpPr/>
           <p:nvPr/>
         </p:nvSpPr>
@@ -12492,7 +12868,7 @@
       </p:sp>
       <p:sp>
         <p:nvSpPr>
-          <p:cNvPr id="210" name="Rectangle 209"/>
+          <p:cNvPr id="218" name="Rectangle 217"/>
           <p:cNvSpPr/>
           <p:nvPr/>
         </p:nvSpPr>
@@ -12538,7 +12914,7 @@
       </p:sp>
       <p:sp>
         <p:nvSpPr>
-          <p:cNvPr id="211" name="Oval 210"/>
+          <p:cNvPr id="219" name="Oval 218"/>
           <p:cNvSpPr/>
           <p:nvPr/>
         </p:nvSpPr>
@@ -12605,7 +12981,7 @@
       </p:sp>
       <p:cxnSp>
         <p:nvCxnSpPr>
-          <p:cNvPr id="212" name="Connector 211"/>
+          <p:cNvPr id="220" name="Connector 219"/>
           <p:cNvCxnSpPr/>
           <p:nvPr/>
         </p:nvCxnSpPr>
@@ -12638,375 +13014,6 @@
           </a:fontRef>
         </p:style>
       </p:cxnSp>
-      <p:cxnSp>
-        <p:nvCxnSpPr>
-          <p:cNvPr id="213" name="Connector 212"/>
-          <p:cNvCxnSpPr/>
-          <p:nvPr/>
-        </p:nvCxnSpPr>
-        <p:spPr>
-          <a:xfrm flipH="1">
-            <a:off x="6364224" y="6812280"/>
-            <a:ext cx="283464" cy="54864"/>
-          </a:xfrm>
-          <a:prstGeom prst="line">
-            <a:avLst/>
-          </a:prstGeom>
-          <a:ln w="8890">
-            <a:solidFill>
-              <a:srgbClr val="000000"/>
-            </a:solidFill>
-            <a:prstDash val="dash"/>
-          </a:ln>
-        </p:spPr>
-        <p:style>
-          <a:lnRef idx="2">
-            <a:schemeClr val="accent1"/>
-          </a:lnRef>
-          <a:fillRef idx="0">
-            <a:schemeClr val="accent1"/>
-          </a:fillRef>
-          <a:effectRef idx="1">
-            <a:schemeClr val="accent1"/>
-          </a:effectRef>
-          <a:fontRef idx="minor">
-            <a:schemeClr val="tx1"/>
-          </a:fontRef>
-        </p:style>
-      </p:cxnSp>
-      <p:cxnSp>
-        <p:nvCxnSpPr>
-          <p:cNvPr id="214" name="Connector 213"/>
-          <p:cNvCxnSpPr/>
-          <p:nvPr/>
-        </p:nvCxnSpPr>
-        <p:spPr>
-          <a:xfrm>
-            <a:off x="8961120" y="6355080"/>
-            <a:ext cx="2194560" cy="0"/>
-          </a:xfrm>
-          <a:prstGeom prst="line">
-            <a:avLst/>
-          </a:prstGeom>
-          <a:ln w="19050">
-            <a:solidFill>
-              <a:srgbClr val="000000"/>
-            </a:solidFill>
-            <a:tailEnd type="triangle" w="med" len="med"/>
-          </a:ln>
-        </p:spPr>
-        <p:style>
-          <a:lnRef idx="2">
-            <a:schemeClr val="accent1"/>
-          </a:lnRef>
-          <a:fillRef idx="0">
-            <a:schemeClr val="accent1"/>
-          </a:fillRef>
-          <a:effectRef idx="1">
-            <a:schemeClr val="accent1"/>
-          </a:effectRef>
-          <a:fontRef idx="minor">
-            <a:schemeClr val="tx1"/>
-          </a:fontRef>
-        </p:style>
-      </p:cxnSp>
-      <p:sp>
-        <p:nvSpPr>
-          <p:cNvPr id="215" name="TextBox 214"/>
-          <p:cNvSpPr txBox="1"/>
-          <p:nvPr/>
-        </p:nvSpPr>
-        <p:spPr>
-          <a:xfrm>
-            <a:off x="9144000" y="6217920"/>
-            <a:ext cx="514096" cy="109728"/>
-          </a:xfrm>
-          <a:prstGeom prst="rect">
-            <a:avLst/>
-          </a:prstGeom>
-          <a:noFill/>
-        </p:spPr>
-        <p:txBody>
-          <a:bodyPr wrap="square" lIns="0" rIns="0" tIns="0" bIns="0" anchor="ctr">
-            <a:spAutoFit/>
-          </a:bodyPr>
-          <a:lstStyle/>
-          <a:p>
-            <a:pPr algn="l"/>
-            <a:r>
-              <a:rPr sz="500" b="0">
-                <a:solidFill>
-                  <a:srgbClr val="000000"/>
-                </a:solidFill>
-                <a:latin typeface="Arial"/>
-              </a:rPr>
-              <a:t>3"-P-105</a:t>
-            </a:r>
-          </a:p>
-        </p:txBody>
-      </p:sp>
-      <p:sp>
-        <p:nvSpPr>
-          <p:cNvPr id="216" name="TextBox 215"/>
-          <p:cNvSpPr txBox="1"/>
-          <p:nvPr/>
-        </p:nvSpPr>
-        <p:spPr>
-          <a:xfrm>
-            <a:off x="10192511" y="5961888"/>
-            <a:ext cx="963168" cy="198120"/>
-          </a:xfrm>
-          <a:prstGeom prst="rect">
-            <a:avLst/>
-          </a:prstGeom>
-          <a:noFill/>
-        </p:spPr>
-        <p:txBody>
-          <a:bodyPr wrap="square" lIns="0" rIns="0" tIns="0" bIns="0" anchor="ctr">
-            <a:spAutoFit/>
-          </a:bodyPr>
-          <a:lstStyle/>
-          <a:p>
-            <a:pPr algn="r"/>
-            <a:r>
-              <a:rPr sz="600" b="1">
-                <a:solidFill>
-                  <a:srgbClr val="000000"/>
-                </a:solidFill>
-                <a:latin typeface="Arial"/>
-              </a:rPr>
-              <a:t>TO PACKED-BED</a:t>
-            </a:r>
-          </a:p>
-          <a:p>
-            <a:pPr algn="r"/>
-            <a:r>
-              <a:rPr sz="600" b="1">
-                <a:solidFill>
-                  <a:srgbClr val="000000"/>
-                </a:solidFill>
-                <a:latin typeface="Arial"/>
-              </a:rPr>
-              <a:t>REACTOR V-200</a:t>
-            </a:r>
-          </a:p>
-        </p:txBody>
-      </p:sp>
-      <p:sp>
-        <p:nvSpPr>
-          <p:cNvPr id="217" name="Oval 216"/>
-          <p:cNvSpPr/>
-          <p:nvPr/>
-        </p:nvSpPr>
-        <p:spPr>
-          <a:xfrm>
-            <a:off x="9434322" y="6325362"/>
-            <a:ext cx="59436" cy="59436"/>
-          </a:xfrm>
-          <a:prstGeom prst="ellipse">
-            <a:avLst/>
-          </a:prstGeom>
-          <a:solidFill>
-            <a:srgbClr val="000000"/>
-          </a:solidFill>
-          <a:ln w="6350">
-            <a:solidFill>
-              <a:srgbClr val="000000"/>
-            </a:solidFill>
-          </a:ln>
-          <a:effectLst/>
-        </p:spPr>
-        <p:style>
-          <a:lnRef idx="1">
-            <a:schemeClr val="accent1"/>
-          </a:lnRef>
-          <a:fillRef idx="3">
-            <a:schemeClr val="accent1"/>
-          </a:fillRef>
-          <a:effectRef idx="2">
-            <a:schemeClr val="accent1"/>
-          </a:effectRef>
-          <a:fontRef idx="minor">
-            <a:schemeClr val="lt1"/>
-          </a:fontRef>
-        </p:style>
-        <p:txBody>
-          <a:bodyPr rtlCol="0" anchor="ctr"/>
-          <a:lstStyle/>
-          <a:p>
-            <a:pPr algn="ctr"/>
-          </a:p>
-        </p:txBody>
-      </p:sp>
-      <p:cxnSp>
-        <p:nvCxnSpPr>
-          <p:cNvPr id="218" name="Connector 217"/>
-          <p:cNvCxnSpPr/>
-          <p:nvPr/>
-        </p:nvCxnSpPr>
-        <p:spPr>
-          <a:xfrm>
-            <a:off x="9464040" y="6355080"/>
-            <a:ext cx="0" cy="292608"/>
-          </a:xfrm>
-          <a:prstGeom prst="line">
-            <a:avLst/>
-          </a:prstGeom>
-          <a:ln w="8890">
-            <a:solidFill>
-              <a:srgbClr val="000000"/>
-            </a:solidFill>
-          </a:ln>
-        </p:spPr>
-        <p:style>
-          <a:lnRef idx="2">
-            <a:schemeClr val="accent1"/>
-          </a:lnRef>
-          <a:fillRef idx="0">
-            <a:schemeClr val="accent1"/>
-          </a:fillRef>
-          <a:effectRef idx="1">
-            <a:schemeClr val="accent1"/>
-          </a:effectRef>
-          <a:fontRef idx="minor">
-            <a:schemeClr val="tx1"/>
-          </a:fontRef>
-        </p:style>
-      </p:cxnSp>
-      <p:sp>
-        <p:nvSpPr>
-          <p:cNvPr id="219" name="Oval 218"/>
-          <p:cNvSpPr/>
-          <p:nvPr/>
-        </p:nvSpPr>
-        <p:spPr>
-          <a:xfrm>
-            <a:off x="9299448" y="6647688"/>
-            <a:ext cx="329184" cy="329184"/>
-          </a:xfrm>
-          <a:prstGeom prst="ellipse">
-            <a:avLst/>
-          </a:prstGeom>
-          <a:solidFill>
-            <a:srgbClr val="FFFFFF"/>
-          </a:solidFill>
-          <a:ln w="13970">
-            <a:solidFill>
-              <a:srgbClr val="000000"/>
-            </a:solidFill>
-          </a:ln>
-          <a:effectLst/>
-        </p:spPr>
-        <p:style>
-          <a:lnRef idx="1">
-            <a:schemeClr val="accent1"/>
-          </a:lnRef>
-          <a:fillRef idx="3">
-            <a:schemeClr val="accent1"/>
-          </a:fillRef>
-          <a:effectRef idx="2">
-            <a:schemeClr val="accent1"/>
-          </a:effectRef>
-          <a:fontRef idx="minor">
-            <a:schemeClr val="lt1"/>
-          </a:fontRef>
-        </p:style>
-        <p:txBody>
-          <a:bodyPr rtlCol="0" anchor="ctr" wrap="none" lIns="0" rIns="0" tIns="0" bIns="0"/>
-          <a:lstStyle/>
-          <a:p>
-            <a:pPr algn="ctr"/>
-            <a:r>
-              <a:rPr sz="550" b="1">
-                <a:solidFill>
-                  <a:srgbClr val="000000"/>
-                </a:solidFill>
-                <a:latin typeface="Arial"/>
-              </a:rPr>
-              <a:t>TT</a:t>
-            </a:r>
-          </a:p>
-          <a:p>
-            <a:pPr algn="ctr"/>
-            <a:r>
-              <a:rPr sz="550" b="1">
-                <a:solidFill>
-                  <a:srgbClr val="000000"/>
-                </a:solidFill>
-                <a:latin typeface="Arial"/>
-              </a:rPr>
-              <a:t>040</a:t>
-            </a:r>
-          </a:p>
-        </p:txBody>
-      </p:sp>
-      <p:sp>
-        <p:nvSpPr>
-          <p:cNvPr id="220" name="Oval 219"/>
-          <p:cNvSpPr/>
-          <p:nvPr/>
-        </p:nvSpPr>
-        <p:spPr>
-          <a:xfrm>
-            <a:off x="9299448" y="7196328"/>
-            <a:ext cx="329184" cy="329184"/>
-          </a:xfrm>
-          <a:prstGeom prst="ellipse">
-            <a:avLst/>
-          </a:prstGeom>
-          <a:solidFill>
-            <a:srgbClr val="FFFFFF"/>
-          </a:solidFill>
-          <a:ln w="13970">
-            <a:solidFill>
-              <a:srgbClr val="000000"/>
-            </a:solidFill>
-          </a:ln>
-          <a:effectLst/>
-        </p:spPr>
-        <p:style>
-          <a:lnRef idx="1">
-            <a:schemeClr val="accent1"/>
-          </a:lnRef>
-          <a:fillRef idx="3">
-            <a:schemeClr val="accent1"/>
-          </a:fillRef>
-          <a:effectRef idx="2">
-            <a:schemeClr val="accent1"/>
-          </a:effectRef>
-          <a:fontRef idx="minor">
-            <a:schemeClr val="lt1"/>
-          </a:fontRef>
-        </p:style>
-        <p:txBody>
-          <a:bodyPr rtlCol="0" anchor="ctr" wrap="none" lIns="0" rIns="0" tIns="0" bIns="0"/>
-          <a:lstStyle/>
-          <a:p>
-            <a:pPr algn="ctr"/>
-            <a:r>
-              <a:rPr sz="550" b="1">
-                <a:solidFill>
-                  <a:srgbClr val="000000"/>
-                </a:solidFill>
-                <a:latin typeface="Arial"/>
-              </a:rPr>
-              <a:t>TIC</a:t>
-            </a:r>
-          </a:p>
-          <a:p>
-            <a:pPr algn="ctr"/>
-            <a:r>
-              <a:rPr sz="550" b="1">
-                <a:solidFill>
-                  <a:srgbClr val="000000"/>
-                </a:solidFill>
-                <a:latin typeface="Arial"/>
-              </a:rPr>
-              <a:t>030</a:t>
-            </a:r>
-          </a:p>
-        </p:txBody>
-      </p:sp>
       <p:cxnSp>
         <p:nvCxnSpPr>
           <p:cNvPr id="221" name="Connector 220"/>
@@ -13014,9 +13021,9 @@
           <p:nvPr/>
         </p:nvCxnSpPr>
         <p:spPr>
-          <a:xfrm>
-            <a:off x="9299448" y="7360920"/>
-            <a:ext cx="329184" cy="0"/>
+          <a:xfrm flipH="1">
+            <a:off x="6364224" y="6812280"/>
+            <a:ext cx="283464" cy="54864"/>
           </a:xfrm>
           <a:prstGeom prst="line">
             <a:avLst/>
@@ -13025,6 +13032,7 @@
             <a:solidFill>
               <a:srgbClr val="000000"/>
             </a:solidFill>
+            <a:prstDash val="dash"/>
           </a:ln>
         </p:spPr>
         <p:style>
@@ -13050,17 +13058,17 @@
         </p:nvCxnSpPr>
         <p:spPr>
           <a:xfrm>
-            <a:off x="9464040" y="6976872"/>
-            <a:ext cx="0" cy="219456"/>
+            <a:off x="8961120" y="6355080"/>
+            <a:ext cx="2194560" cy="0"/>
           </a:xfrm>
           <a:prstGeom prst="line">
             <a:avLst/>
           </a:prstGeom>
-          <a:ln w="8890">
-            <a:solidFill>
-              <a:srgbClr val="000000"/>
-            </a:solidFill>
-            <a:prstDash val="dash"/>
+          <a:ln w="19050">
+            <a:solidFill>
+              <a:srgbClr val="000000"/>
+            </a:solidFill>
+            <a:tailEnd type="triangle" w="med" len="med"/>
           </a:ln>
         </p:spPr>
         <p:style>
@@ -13080,13 +13088,95 @@
       </p:cxnSp>
       <p:sp>
         <p:nvSpPr>
-          <p:cNvPr id="223" name="Oval 222"/>
+          <p:cNvPr id="223" name="TextBox 222"/>
+          <p:cNvSpPr txBox="1"/>
+          <p:nvPr/>
+        </p:nvSpPr>
+        <p:spPr>
+          <a:xfrm>
+            <a:off x="9144000" y="6217920"/>
+            <a:ext cx="514096" cy="109728"/>
+          </a:xfrm>
+          <a:prstGeom prst="rect">
+            <a:avLst/>
+          </a:prstGeom>
+          <a:noFill/>
+        </p:spPr>
+        <p:txBody>
+          <a:bodyPr wrap="square" lIns="0" rIns="0" tIns="0" bIns="0" anchor="ctr">
+            <a:spAutoFit/>
+          </a:bodyPr>
+          <a:lstStyle/>
+          <a:p>
+            <a:pPr algn="l"/>
+            <a:r>
+              <a:rPr sz="500" b="0">
+                <a:solidFill>
+                  <a:srgbClr val="000000"/>
+                </a:solidFill>
+                <a:latin typeface="Arial"/>
+              </a:rPr>
+              <a:t>3"-P-105</a:t>
+            </a:r>
+          </a:p>
+        </p:txBody>
+      </p:sp>
+      <p:sp>
+        <p:nvSpPr>
+          <p:cNvPr id="224" name="TextBox 223"/>
+          <p:cNvSpPr txBox="1"/>
+          <p:nvPr/>
+        </p:nvSpPr>
+        <p:spPr>
+          <a:xfrm>
+            <a:off x="10192511" y="5961888"/>
+            <a:ext cx="963168" cy="198120"/>
+          </a:xfrm>
+          <a:prstGeom prst="rect">
+            <a:avLst/>
+          </a:prstGeom>
+          <a:noFill/>
+        </p:spPr>
+        <p:txBody>
+          <a:bodyPr wrap="square" lIns="0" rIns="0" tIns="0" bIns="0" anchor="ctr">
+            <a:spAutoFit/>
+          </a:bodyPr>
+          <a:lstStyle/>
+          <a:p>
+            <a:pPr algn="r"/>
+            <a:r>
+              <a:rPr sz="600" b="1">
+                <a:solidFill>
+                  <a:srgbClr val="000000"/>
+                </a:solidFill>
+                <a:latin typeface="Arial"/>
+              </a:rPr>
+              <a:t>TO PACKED-BED</a:t>
+            </a:r>
+          </a:p>
+          <a:p>
+            <a:pPr algn="r"/>
+            <a:r>
+              <a:rPr sz="600" b="1">
+                <a:solidFill>
+                  <a:srgbClr val="000000"/>
+                </a:solidFill>
+                <a:latin typeface="Arial"/>
+              </a:rPr>
+              <a:t>REACTOR V-200</a:t>
+            </a:r>
+          </a:p>
+        </p:txBody>
+      </p:sp>
+      <p:sp>
+        <p:nvSpPr>
+          <p:cNvPr id="225" name="Oval 224"/>
           <p:cNvSpPr/>
           <p:nvPr/>
         </p:nvSpPr>
         <p:spPr>
           <a:xfrm>
-            <a:off x="9982961" y="6325362"/>
+            <a:off x="9434322" y="6325362"/>
             <a:ext cx="59436" cy="59436"/>
           </a:xfrm>
           <a:prstGeom prst="ellipse">
@@ -13126,13 +13216,13 @@
       </p:sp>
       <p:cxnSp>
         <p:nvCxnSpPr>
-          <p:cNvPr id="224" name="Connector 223"/>
+          <p:cNvPr id="226" name="Connector 225"/>
           <p:cNvCxnSpPr/>
           <p:nvPr/>
         </p:nvCxnSpPr>
         <p:spPr>
           <a:xfrm>
-            <a:off x="10012680" y="6355080"/>
+            <a:off x="9464040" y="6355080"/>
             <a:ext cx="0" cy="292608"/>
           </a:xfrm>
           <a:prstGeom prst="line">
@@ -13161,13 +13251,13 @@
       </p:cxnSp>
       <p:sp>
         <p:nvSpPr>
-          <p:cNvPr id="225" name="Oval 224"/>
+          <p:cNvPr id="227" name="Oval 226"/>
           <p:cNvSpPr/>
           <p:nvPr/>
         </p:nvSpPr>
         <p:spPr>
           <a:xfrm>
-            <a:off x="9848088" y="6647688"/>
+            <a:off x="9299448" y="6647688"/>
             <a:ext cx="329184" cy="329184"/>
           </a:xfrm>
           <a:prstGeom prst="ellipse">
@@ -13209,7 +13299,7 @@
                 </a:solidFill>
                 <a:latin typeface="Arial"/>
               </a:rPr>
-              <a:t>TIAH</a:t>
+              <a:t>TT</a:t>
             </a:r>
           </a:p>
           <a:p>
@@ -13221,14 +13311,300 @@
                 </a:solidFill>
                 <a:latin typeface="Arial"/>
               </a:rPr>
-              <a:t>025</a:t>
+              <a:t>040</a:t>
+            </a:r>
+          </a:p>
+        </p:txBody>
+      </p:sp>
+      <p:sp>
+        <p:nvSpPr>
+          <p:cNvPr id="228" name="Oval 227"/>
+          <p:cNvSpPr/>
+          <p:nvPr/>
+        </p:nvSpPr>
+        <p:spPr>
+          <a:xfrm>
+            <a:off x="9299448" y="7196328"/>
+            <a:ext cx="329184" cy="329184"/>
+          </a:xfrm>
+          <a:prstGeom prst="ellipse">
+            <a:avLst/>
+          </a:prstGeom>
+          <a:solidFill>
+            <a:srgbClr val="FFFFFF"/>
+          </a:solidFill>
+          <a:ln w="13970">
+            <a:solidFill>
+              <a:srgbClr val="000000"/>
+            </a:solidFill>
+          </a:ln>
+          <a:effectLst/>
+        </p:spPr>
+        <p:style>
+          <a:lnRef idx="1">
+            <a:schemeClr val="accent1"/>
+          </a:lnRef>
+          <a:fillRef idx="3">
+            <a:schemeClr val="accent1"/>
+          </a:fillRef>
+          <a:effectRef idx="2">
+            <a:schemeClr val="accent1"/>
+          </a:effectRef>
+          <a:fontRef idx="minor">
+            <a:schemeClr val="lt1"/>
+          </a:fontRef>
+        </p:style>
+        <p:txBody>
+          <a:bodyPr rtlCol="0" anchor="ctr" wrap="none" lIns="0" rIns="0" tIns="0" bIns="0"/>
+          <a:lstStyle/>
+          <a:p>
+            <a:pPr algn="ctr"/>
+            <a:r>
+              <a:rPr sz="550" b="1">
+                <a:solidFill>
+                  <a:srgbClr val="000000"/>
+                </a:solidFill>
+                <a:latin typeface="Arial"/>
+              </a:rPr>
+              <a:t>TIC</a:t>
+            </a:r>
+          </a:p>
+          <a:p>
+            <a:pPr algn="ctr"/>
+            <a:r>
+              <a:rPr sz="550" b="1">
+                <a:solidFill>
+                  <a:srgbClr val="000000"/>
+                </a:solidFill>
+                <a:latin typeface="Arial"/>
+              </a:rPr>
+              <a:t>030</a:t>
             </a:r>
           </a:p>
         </p:txBody>
       </p:sp>
       <p:cxnSp>
         <p:nvCxnSpPr>
-          <p:cNvPr id="226" name="Connector 225"/>
+          <p:cNvPr id="229" name="Connector 228"/>
+          <p:cNvCxnSpPr/>
+          <p:nvPr/>
+        </p:nvCxnSpPr>
+        <p:spPr>
+          <a:xfrm>
+            <a:off x="9299448" y="7360920"/>
+            <a:ext cx="329184" cy="0"/>
+          </a:xfrm>
+          <a:prstGeom prst="line">
+            <a:avLst/>
+          </a:prstGeom>
+          <a:ln w="8890">
+            <a:solidFill>
+              <a:srgbClr val="000000"/>
+            </a:solidFill>
+          </a:ln>
+        </p:spPr>
+        <p:style>
+          <a:lnRef idx="2">
+            <a:schemeClr val="accent1"/>
+          </a:lnRef>
+          <a:fillRef idx="0">
+            <a:schemeClr val="accent1"/>
+          </a:fillRef>
+          <a:effectRef idx="1">
+            <a:schemeClr val="accent1"/>
+          </a:effectRef>
+          <a:fontRef idx="minor">
+            <a:schemeClr val="tx1"/>
+          </a:fontRef>
+        </p:style>
+      </p:cxnSp>
+      <p:cxnSp>
+        <p:nvCxnSpPr>
+          <p:cNvPr id="230" name="Connector 229"/>
+          <p:cNvCxnSpPr/>
+          <p:nvPr/>
+        </p:nvCxnSpPr>
+        <p:spPr>
+          <a:xfrm>
+            <a:off x="9464040" y="6976872"/>
+            <a:ext cx="0" cy="219456"/>
+          </a:xfrm>
+          <a:prstGeom prst="line">
+            <a:avLst/>
+          </a:prstGeom>
+          <a:ln w="8890">
+            <a:solidFill>
+              <a:srgbClr val="000000"/>
+            </a:solidFill>
+            <a:prstDash val="dash"/>
+          </a:ln>
+        </p:spPr>
+        <p:style>
+          <a:lnRef idx="2">
+            <a:schemeClr val="accent1"/>
+          </a:lnRef>
+          <a:fillRef idx="0">
+            <a:schemeClr val="accent1"/>
+          </a:fillRef>
+          <a:effectRef idx="1">
+            <a:schemeClr val="accent1"/>
+          </a:effectRef>
+          <a:fontRef idx="minor">
+            <a:schemeClr val="tx1"/>
+          </a:fontRef>
+        </p:style>
+      </p:cxnSp>
+      <p:sp>
+        <p:nvSpPr>
+          <p:cNvPr id="231" name="Oval 230"/>
+          <p:cNvSpPr/>
+          <p:nvPr/>
+        </p:nvSpPr>
+        <p:spPr>
+          <a:xfrm>
+            <a:off x="9982961" y="6325362"/>
+            <a:ext cx="59436" cy="59436"/>
+          </a:xfrm>
+          <a:prstGeom prst="ellipse">
+            <a:avLst/>
+          </a:prstGeom>
+          <a:solidFill>
+            <a:srgbClr val="000000"/>
+          </a:solidFill>
+          <a:ln w="6350">
+            <a:solidFill>
+              <a:srgbClr val="000000"/>
+            </a:solidFill>
+          </a:ln>
+          <a:effectLst/>
+        </p:spPr>
+        <p:style>
+          <a:lnRef idx="1">
+            <a:schemeClr val="accent1"/>
+          </a:lnRef>
+          <a:fillRef idx="3">
+            <a:schemeClr val="accent1"/>
+          </a:fillRef>
+          <a:effectRef idx="2">
+            <a:schemeClr val="accent1"/>
+          </a:effectRef>
+          <a:fontRef idx="minor">
+            <a:schemeClr val="lt1"/>
+          </a:fontRef>
+        </p:style>
+        <p:txBody>
+          <a:bodyPr rtlCol="0" anchor="ctr"/>
+          <a:lstStyle/>
+          <a:p>
+            <a:pPr algn="ctr"/>
+          </a:p>
+        </p:txBody>
+      </p:sp>
+      <p:cxnSp>
+        <p:nvCxnSpPr>
+          <p:cNvPr id="232" name="Connector 231"/>
+          <p:cNvCxnSpPr/>
+          <p:nvPr/>
+        </p:nvCxnSpPr>
+        <p:spPr>
+          <a:xfrm>
+            <a:off x="10012680" y="6355080"/>
+            <a:ext cx="0" cy="292608"/>
+          </a:xfrm>
+          <a:prstGeom prst="line">
+            <a:avLst/>
+          </a:prstGeom>
+          <a:ln w="8890">
+            <a:solidFill>
+              <a:srgbClr val="000000"/>
+            </a:solidFill>
+          </a:ln>
+        </p:spPr>
+        <p:style>
+          <a:lnRef idx="2">
+            <a:schemeClr val="accent1"/>
+          </a:lnRef>
+          <a:fillRef idx="0">
+            <a:schemeClr val="accent1"/>
+          </a:fillRef>
+          <a:effectRef idx="1">
+            <a:schemeClr val="accent1"/>
+          </a:effectRef>
+          <a:fontRef idx="minor">
+            <a:schemeClr val="tx1"/>
+          </a:fontRef>
+        </p:style>
+      </p:cxnSp>
+      <p:sp>
+        <p:nvSpPr>
+          <p:cNvPr id="233" name="Oval 232"/>
+          <p:cNvSpPr/>
+          <p:nvPr/>
+        </p:nvSpPr>
+        <p:spPr>
+          <a:xfrm>
+            <a:off x="9848088" y="6647688"/>
+            <a:ext cx="329184" cy="329184"/>
+          </a:xfrm>
+          <a:prstGeom prst="ellipse">
+            <a:avLst/>
+          </a:prstGeom>
+          <a:solidFill>
+            <a:srgbClr val="FFFFFF"/>
+          </a:solidFill>
+          <a:ln w="13970">
+            <a:solidFill>
+              <a:srgbClr val="000000"/>
+            </a:solidFill>
+          </a:ln>
+          <a:effectLst/>
+        </p:spPr>
+        <p:style>
+          <a:lnRef idx="1">
+            <a:schemeClr val="accent1"/>
+          </a:lnRef>
+          <a:fillRef idx="3">
+            <a:schemeClr val="accent1"/>
+          </a:fillRef>
+          <a:effectRef idx="2">
+            <a:schemeClr val="accent1"/>
+          </a:effectRef>
+          <a:fontRef idx="minor">
+            <a:schemeClr val="lt1"/>
+          </a:fontRef>
+        </p:style>
+        <p:txBody>
+          <a:bodyPr rtlCol="0" anchor="ctr" wrap="none" lIns="0" rIns="0" tIns="0" bIns="0"/>
+          <a:lstStyle/>
+          <a:p>
+            <a:pPr algn="ctr"/>
+            <a:r>
+              <a:rPr sz="550" b="1">
+                <a:solidFill>
+                  <a:srgbClr val="000000"/>
+                </a:solidFill>
+                <a:latin typeface="Arial"/>
+              </a:rPr>
+              <a:t>TIAH</a:t>
+            </a:r>
+          </a:p>
+          <a:p>
+            <a:pPr algn="ctr"/>
+            <a:r>
+              <a:rPr sz="550" b="1">
+                <a:solidFill>
+                  <a:srgbClr val="000000"/>
+                </a:solidFill>
+                <a:latin typeface="Arial"/>
+              </a:rPr>
+              <a:t>025</a:t>
+            </a:r>
+          </a:p>
+        </p:txBody>
+      </p:sp>
+      <p:cxnSp>
+        <p:nvCxnSpPr>
+          <p:cNvPr id="234" name="Connector 233"/>
           <p:cNvCxnSpPr/>
           <p:nvPr/>
         </p:nvCxnSpPr>
@@ -13263,7 +13639,7 @@
       </p:cxnSp>
       <p:sp>
         <p:nvSpPr>
-          <p:cNvPr id="227" name="TextBox 226"/>
+          <p:cNvPr id="235" name="TextBox 234"/>
           <p:cNvSpPr txBox="1"/>
           <p:nvPr/>
         </p:nvSpPr>
@@ -13298,7 +13674,7 @@
       </p:sp>
       <p:sp>
         <p:nvSpPr>
-          <p:cNvPr id="228" name="Rectangle 227"/>
+          <p:cNvPr id="236" name="Rectangle 235"/>
           <p:cNvSpPr/>
           <p:nvPr/>
         </p:nvSpPr>
@@ -13344,7 +13720,7 @@
       </p:sp>
       <p:sp>
         <p:nvSpPr>
-          <p:cNvPr id="229" name="Oval 228"/>
+          <p:cNvPr id="237" name="Oval 236"/>
           <p:cNvSpPr/>
           <p:nvPr/>
         </p:nvSpPr>
@@ -13411,7 +13787,7 @@
       </p:sp>
       <p:cxnSp>
         <p:nvCxnSpPr>
-          <p:cNvPr id="230" name="Connector 229"/>
+          <p:cNvPr id="238" name="Connector 237"/>
           <p:cNvCxnSpPr/>
           <p:nvPr/>
         </p:nvCxnSpPr>
@@ -13446,7 +13822,7 @@
       </p:cxnSp>
       <p:cxnSp>
         <p:nvCxnSpPr>
-          <p:cNvPr id="231" name="Connector 230"/>
+          <p:cNvPr id="239" name="Connector 238"/>
           <p:cNvCxnSpPr/>
           <p:nvPr/>
         </p:nvCxnSpPr>
@@ -13482,7 +13858,7 @@
       </p:cxnSp>
       <p:sp>
         <p:nvSpPr>
-          <p:cNvPr id="232" name="Oval 231"/>
+          <p:cNvPr id="240" name="Oval 239"/>
           <p:cNvSpPr/>
           <p:nvPr/>
         </p:nvSpPr>
@@ -13528,7 +13904,7 @@
       </p:sp>
       <p:cxnSp>
         <p:nvCxnSpPr>
-          <p:cNvPr id="233" name="Connector 232"/>
+          <p:cNvPr id="241" name="Connector 240"/>
           <p:cNvCxnSpPr/>
           <p:nvPr/>
         </p:nvCxnSpPr>
@@ -13563,7 +13939,7 @@
       </p:cxnSp>
       <p:sp>
         <p:nvSpPr>
-          <p:cNvPr id="234" name="Oval 233"/>
+          <p:cNvPr id="242" name="Oval 241"/>
           <p:cNvSpPr/>
           <p:nvPr/>
         </p:nvSpPr>
@@ -13630,7 +14006,7 @@
       </p:sp>
       <p:sp>
         <p:nvSpPr>
-          <p:cNvPr id="235" name="Oval 234"/>
+          <p:cNvPr id="243" name="Oval 242"/>
           <p:cNvSpPr/>
           <p:nvPr/>
         </p:nvSpPr>
@@ -13676,7 +14052,7 @@
       </p:sp>
       <p:cxnSp>
         <p:nvCxnSpPr>
-          <p:cNvPr id="236" name="Connector 235"/>
+          <p:cNvPr id="244" name="Connector 243"/>
           <p:cNvCxnSpPr/>
           <p:nvPr/>
         </p:nvCxnSpPr>
@@ -13711,7 +14087,7 @@
       </p:cxnSp>
       <p:sp>
         <p:nvSpPr>
-          <p:cNvPr id="237" name="Freeform 236"/>
+          <p:cNvPr id="245" name="Freeform 244"/>
           <p:cNvSpPr/>
           <p:nvPr/>
         </p:nvSpPr>
@@ -13778,7 +14154,7 @@
       </p:sp>
       <p:cxnSp>
         <p:nvCxnSpPr>
-          <p:cNvPr id="238" name="Connector 237"/>
+          <p:cNvPr id="246" name="Connector 245"/>
           <p:cNvCxnSpPr/>
           <p:nvPr/>
         </p:nvCxnSpPr>
@@ -13814,7 +14190,7 @@
       </p:cxnSp>
       <p:sp>
         <p:nvSpPr>
-          <p:cNvPr id="239" name="TextBox 238"/>
+          <p:cNvPr id="247" name="TextBox 246"/>
           <p:cNvSpPr txBox="1"/>
           <p:nvPr/>
         </p:nvSpPr>
@@ -13849,7 +14225,7 @@
       </p:sp>
       <p:sp>
         <p:nvSpPr>
-          <p:cNvPr id="240" name="TextBox 239"/>
+          <p:cNvPr id="248" name="TextBox 247"/>
           <p:cNvSpPr txBox="1"/>
           <p:nvPr/>
         </p:nvSpPr>
@@ -13896,7 +14272,7 @@
       </p:sp>
       <p:cxnSp>
         <p:nvCxnSpPr>
-          <p:cNvPr id="241" name="Connector 240"/>
+          <p:cNvPr id="249" name="Connector 248"/>
           <p:cNvCxnSpPr/>
           <p:nvPr/>
         </p:nvCxnSpPr>
@@ -13932,7 +14308,7 @@
       </p:cxnSp>
       <p:sp>
         <p:nvSpPr>
-          <p:cNvPr id="242" name="Rectangle 241"/>
+          <p:cNvPr id="250" name="Rectangle 249"/>
           <p:cNvSpPr/>
           <p:nvPr/>
         </p:nvSpPr>
@@ -13978,7 +14354,7 @@
       </p:sp>
       <p:cxnSp>
         <p:nvCxnSpPr>
-          <p:cNvPr id="243" name="Connector 242"/>
+          <p:cNvPr id="251" name="Connector 250"/>
           <p:cNvCxnSpPr/>
           <p:nvPr/>
         </p:nvCxnSpPr>
@@ -14014,7 +14390,7 @@
       </p:cxnSp>
       <p:sp>
         <p:nvSpPr>
-          <p:cNvPr id="244" name="TextBox 243"/>
+          <p:cNvPr id="252" name="TextBox 251"/>
           <p:cNvSpPr txBox="1"/>
           <p:nvPr/>
         </p:nvSpPr>
@@ -14049,7 +14425,7 @@
       </p:sp>
       <p:sp>
         <p:nvSpPr>
-          <p:cNvPr id="245" name="TextBox 244"/>
+          <p:cNvPr id="253" name="TextBox 252"/>
           <p:cNvSpPr txBox="1"/>
           <p:nvPr/>
         </p:nvSpPr>
@@ -14084,7 +14460,7 @@
       </p:sp>
       <p:cxnSp>
         <p:nvCxnSpPr>
-          <p:cNvPr id="246" name="Connector 245"/>
+          <p:cNvPr id="254" name="Connector 253"/>
           <p:cNvCxnSpPr/>
           <p:nvPr/>
         </p:nvCxnSpPr>
@@ -14119,7 +14495,7 @@
       </p:cxnSp>
       <p:cxnSp>
         <p:nvCxnSpPr>
-          <p:cNvPr id="247" name="Connector 246"/>
+          <p:cNvPr id="255" name="Connector 254"/>
           <p:cNvCxnSpPr/>
           <p:nvPr/>
         </p:nvCxnSpPr>
@@ -14155,7 +14531,7 @@
       </p:cxnSp>
       <p:sp>
         <p:nvSpPr>
-          <p:cNvPr id="248" name="TextBox 247"/>
+          <p:cNvPr id="256" name="TextBox 255"/>
           <p:cNvSpPr txBox="1"/>
           <p:nvPr/>
         </p:nvSpPr>
@@ -14190,7 +14566,7 @@
       </p:sp>
       <p:cxnSp>
         <p:nvCxnSpPr>
-          <p:cNvPr id="249" name="Connector 248"/>
+          <p:cNvPr id="257" name="Connector 256"/>
           <p:cNvCxnSpPr/>
           <p:nvPr/>
         </p:nvCxnSpPr>
@@ -14225,7 +14601,7 @@
       </p:cxnSp>
       <p:cxnSp>
         <p:nvCxnSpPr>
-          <p:cNvPr id="250" name="Connector 249"/>
+          <p:cNvPr id="258" name="Connector 257"/>
           <p:cNvCxnSpPr/>
           <p:nvPr/>
         </p:nvCxnSpPr>
@@ -14260,7 +14636,7 @@
       </p:cxnSp>
       <p:sp>
         <p:nvSpPr>
-          <p:cNvPr id="251" name="TextBox 250"/>
+          <p:cNvPr id="259" name="TextBox 258"/>
           <p:cNvSpPr txBox="1"/>
           <p:nvPr/>
         </p:nvSpPr>
@@ -14295,7 +14671,7 @@
       </p:sp>
       <p:cxnSp>
         <p:nvCxnSpPr>
-          <p:cNvPr id="252" name="Connector 251"/>
+          <p:cNvPr id="260" name="Connector 259"/>
           <p:cNvCxnSpPr/>
           <p:nvPr/>
         </p:nvCxnSpPr>
@@ -14330,7 +14706,7 @@
       </p:cxnSp>
       <p:sp>
         <p:nvSpPr>
-          <p:cNvPr id="253" name="Oval 252"/>
+          <p:cNvPr id="261" name="Oval 260"/>
           <p:cNvSpPr/>
           <p:nvPr/>
         </p:nvSpPr>
@@ -14397,7 +14773,7 @@
       </p:sp>
       <p:sp>
         <p:nvSpPr>
-          <p:cNvPr id="254" name="Freeform 253"/>
+          <p:cNvPr id="262" name="Freeform 261"/>
           <p:cNvSpPr/>
           <p:nvPr/>
         </p:nvSpPr>
@@ -14464,7 +14840,7 @@
       </p:sp>
       <p:cxnSp>
         <p:nvCxnSpPr>
-          <p:cNvPr id="255" name="Connector 254"/>
+          <p:cNvPr id="263" name="Connector 262"/>
           <p:cNvCxnSpPr/>
           <p:nvPr/>
         </p:nvCxnSpPr>
@@ -14499,7 +14875,7 @@
       </p:cxnSp>
       <p:sp>
         <p:nvSpPr>
-          <p:cNvPr id="256" name="Freeform 255"/>
+          <p:cNvPr id="264" name="Freeform 263"/>
           <p:cNvSpPr/>
           <p:nvPr/>
         </p:nvSpPr>
@@ -14584,7 +14960,7 @@
       </p:sp>
       <p:sp>
         <p:nvSpPr>
-          <p:cNvPr id="257" name="TextBox 256"/>
+          <p:cNvPr id="265" name="TextBox 264"/>
           <p:cNvSpPr txBox="1"/>
           <p:nvPr/>
         </p:nvSpPr>
@@ -14619,7 +14995,7 @@
       </p:sp>
       <p:sp>
         <p:nvSpPr>
-          <p:cNvPr id="258" name="Oval 257"/>
+          <p:cNvPr id="266" name="Oval 265"/>
           <p:cNvSpPr/>
           <p:nvPr/>
         </p:nvSpPr>
@@ -14686,7 +15062,7 @@
       </p:sp>
       <p:cxnSp>
         <p:nvCxnSpPr>
-          <p:cNvPr id="259" name="Connector 258"/>
+          <p:cNvPr id="267" name="Connector 266"/>
           <p:cNvCxnSpPr/>
           <p:nvPr/>
         </p:nvCxnSpPr>
@@ -14721,7 +15097,7 @@
       </p:cxnSp>
       <p:cxnSp>
         <p:nvCxnSpPr>
-          <p:cNvPr id="260" name="Connector 259"/>
+          <p:cNvPr id="268" name="Connector 267"/>
           <p:cNvCxnSpPr/>
           <p:nvPr/>
         </p:nvCxnSpPr>
@@ -14757,7 +15133,7 @@
       </p:cxnSp>
       <p:cxnSp>
         <p:nvCxnSpPr>
-          <p:cNvPr id="261" name="Connector 260"/>
+          <p:cNvPr id="269" name="Connector 268"/>
           <p:cNvCxnSpPr/>
           <p:nvPr/>
         </p:nvCxnSpPr>
@@ -14793,7 +15169,7 @@
       </p:cxnSp>
       <p:sp>
         <p:nvSpPr>
-          <p:cNvPr id="262" name="Oval 261"/>
+          <p:cNvPr id="270" name="Oval 269"/>
           <p:cNvSpPr/>
           <p:nvPr/>
         </p:nvSpPr>
@@ -14860,7 +15236,7 @@
       </p:sp>
       <p:cxnSp>
         <p:nvCxnSpPr>
-          <p:cNvPr id="263" name="Connector 262"/>
+          <p:cNvPr id="271" name="Connector 270"/>
           <p:cNvCxnSpPr/>
           <p:nvPr/>
         </p:nvCxnSpPr>
@@ -14868,362 +15244,6 @@
           <a:xfrm>
             <a:off x="3767328" y="6446520"/>
             <a:ext cx="329183" cy="0"/>
-          </a:xfrm>
-          <a:prstGeom prst="line">
-            <a:avLst/>
-          </a:prstGeom>
-          <a:ln w="8890">
-            <a:solidFill>
-              <a:srgbClr val="000000"/>
-            </a:solidFill>
-          </a:ln>
-        </p:spPr>
-        <p:style>
-          <a:lnRef idx="2">
-            <a:schemeClr val="accent1"/>
-          </a:lnRef>
-          <a:fillRef idx="0">
-            <a:schemeClr val="accent1"/>
-          </a:fillRef>
-          <a:effectRef idx="1">
-            <a:schemeClr val="accent1"/>
-          </a:effectRef>
-          <a:fontRef idx="minor">
-            <a:schemeClr val="tx1"/>
-          </a:fontRef>
-        </p:style>
-      </p:cxnSp>
-      <p:cxnSp>
-        <p:nvCxnSpPr>
-          <p:cNvPr id="264" name="Connector 263"/>
-          <p:cNvCxnSpPr/>
-          <p:nvPr/>
-        </p:nvCxnSpPr>
-        <p:spPr>
-          <a:xfrm flipH="1">
-            <a:off x="3456432" y="6446520"/>
-            <a:ext cx="310896" cy="0"/>
-          </a:xfrm>
-          <a:prstGeom prst="line">
-            <a:avLst/>
-          </a:prstGeom>
-          <a:ln w="8890">
-            <a:solidFill>
-              <a:srgbClr val="000000"/>
-            </a:solidFill>
-            <a:prstDash val="dash"/>
-          </a:ln>
-        </p:spPr>
-        <p:style>
-          <a:lnRef idx="2">
-            <a:schemeClr val="accent1"/>
-          </a:lnRef>
-          <a:fillRef idx="0">
-            <a:schemeClr val="accent1"/>
-          </a:fillRef>
-          <a:effectRef idx="1">
-            <a:schemeClr val="accent1"/>
-          </a:effectRef>
-          <a:fontRef idx="minor">
-            <a:schemeClr val="tx1"/>
-          </a:fontRef>
-        </p:style>
-      </p:cxnSp>
-      <p:sp>
-        <p:nvSpPr>
-          <p:cNvPr id="265" name="TextBox 264"/>
-          <p:cNvSpPr txBox="1"/>
-          <p:nvPr/>
-        </p:nvSpPr>
-        <p:spPr>
-          <a:xfrm>
-            <a:off x="4133087" y="6291072"/>
-            <a:ext cx="1253744" cy="109728"/>
-          </a:xfrm>
-          <a:prstGeom prst="rect">
-            <a:avLst/>
-          </a:prstGeom>
-          <a:noFill/>
-        </p:spPr>
-        <p:txBody>
-          <a:bodyPr wrap="square" lIns="0" rIns="0" tIns="0" bIns="0" anchor="ctr">
-            <a:spAutoFit/>
-          </a:bodyPr>
-          <a:lstStyle/>
-          <a:p>
-            <a:pPr algn="l"/>
-            <a:r>
-              <a:rPr sz="500" b="0">
-                <a:solidFill>
-                  <a:srgbClr val="000000"/>
-                </a:solidFill>
-                <a:latin typeface="Arial"/>
-              </a:rPr>
-              <a:t>AIR/FUEL RATIO (REV B)</a:t>
-            </a:r>
-          </a:p>
-        </p:txBody>
-      </p:sp>
-      <p:sp>
-        <p:nvSpPr>
-          <p:cNvPr id="266" name="TextBox 265"/>
-          <p:cNvSpPr txBox="1"/>
-          <p:nvPr/>
-        </p:nvSpPr>
-        <p:spPr>
-          <a:xfrm>
-            <a:off x="4133087" y="6400800"/>
-            <a:ext cx="1200912" cy="109728"/>
-          </a:xfrm>
-          <a:prstGeom prst="rect">
-            <a:avLst/>
-          </a:prstGeom>
-          <a:noFill/>
-        </p:spPr>
-        <p:txBody>
-          <a:bodyPr wrap="square" lIns="0" rIns="0" tIns="0" bIns="0" anchor="ctr">
-            <a:spAutoFit/>
-          </a:bodyPr>
-          <a:lstStyle/>
-          <a:p>
-            <a:pPr algn="l"/>
-            <a:r>
-              <a:rPr sz="500" b="0">
-                <a:solidFill>
-                  <a:srgbClr val="000000"/>
-                </a:solidFill>
-                <a:latin typeface="Arial"/>
-              </a:rPr>
-              <a:t>FROM FI-001 &amp; AIC-027</a:t>
-            </a:r>
-          </a:p>
-        </p:txBody>
-      </p:sp>
-      <p:sp>
-        <p:nvSpPr>
-          <p:cNvPr id="267" name="Oval 266"/>
-          <p:cNvSpPr/>
-          <p:nvPr/>
-        </p:nvSpPr>
-        <p:spPr>
-          <a:xfrm>
-            <a:off x="8199881" y="6938010"/>
-            <a:ext cx="59436" cy="59436"/>
-          </a:xfrm>
-          <a:prstGeom prst="ellipse">
-            <a:avLst/>
-          </a:prstGeom>
-          <a:solidFill>
-            <a:srgbClr val="000000"/>
-          </a:solidFill>
-          <a:ln w="6350">
-            <a:solidFill>
-              <a:srgbClr val="000000"/>
-            </a:solidFill>
-          </a:ln>
-          <a:effectLst/>
-        </p:spPr>
-        <p:style>
-          <a:lnRef idx="1">
-            <a:schemeClr val="accent1"/>
-          </a:lnRef>
-          <a:fillRef idx="3">
-            <a:schemeClr val="accent1"/>
-          </a:fillRef>
-          <a:effectRef idx="2">
-            <a:schemeClr val="accent1"/>
-          </a:effectRef>
-          <a:fontRef idx="minor">
-            <a:schemeClr val="lt1"/>
-          </a:fontRef>
-        </p:style>
-        <p:txBody>
-          <a:bodyPr rtlCol="0" anchor="ctr"/>
-          <a:lstStyle/>
-          <a:p>
-            <a:pPr algn="ctr"/>
-          </a:p>
-        </p:txBody>
-      </p:sp>
-      <p:cxnSp>
-        <p:nvCxnSpPr>
-          <p:cNvPr id="268" name="Connector 267"/>
-          <p:cNvCxnSpPr/>
-          <p:nvPr/>
-        </p:nvCxnSpPr>
-        <p:spPr>
-          <a:xfrm>
-            <a:off x="8229600" y="6967728"/>
-            <a:ext cx="219456" cy="0"/>
-          </a:xfrm>
-          <a:prstGeom prst="line">
-            <a:avLst/>
-          </a:prstGeom>
-          <a:ln w="8890">
-            <a:solidFill>
-              <a:srgbClr val="000000"/>
-            </a:solidFill>
-          </a:ln>
-        </p:spPr>
-        <p:style>
-          <a:lnRef idx="2">
-            <a:schemeClr val="accent1"/>
-          </a:lnRef>
-          <a:fillRef idx="0">
-            <a:schemeClr val="accent1"/>
-          </a:fillRef>
-          <a:effectRef idx="1">
-            <a:schemeClr val="accent1"/>
-          </a:effectRef>
-          <a:fontRef idx="minor">
-            <a:schemeClr val="tx1"/>
-          </a:fontRef>
-        </p:style>
-      </p:cxnSp>
-      <p:sp>
-        <p:nvSpPr>
-          <p:cNvPr id="269" name="Oval 268"/>
-          <p:cNvSpPr/>
-          <p:nvPr/>
-        </p:nvSpPr>
-        <p:spPr>
-          <a:xfrm>
-            <a:off x="8449056" y="6803136"/>
-            <a:ext cx="329184" cy="329184"/>
-          </a:xfrm>
-          <a:prstGeom prst="ellipse">
-            <a:avLst/>
-          </a:prstGeom>
-          <a:solidFill>
-            <a:srgbClr val="FFFFFF"/>
-          </a:solidFill>
-          <a:ln w="13970">
-            <a:solidFill>
-              <a:srgbClr val="000000"/>
-            </a:solidFill>
-          </a:ln>
-          <a:effectLst/>
-        </p:spPr>
-        <p:style>
-          <a:lnRef idx="1">
-            <a:schemeClr val="accent1"/>
-          </a:lnRef>
-          <a:fillRef idx="3">
-            <a:schemeClr val="accent1"/>
-          </a:fillRef>
-          <a:effectRef idx="2">
-            <a:schemeClr val="accent1"/>
-          </a:effectRef>
-          <a:fontRef idx="minor">
-            <a:schemeClr val="lt1"/>
-          </a:fontRef>
-        </p:style>
-        <p:txBody>
-          <a:bodyPr rtlCol="0" anchor="ctr" wrap="none" lIns="0" rIns="0" tIns="0" bIns="0"/>
-          <a:lstStyle/>
-          <a:p>
-            <a:pPr algn="ctr"/>
-            <a:r>
-              <a:rPr sz="550" b="1">
-                <a:solidFill>
-                  <a:srgbClr val="000000"/>
-                </a:solidFill>
-                <a:latin typeface="Arial"/>
-              </a:rPr>
-              <a:t>PT</a:t>
-            </a:r>
-          </a:p>
-          <a:p>
-            <a:pPr algn="ctr"/>
-            <a:r>
-              <a:rPr sz="550" b="1">
-                <a:solidFill>
-                  <a:srgbClr val="000000"/>
-                </a:solidFill>
-                <a:latin typeface="Arial"/>
-              </a:rPr>
-              <a:t>030</a:t>
-            </a:r>
-          </a:p>
-        </p:txBody>
-      </p:sp>
-      <p:sp>
-        <p:nvSpPr>
-          <p:cNvPr id="270" name="Oval 269"/>
-          <p:cNvSpPr/>
-          <p:nvPr/>
-        </p:nvSpPr>
-        <p:spPr>
-          <a:xfrm>
-            <a:off x="8449056" y="7287768"/>
-            <a:ext cx="329184" cy="329184"/>
-          </a:xfrm>
-          <a:prstGeom prst="ellipse">
-            <a:avLst/>
-          </a:prstGeom>
-          <a:solidFill>
-            <a:srgbClr val="FFFFFF"/>
-          </a:solidFill>
-          <a:ln w="13970">
-            <a:solidFill>
-              <a:srgbClr val="000000"/>
-            </a:solidFill>
-          </a:ln>
-          <a:effectLst/>
-        </p:spPr>
-        <p:style>
-          <a:lnRef idx="1">
-            <a:schemeClr val="accent1"/>
-          </a:lnRef>
-          <a:fillRef idx="3">
-            <a:schemeClr val="accent1"/>
-          </a:fillRef>
-          <a:effectRef idx="2">
-            <a:schemeClr val="accent1"/>
-          </a:effectRef>
-          <a:fontRef idx="minor">
-            <a:schemeClr val="lt1"/>
-          </a:fontRef>
-        </p:style>
-        <p:txBody>
-          <a:bodyPr rtlCol="0" anchor="ctr" wrap="none" lIns="0" rIns="0" tIns="0" bIns="0"/>
-          <a:lstStyle/>
-          <a:p>
-            <a:pPr algn="ctr"/>
-            <a:r>
-              <a:rPr sz="550" b="1">
-                <a:solidFill>
-                  <a:srgbClr val="000000"/>
-                </a:solidFill>
-                <a:latin typeface="Arial"/>
-              </a:rPr>
-              <a:t>PIAL</a:t>
-            </a:r>
-          </a:p>
-          <a:p>
-            <a:pPr algn="ctr"/>
-            <a:r>
-              <a:rPr sz="550" b="1">
-                <a:solidFill>
-                  <a:srgbClr val="000000"/>
-                </a:solidFill>
-                <a:latin typeface="Arial"/>
-              </a:rPr>
-              <a:t>030</a:t>
-            </a:r>
-          </a:p>
-        </p:txBody>
-      </p:sp>
-      <p:cxnSp>
-        <p:nvCxnSpPr>
-          <p:cNvPr id="271" name="Connector 270"/>
-          <p:cNvCxnSpPr/>
-          <p:nvPr/>
-        </p:nvCxnSpPr>
-        <p:spPr>
-          <a:xfrm>
-            <a:off x="8449056" y="7452360"/>
-            <a:ext cx="329184" cy="0"/>
           </a:xfrm>
           <a:prstGeom prst="line">
             <a:avLst/>
@@ -15256,9 +15276,9 @@
           <p:nvPr/>
         </p:nvCxnSpPr>
         <p:spPr>
-          <a:xfrm>
-            <a:off x="8613648" y="7132320"/>
-            <a:ext cx="0" cy="155448"/>
+          <a:xfrm flipH="1">
+            <a:off x="3456432" y="6446520"/>
+            <a:ext cx="310896" cy="0"/>
           </a:xfrm>
           <a:prstGeom prst="line">
             <a:avLst/>
@@ -15293,8 +15313,8 @@
         </p:nvSpPr>
         <p:spPr>
           <a:xfrm>
-            <a:off x="8805672" y="7296912"/>
-            <a:ext cx="538480" cy="109728"/>
+            <a:off x="4133087" y="6291072"/>
+            <a:ext cx="1253744" cy="109728"/>
           </a:xfrm>
           <a:prstGeom prst="rect">
             <a:avLst/>
@@ -15309,13 +15329,13 @@
           <a:p>
             <a:pPr algn="l"/>
             <a:r>
-              <a:rPr sz="500" b="1">
-                <a:solidFill>
-                  <a:srgbClr val="000000"/>
-                </a:solidFill>
-                <a:latin typeface="Arial"/>
-              </a:rPr>
-              <a:t>PSLL-030</a:t>
+              <a:rPr sz="500" b="0">
+                <a:solidFill>
+                  <a:srgbClr val="000000"/>
+                </a:solidFill>
+                <a:latin typeface="Arial"/>
+              </a:rPr>
+              <a:t>AIR/FUEL RATIO (REV B)</a:t>
             </a:r>
           </a:p>
         </p:txBody>
@@ -15328,8 +15348,8 @@
         </p:nvSpPr>
         <p:spPr>
           <a:xfrm>
-            <a:off x="8805672" y="7406640"/>
-            <a:ext cx="566928" cy="109728"/>
+            <a:off x="4133087" y="6400800"/>
+            <a:ext cx="1200912" cy="109728"/>
           </a:xfrm>
           <a:prstGeom prst="rect">
             <a:avLst/>
@@ -15350,55 +15370,54 @@
                 </a:solidFill>
                 <a:latin typeface="Arial"/>
               </a:rPr>
-              <a:t>(SIS-100)</a:t>
-            </a:r>
-          </a:p>
-        </p:txBody>
-      </p:sp>
-      <p:sp>
-        <p:nvSpPr>
-          <p:cNvPr id="275" name="TextBox 274"/>
-          <p:cNvSpPr txBox="1"/>
-          <p:nvPr/>
-        </p:nvSpPr>
-        <p:spPr>
-          <a:xfrm>
-            <a:off x="411480" y="7699248"/>
-            <a:ext cx="890524" cy="181610"/>
-          </a:xfrm>
-          <a:prstGeom prst="rect">
-            <a:avLst/>
-          </a:prstGeom>
-          <a:noFill/>
-        </p:spPr>
-        <p:txBody>
-          <a:bodyPr wrap="square" lIns="0" rIns="0" tIns="0" bIns="0" anchor="ctr">
-            <a:spAutoFit/>
-          </a:bodyPr>
-          <a:lstStyle/>
-          <a:p>
-            <a:pPr algn="l"/>
-            <a:r>
-              <a:rPr sz="550" b="1">
-                <a:solidFill>
-                  <a:srgbClr val="000000"/>
-                </a:solidFill>
-                <a:latin typeface="Arial"/>
-              </a:rPr>
-              <a:t>FUEL OIL FROM</a:t>
-            </a:r>
-          </a:p>
-          <a:p>
-            <a:pPr algn="l"/>
-            <a:r>
-              <a:rPr sz="550" b="1">
-                <a:solidFill>
-                  <a:srgbClr val="000000"/>
-                </a:solidFill>
-                <a:latin typeface="Arial"/>
-              </a:rPr>
-              <a:t>FUEL SYSTEM</a:t>
-            </a:r>
+              <a:t>FROM FI-001 &amp; AIC-027</a:t>
+            </a:r>
+          </a:p>
+        </p:txBody>
+      </p:sp>
+      <p:sp>
+        <p:nvSpPr>
+          <p:cNvPr id="275" name="Oval 274"/>
+          <p:cNvSpPr/>
+          <p:nvPr/>
+        </p:nvSpPr>
+        <p:spPr>
+          <a:xfrm>
+            <a:off x="8199881" y="6938010"/>
+            <a:ext cx="59436" cy="59436"/>
+          </a:xfrm>
+          <a:prstGeom prst="ellipse">
+            <a:avLst/>
+          </a:prstGeom>
+          <a:solidFill>
+            <a:srgbClr val="000000"/>
+          </a:solidFill>
+          <a:ln w="6350">
+            <a:solidFill>
+              <a:srgbClr val="000000"/>
+            </a:solidFill>
+          </a:ln>
+          <a:effectLst/>
+        </p:spPr>
+        <p:style>
+          <a:lnRef idx="1">
+            <a:schemeClr val="accent1"/>
+          </a:lnRef>
+          <a:fillRef idx="3">
+            <a:schemeClr val="accent1"/>
+          </a:fillRef>
+          <a:effectRef idx="2">
+            <a:schemeClr val="accent1"/>
+          </a:effectRef>
+          <a:fontRef idx="minor">
+            <a:schemeClr val="lt1"/>
+          </a:fontRef>
+        </p:style>
+        <p:txBody>
+          <a:bodyPr rtlCol="0" anchor="ctr"/>
+          <a:lstStyle/>
+          <a:p>
+            <a:pPr algn="ctr"/>
           </a:p>
         </p:txBody>
       </p:sp>
@@ -15410,13 +15429,182 @@
         </p:nvCxnSpPr>
         <p:spPr>
           <a:xfrm>
-            <a:off x="411480" y="8001000"/>
-            <a:ext cx="7470647" cy="0"/>
+            <a:off x="8229600" y="6967728"/>
+            <a:ext cx="219456" cy="0"/>
           </a:xfrm>
           <a:prstGeom prst="line">
             <a:avLst/>
           </a:prstGeom>
-          <a:ln w="19050">
+          <a:ln w="8890">
+            <a:solidFill>
+              <a:srgbClr val="000000"/>
+            </a:solidFill>
+          </a:ln>
+        </p:spPr>
+        <p:style>
+          <a:lnRef idx="2">
+            <a:schemeClr val="accent1"/>
+          </a:lnRef>
+          <a:fillRef idx="0">
+            <a:schemeClr val="accent1"/>
+          </a:fillRef>
+          <a:effectRef idx="1">
+            <a:schemeClr val="accent1"/>
+          </a:effectRef>
+          <a:fontRef idx="minor">
+            <a:schemeClr val="tx1"/>
+          </a:fontRef>
+        </p:style>
+      </p:cxnSp>
+      <p:sp>
+        <p:nvSpPr>
+          <p:cNvPr id="277" name="Oval 276"/>
+          <p:cNvSpPr/>
+          <p:nvPr/>
+        </p:nvSpPr>
+        <p:spPr>
+          <a:xfrm>
+            <a:off x="8449056" y="6803136"/>
+            <a:ext cx="329184" cy="329184"/>
+          </a:xfrm>
+          <a:prstGeom prst="ellipse">
+            <a:avLst/>
+          </a:prstGeom>
+          <a:solidFill>
+            <a:srgbClr val="FFFFFF"/>
+          </a:solidFill>
+          <a:ln w="13970">
+            <a:solidFill>
+              <a:srgbClr val="000000"/>
+            </a:solidFill>
+          </a:ln>
+          <a:effectLst/>
+        </p:spPr>
+        <p:style>
+          <a:lnRef idx="1">
+            <a:schemeClr val="accent1"/>
+          </a:lnRef>
+          <a:fillRef idx="3">
+            <a:schemeClr val="accent1"/>
+          </a:fillRef>
+          <a:effectRef idx="2">
+            <a:schemeClr val="accent1"/>
+          </a:effectRef>
+          <a:fontRef idx="minor">
+            <a:schemeClr val="lt1"/>
+          </a:fontRef>
+        </p:style>
+        <p:txBody>
+          <a:bodyPr rtlCol="0" anchor="ctr" wrap="none" lIns="0" rIns="0" tIns="0" bIns="0"/>
+          <a:lstStyle/>
+          <a:p>
+            <a:pPr algn="ctr"/>
+            <a:r>
+              <a:rPr sz="550" b="1">
+                <a:solidFill>
+                  <a:srgbClr val="000000"/>
+                </a:solidFill>
+                <a:latin typeface="Arial"/>
+              </a:rPr>
+              <a:t>PT</a:t>
+            </a:r>
+          </a:p>
+          <a:p>
+            <a:pPr algn="ctr"/>
+            <a:r>
+              <a:rPr sz="550" b="1">
+                <a:solidFill>
+                  <a:srgbClr val="000000"/>
+                </a:solidFill>
+                <a:latin typeface="Arial"/>
+              </a:rPr>
+              <a:t>030</a:t>
+            </a:r>
+          </a:p>
+        </p:txBody>
+      </p:sp>
+      <p:sp>
+        <p:nvSpPr>
+          <p:cNvPr id="278" name="Oval 277"/>
+          <p:cNvSpPr/>
+          <p:nvPr/>
+        </p:nvSpPr>
+        <p:spPr>
+          <a:xfrm>
+            <a:off x="8449056" y="7287768"/>
+            <a:ext cx="329184" cy="329184"/>
+          </a:xfrm>
+          <a:prstGeom prst="ellipse">
+            <a:avLst/>
+          </a:prstGeom>
+          <a:solidFill>
+            <a:srgbClr val="FFFFFF"/>
+          </a:solidFill>
+          <a:ln w="13970">
+            <a:solidFill>
+              <a:srgbClr val="000000"/>
+            </a:solidFill>
+          </a:ln>
+          <a:effectLst/>
+        </p:spPr>
+        <p:style>
+          <a:lnRef idx="1">
+            <a:schemeClr val="accent1"/>
+          </a:lnRef>
+          <a:fillRef idx="3">
+            <a:schemeClr val="accent1"/>
+          </a:fillRef>
+          <a:effectRef idx="2">
+            <a:schemeClr val="accent1"/>
+          </a:effectRef>
+          <a:fontRef idx="minor">
+            <a:schemeClr val="lt1"/>
+          </a:fontRef>
+        </p:style>
+        <p:txBody>
+          <a:bodyPr rtlCol="0" anchor="ctr" wrap="none" lIns="0" rIns="0" tIns="0" bIns="0"/>
+          <a:lstStyle/>
+          <a:p>
+            <a:pPr algn="ctr"/>
+            <a:r>
+              <a:rPr sz="550" b="1">
+                <a:solidFill>
+                  <a:srgbClr val="000000"/>
+                </a:solidFill>
+                <a:latin typeface="Arial"/>
+              </a:rPr>
+              <a:t>PIAL</a:t>
+            </a:r>
+          </a:p>
+          <a:p>
+            <a:pPr algn="ctr"/>
+            <a:r>
+              <a:rPr sz="550" b="1">
+                <a:solidFill>
+                  <a:srgbClr val="000000"/>
+                </a:solidFill>
+                <a:latin typeface="Arial"/>
+              </a:rPr>
+              <a:t>030</a:t>
+            </a:r>
+          </a:p>
+        </p:txBody>
+      </p:sp>
+      <p:cxnSp>
+        <p:nvCxnSpPr>
+          <p:cNvPr id="279" name="Connector 278"/>
+          <p:cNvCxnSpPr/>
+          <p:nvPr/>
+        </p:nvCxnSpPr>
+        <p:spPr>
+          <a:xfrm>
+            <a:off x="8449056" y="7452360"/>
+            <a:ext cx="329184" cy="0"/>
+          </a:xfrm>
+          <a:prstGeom prst="line">
+            <a:avLst/>
+          </a:prstGeom>
+          <a:ln w="8890">
             <a:solidFill>
               <a:srgbClr val="000000"/>
             </a:solidFill>
@@ -15439,7 +15627,195 @@
       </p:cxnSp>
       <p:cxnSp>
         <p:nvCxnSpPr>
-          <p:cNvPr id="277" name="Connector 276"/>
+          <p:cNvPr id="280" name="Connector 279"/>
+          <p:cNvCxnSpPr/>
+          <p:nvPr/>
+        </p:nvCxnSpPr>
+        <p:spPr>
+          <a:xfrm>
+            <a:off x="8613648" y="7132320"/>
+            <a:ext cx="0" cy="155448"/>
+          </a:xfrm>
+          <a:prstGeom prst="line">
+            <a:avLst/>
+          </a:prstGeom>
+          <a:ln w="8890">
+            <a:solidFill>
+              <a:srgbClr val="000000"/>
+            </a:solidFill>
+            <a:prstDash val="dash"/>
+          </a:ln>
+        </p:spPr>
+        <p:style>
+          <a:lnRef idx="2">
+            <a:schemeClr val="accent1"/>
+          </a:lnRef>
+          <a:fillRef idx="0">
+            <a:schemeClr val="accent1"/>
+          </a:fillRef>
+          <a:effectRef idx="1">
+            <a:schemeClr val="accent1"/>
+          </a:effectRef>
+          <a:fontRef idx="minor">
+            <a:schemeClr val="tx1"/>
+          </a:fontRef>
+        </p:style>
+      </p:cxnSp>
+      <p:sp>
+        <p:nvSpPr>
+          <p:cNvPr id="281" name="TextBox 280"/>
+          <p:cNvSpPr txBox="1"/>
+          <p:nvPr/>
+        </p:nvSpPr>
+        <p:spPr>
+          <a:xfrm>
+            <a:off x="8805672" y="7296912"/>
+            <a:ext cx="538480" cy="109728"/>
+          </a:xfrm>
+          <a:prstGeom prst="rect">
+            <a:avLst/>
+          </a:prstGeom>
+          <a:noFill/>
+        </p:spPr>
+        <p:txBody>
+          <a:bodyPr wrap="square" lIns="0" rIns="0" tIns="0" bIns="0" anchor="ctr">
+            <a:spAutoFit/>
+          </a:bodyPr>
+          <a:lstStyle/>
+          <a:p>
+            <a:pPr algn="l"/>
+            <a:r>
+              <a:rPr sz="500" b="1">
+                <a:solidFill>
+                  <a:srgbClr val="000000"/>
+                </a:solidFill>
+                <a:latin typeface="Arial"/>
+              </a:rPr>
+              <a:t>PSLL-030</a:t>
+            </a:r>
+          </a:p>
+        </p:txBody>
+      </p:sp>
+      <p:sp>
+        <p:nvSpPr>
+          <p:cNvPr id="282" name="TextBox 281"/>
+          <p:cNvSpPr txBox="1"/>
+          <p:nvPr/>
+        </p:nvSpPr>
+        <p:spPr>
+          <a:xfrm>
+            <a:off x="8805672" y="7406640"/>
+            <a:ext cx="566928" cy="109728"/>
+          </a:xfrm>
+          <a:prstGeom prst="rect">
+            <a:avLst/>
+          </a:prstGeom>
+          <a:noFill/>
+        </p:spPr>
+        <p:txBody>
+          <a:bodyPr wrap="square" lIns="0" rIns="0" tIns="0" bIns="0" anchor="ctr">
+            <a:spAutoFit/>
+          </a:bodyPr>
+          <a:lstStyle/>
+          <a:p>
+            <a:pPr algn="l"/>
+            <a:r>
+              <a:rPr sz="500" b="0">
+                <a:solidFill>
+                  <a:srgbClr val="000000"/>
+                </a:solidFill>
+                <a:latin typeface="Arial"/>
+              </a:rPr>
+              <a:t>(SIS-100)</a:t>
+            </a:r>
+          </a:p>
+        </p:txBody>
+      </p:sp>
+      <p:sp>
+        <p:nvSpPr>
+          <p:cNvPr id="283" name="TextBox 282"/>
+          <p:cNvSpPr txBox="1"/>
+          <p:nvPr/>
+        </p:nvSpPr>
+        <p:spPr>
+          <a:xfrm>
+            <a:off x="411480" y="7699248"/>
+            <a:ext cx="890524" cy="181610"/>
+          </a:xfrm>
+          <a:prstGeom prst="rect">
+            <a:avLst/>
+          </a:prstGeom>
+          <a:noFill/>
+        </p:spPr>
+        <p:txBody>
+          <a:bodyPr wrap="square" lIns="0" rIns="0" tIns="0" bIns="0" anchor="ctr">
+            <a:spAutoFit/>
+          </a:bodyPr>
+          <a:lstStyle/>
+          <a:p>
+            <a:pPr algn="l"/>
+            <a:r>
+              <a:rPr sz="550" b="1">
+                <a:solidFill>
+                  <a:srgbClr val="000000"/>
+                </a:solidFill>
+                <a:latin typeface="Arial"/>
+              </a:rPr>
+              <a:t>FUEL OIL FROM</a:t>
+            </a:r>
+          </a:p>
+          <a:p>
+            <a:pPr algn="l"/>
+            <a:r>
+              <a:rPr sz="550" b="1">
+                <a:solidFill>
+                  <a:srgbClr val="000000"/>
+                </a:solidFill>
+                <a:latin typeface="Arial"/>
+              </a:rPr>
+              <a:t>FUEL SYSTEM</a:t>
+            </a:r>
+          </a:p>
+        </p:txBody>
+      </p:sp>
+      <p:cxnSp>
+        <p:nvCxnSpPr>
+          <p:cNvPr id="284" name="Connector 283"/>
+          <p:cNvCxnSpPr/>
+          <p:nvPr/>
+        </p:nvCxnSpPr>
+        <p:spPr>
+          <a:xfrm>
+            <a:off x="411480" y="8001000"/>
+            <a:ext cx="7470647" cy="0"/>
+          </a:xfrm>
+          <a:prstGeom prst="line">
+            <a:avLst/>
+          </a:prstGeom>
+          <a:ln w="19050">
+            <a:solidFill>
+              <a:srgbClr val="000000"/>
+            </a:solidFill>
+          </a:ln>
+        </p:spPr>
+        <p:style>
+          <a:lnRef idx="2">
+            <a:schemeClr val="accent1"/>
+          </a:lnRef>
+          <a:fillRef idx="0">
+            <a:schemeClr val="accent1"/>
+          </a:fillRef>
+          <a:effectRef idx="1">
+            <a:schemeClr val="accent1"/>
+          </a:effectRef>
+          <a:fontRef idx="minor">
+            <a:schemeClr val="tx1"/>
+          </a:fontRef>
+        </p:style>
+      </p:cxnSp>
+      <p:cxnSp>
+        <p:nvCxnSpPr>
+          <p:cNvPr id="285" name="Connector 284"/>
           <p:cNvCxnSpPr/>
           <p:nvPr/>
         </p:nvCxnSpPr>
@@ -15474,7 +15850,7 @@
       </p:cxnSp>
       <p:cxnSp>
         <p:nvCxnSpPr>
-          <p:cNvPr id="278" name="Connector 277"/>
+          <p:cNvPr id="286" name="Connector 285"/>
           <p:cNvCxnSpPr/>
           <p:nvPr/>
         </p:nvCxnSpPr>
@@ -15510,7 +15886,7 @@
       </p:cxnSp>
       <p:sp>
         <p:nvSpPr>
-          <p:cNvPr id="279" name="TextBox 278"/>
+          <p:cNvPr id="287" name="TextBox 286"/>
           <p:cNvSpPr txBox="1"/>
           <p:nvPr/>
         </p:nvSpPr>
@@ -15545,7 +15921,7 @@
       </p:sp>
       <p:sp>
         <p:nvSpPr>
-          <p:cNvPr id="280" name="Freeform 279"/>
+          <p:cNvPr id="288" name="Freeform 287"/>
           <p:cNvSpPr/>
           <p:nvPr/>
         </p:nvSpPr>
@@ -15612,7 +15988,7 @@
       </p:sp>
       <p:sp>
         <p:nvSpPr>
-          <p:cNvPr id="281" name="TextBox 280"/>
+          <p:cNvPr id="289" name="TextBox 288"/>
           <p:cNvSpPr txBox="1"/>
           <p:nvPr/>
         </p:nvSpPr>
@@ -15647,7 +16023,7 @@
       </p:sp>
       <p:sp>
         <p:nvSpPr>
-          <p:cNvPr id="282" name="Oval 281"/>
+          <p:cNvPr id="290" name="Oval 289"/>
           <p:cNvSpPr/>
           <p:nvPr/>
         </p:nvSpPr>
@@ -15693,7 +16069,7 @@
       </p:sp>
       <p:cxnSp>
         <p:nvCxnSpPr>
-          <p:cNvPr id="283" name="Connector 282"/>
+          <p:cNvPr id="291" name="Connector 290"/>
           <p:cNvCxnSpPr/>
           <p:nvPr/>
         </p:nvCxnSpPr>
@@ -15728,7 +16104,7 @@
       </p:cxnSp>
       <p:sp>
         <p:nvSpPr>
-          <p:cNvPr id="284" name="Oval 283"/>
+          <p:cNvPr id="292" name="Oval 291"/>
           <p:cNvSpPr/>
           <p:nvPr/>
         </p:nvSpPr>
@@ -15795,7 +16171,7 @@
       </p:sp>
       <p:cxnSp>
         <p:nvCxnSpPr>
-          <p:cNvPr id="285" name="Connector 284"/>
+          <p:cNvPr id="293" name="Connector 292"/>
           <p:cNvCxnSpPr/>
           <p:nvPr/>
         </p:nvCxnSpPr>
@@ -15830,7 +16206,7 @@
       </p:cxnSp>
       <p:cxnSp>
         <p:nvCxnSpPr>
-          <p:cNvPr id="286" name="Connector 285"/>
+          <p:cNvPr id="294" name="Connector 293"/>
           <p:cNvCxnSpPr/>
           <p:nvPr/>
         </p:nvCxnSpPr>
@@ -15865,7 +16241,7 @@
       </p:cxnSp>
       <p:sp>
         <p:nvSpPr>
-          <p:cNvPr id="287" name="TextBox 286"/>
+          <p:cNvPr id="295" name="TextBox 294"/>
           <p:cNvSpPr txBox="1"/>
           <p:nvPr/>
         </p:nvSpPr>
@@ -15900,7 +16276,7 @@
       </p:sp>
       <p:cxnSp>
         <p:nvCxnSpPr>
-          <p:cNvPr id="288" name="Connector 287"/>
+          <p:cNvPr id="296" name="Connector 295"/>
           <p:cNvCxnSpPr/>
           <p:nvPr/>
         </p:nvCxnSpPr>
@@ -15935,7 +16311,7 @@
       </p:cxnSp>
       <p:sp>
         <p:nvSpPr>
-          <p:cNvPr id="289" name="Oval 288"/>
+          <p:cNvPr id="297" name="Oval 296"/>
           <p:cNvSpPr/>
           <p:nvPr/>
         </p:nvSpPr>
@@ -16002,7 +16378,7 @@
       </p:sp>
       <p:cxnSp>
         <p:nvCxnSpPr>
-          <p:cNvPr id="290" name="Connector 289"/>
+          <p:cNvPr id="298" name="Connector 297"/>
           <p:cNvCxnSpPr/>
           <p:nvPr/>
         </p:nvCxnSpPr>
@@ -16037,7 +16413,7 @@
       </p:cxnSp>
       <p:cxnSp>
         <p:nvCxnSpPr>
-          <p:cNvPr id="291" name="Connector 290"/>
+          <p:cNvPr id="299" name="Connector 298"/>
           <p:cNvCxnSpPr/>
           <p:nvPr/>
         </p:nvCxnSpPr>
@@ -16073,7 +16449,7 @@
       </p:cxnSp>
       <p:sp>
         <p:nvSpPr>
-          <p:cNvPr id="292" name="TextBox 291"/>
+          <p:cNvPr id="300" name="TextBox 299"/>
           <p:cNvSpPr txBox="1"/>
           <p:nvPr/>
         </p:nvSpPr>
@@ -16108,7 +16484,7 @@
       </p:sp>
       <p:sp>
         <p:nvSpPr>
-          <p:cNvPr id="293" name="Freeform 292"/>
+          <p:cNvPr id="301" name="Freeform 300"/>
           <p:cNvSpPr/>
           <p:nvPr/>
         </p:nvSpPr>
@@ -16175,7 +16551,7 @@
       </p:sp>
       <p:cxnSp>
         <p:nvCxnSpPr>
-          <p:cNvPr id="294" name="Connector 293"/>
+          <p:cNvPr id="302" name="Connector 301"/>
           <p:cNvCxnSpPr/>
           <p:nvPr/>
         </p:nvCxnSpPr>
@@ -16210,7 +16586,7 @@
       </p:cxnSp>
       <p:sp>
         <p:nvSpPr>
-          <p:cNvPr id="295" name="Rectangle 294"/>
+          <p:cNvPr id="303" name="Rectangle 302"/>
           <p:cNvSpPr/>
           <p:nvPr/>
         </p:nvSpPr>
@@ -16256,7 +16632,7 @@
       </p:sp>
       <p:sp>
         <p:nvSpPr>
-          <p:cNvPr id="296" name="TextBox 295"/>
+          <p:cNvPr id="304" name="TextBox 303"/>
           <p:cNvSpPr txBox="1"/>
           <p:nvPr/>
         </p:nvSpPr>
@@ -16291,7 +16667,7 @@
       </p:sp>
       <p:sp>
         <p:nvSpPr>
-          <p:cNvPr id="297" name="TextBox 296"/>
+          <p:cNvPr id="305" name="TextBox 304"/>
           <p:cNvSpPr txBox="1"/>
           <p:nvPr/>
         </p:nvSpPr>
@@ -16326,7 +16702,7 @@
       </p:sp>
       <p:sp>
         <p:nvSpPr>
-          <p:cNvPr id="298" name="Oval 297"/>
+          <p:cNvPr id="306" name="Oval 305"/>
           <p:cNvSpPr/>
           <p:nvPr/>
         </p:nvSpPr>
@@ -16372,7 +16748,7 @@
       </p:sp>
       <p:cxnSp>
         <p:nvCxnSpPr>
-          <p:cNvPr id="299" name="Connector 298"/>
+          <p:cNvPr id="307" name="Connector 306"/>
           <p:cNvCxnSpPr/>
           <p:nvPr/>
         </p:nvCxnSpPr>
@@ -16408,7 +16784,7 @@
       </p:cxnSp>
       <p:sp>
         <p:nvSpPr>
-          <p:cNvPr id="300" name="Freeform 299"/>
+          <p:cNvPr id="308" name="Freeform 307"/>
           <p:cNvSpPr/>
           <p:nvPr/>
         </p:nvSpPr>
@@ -16475,7 +16851,7 @@
       </p:sp>
       <p:cxnSp>
         <p:nvCxnSpPr>
-          <p:cNvPr id="301" name="Connector 300"/>
+          <p:cNvPr id="309" name="Connector 308"/>
           <p:cNvCxnSpPr/>
           <p:nvPr/>
         </p:nvCxnSpPr>
@@ -16510,7 +16886,7 @@
       </p:cxnSp>
       <p:sp>
         <p:nvSpPr>
-          <p:cNvPr id="302" name="Rectangle 301"/>
+          <p:cNvPr id="310" name="Rectangle 309"/>
           <p:cNvSpPr/>
           <p:nvPr/>
         </p:nvSpPr>
@@ -16556,7 +16932,7 @@
       </p:sp>
       <p:sp>
         <p:nvSpPr>
-          <p:cNvPr id="303" name="TextBox 302"/>
+          <p:cNvPr id="311" name="TextBox 310"/>
           <p:cNvSpPr txBox="1"/>
           <p:nvPr/>
         </p:nvSpPr>
@@ -16591,7 +16967,7 @@
       </p:sp>
       <p:sp>
         <p:nvSpPr>
-          <p:cNvPr id="304" name="TextBox 303"/>
+          <p:cNvPr id="312" name="TextBox 311"/>
           <p:cNvSpPr txBox="1"/>
           <p:nvPr/>
         </p:nvSpPr>
@@ -16626,7 +17002,7 @@
       </p:sp>
       <p:sp>
         <p:nvSpPr>
-          <p:cNvPr id="305" name="TextBox 304"/>
+          <p:cNvPr id="313" name="TextBox 312"/>
           <p:cNvSpPr txBox="1"/>
           <p:nvPr/>
         </p:nvSpPr>
@@ -16661,7 +17037,7 @@
       </p:sp>
       <p:sp>
         <p:nvSpPr>
-          <p:cNvPr id="306" name="Freeform 305"/>
+          <p:cNvPr id="314" name="Freeform 313"/>
           <p:cNvSpPr/>
           <p:nvPr/>
         </p:nvSpPr>
@@ -16728,7 +17104,7 @@
       </p:sp>
       <p:cxnSp>
         <p:nvCxnSpPr>
-          <p:cNvPr id="307" name="Connector 306"/>
+          <p:cNvPr id="315" name="Connector 314"/>
           <p:cNvCxnSpPr/>
           <p:nvPr/>
         </p:nvCxnSpPr>
@@ -16763,7 +17139,7 @@
       </p:cxnSp>
       <p:sp>
         <p:nvSpPr>
-          <p:cNvPr id="308" name="Rectangle 307"/>
+          <p:cNvPr id="316" name="Rectangle 315"/>
           <p:cNvSpPr/>
           <p:nvPr/>
         </p:nvSpPr>
@@ -16809,7 +17185,7 @@
       </p:sp>
       <p:sp>
         <p:nvSpPr>
-          <p:cNvPr id="309" name="TextBox 308"/>
+          <p:cNvPr id="317" name="TextBox 316"/>
           <p:cNvSpPr txBox="1"/>
           <p:nvPr/>
         </p:nvSpPr>
@@ -16844,7 +17220,7 @@
       </p:sp>
       <p:sp>
         <p:nvSpPr>
-          <p:cNvPr id="310" name="TextBox 309"/>
+          <p:cNvPr id="318" name="TextBox 317"/>
           <p:cNvSpPr txBox="1"/>
           <p:nvPr/>
         </p:nvSpPr>
@@ -16879,7 +17255,7 @@
       </p:sp>
       <p:sp>
         <p:nvSpPr>
-          <p:cNvPr id="311" name="Freeform 310"/>
+          <p:cNvPr id="319" name="Freeform 318"/>
           <p:cNvSpPr/>
           <p:nvPr/>
         </p:nvSpPr>
@@ -16946,7 +17322,7 @@
       </p:sp>
       <p:cxnSp>
         <p:nvCxnSpPr>
-          <p:cNvPr id="312" name="Connector 311"/>
+          <p:cNvPr id="320" name="Connector 319"/>
           <p:cNvCxnSpPr/>
           <p:nvPr/>
         </p:nvCxnSpPr>
@@ -16981,7 +17357,7 @@
       </p:cxnSp>
       <p:sp>
         <p:nvSpPr>
-          <p:cNvPr id="313" name="Freeform 312"/>
+          <p:cNvPr id="321" name="Freeform 320"/>
           <p:cNvSpPr/>
           <p:nvPr/>
         </p:nvSpPr>
@@ -17066,7 +17442,7 @@
       </p:sp>
       <p:sp>
         <p:nvSpPr>
-          <p:cNvPr id="314" name="TextBox 313"/>
+          <p:cNvPr id="322" name="TextBox 321"/>
           <p:cNvSpPr txBox="1"/>
           <p:nvPr/>
         </p:nvSpPr>
@@ -17101,7 +17477,7 @@
       </p:sp>
       <p:cxnSp>
         <p:nvCxnSpPr>
-          <p:cNvPr id="315" name="Connector 314"/>
+          <p:cNvPr id="323" name="Connector 322"/>
           <p:cNvCxnSpPr/>
           <p:nvPr/>
         </p:nvCxnSpPr>
@@ -17137,7 +17513,7 @@
       </p:cxnSp>
       <p:cxnSp>
         <p:nvCxnSpPr>
-          <p:cNvPr id="316" name="Connector 315"/>
+          <p:cNvPr id="324" name="Connector 323"/>
           <p:cNvCxnSpPr/>
           <p:nvPr/>
         </p:nvCxnSpPr>
@@ -17173,7 +17549,7 @@
       </p:cxnSp>
       <p:cxnSp>
         <p:nvCxnSpPr>
-          <p:cNvPr id="317" name="Connector 316"/>
+          <p:cNvPr id="325" name="Connector 324"/>
           <p:cNvCxnSpPr/>
           <p:nvPr/>
         </p:nvCxnSpPr>
@@ -17209,7 +17585,7 @@
       </p:cxnSp>
       <p:sp>
         <p:nvSpPr>
-          <p:cNvPr id="318" name="Oval 317"/>
+          <p:cNvPr id="326" name="Oval 325"/>
           <p:cNvSpPr/>
           <p:nvPr/>
         </p:nvSpPr>
@@ -17255,7 +17631,7 @@
       </p:sp>
       <p:cxnSp>
         <p:nvCxnSpPr>
-          <p:cNvPr id="319" name="Connector 318"/>
+          <p:cNvPr id="327" name="Connector 326"/>
           <p:cNvCxnSpPr/>
           <p:nvPr/>
         </p:nvCxnSpPr>
@@ -17290,7 +17666,7 @@
       </p:cxnSp>
       <p:sp>
         <p:nvSpPr>
-          <p:cNvPr id="320" name="Oval 319"/>
+          <p:cNvPr id="328" name="Oval 327"/>
           <p:cNvSpPr/>
           <p:nvPr/>
         </p:nvSpPr>
@@ -17357,7 +17733,7 @@
       </p:sp>
       <p:sp>
         <p:nvSpPr>
-          <p:cNvPr id="321" name="Oval 320"/>
+          <p:cNvPr id="329" name="Oval 328"/>
           <p:cNvSpPr/>
           <p:nvPr/>
         </p:nvSpPr>
@@ -17424,7 +17800,7 @@
       </p:sp>
       <p:cxnSp>
         <p:nvCxnSpPr>
-          <p:cNvPr id="322" name="Connector 321"/>
+          <p:cNvPr id="330" name="Connector 329"/>
           <p:cNvCxnSpPr/>
           <p:nvPr/>
         </p:nvCxnSpPr>
@@ -17459,7 +17835,7 @@
       </p:cxnSp>
       <p:cxnSp>
         <p:nvCxnSpPr>
-          <p:cNvPr id="323" name="Connector 322"/>
+          <p:cNvPr id="331" name="Connector 330"/>
           <p:cNvCxnSpPr/>
           <p:nvPr/>
         </p:nvCxnSpPr>
@@ -17495,7 +17871,7 @@
       </p:cxnSp>
       <p:sp>
         <p:nvSpPr>
-          <p:cNvPr id="324" name="TextBox 323"/>
+          <p:cNvPr id="332" name="TextBox 331"/>
           <p:cNvSpPr txBox="1"/>
           <p:nvPr/>
         </p:nvSpPr>
@@ -17530,7 +17906,7 @@
       </p:sp>
       <p:sp>
         <p:nvSpPr>
-          <p:cNvPr id="325" name="TextBox 324"/>
+          <p:cNvPr id="333" name="TextBox 332"/>
           <p:cNvSpPr txBox="1"/>
           <p:nvPr/>
         </p:nvSpPr>
@@ -17565,7 +17941,7 @@
       </p:sp>
       <p:sp>
         <p:nvSpPr>
-          <p:cNvPr id="326" name="Freeform 325"/>
+          <p:cNvPr id="334" name="Freeform 333"/>
           <p:cNvSpPr/>
           <p:nvPr/>
         </p:nvSpPr>
@@ -17632,7 +18008,7 @@
       </p:sp>
       <p:sp>
         <p:nvSpPr>
-          <p:cNvPr id="327" name="TextBox 326"/>
+          <p:cNvPr id="335" name="TextBox 334"/>
           <p:cNvSpPr txBox="1"/>
           <p:nvPr/>
         </p:nvSpPr>
@@ -17667,7 +18043,7 @@
       </p:sp>
       <p:sp>
         <p:nvSpPr>
-          <p:cNvPr id="328" name="TextBox 327"/>
+          <p:cNvPr id="336" name="TextBox 335"/>
           <p:cNvSpPr txBox="1"/>
           <p:nvPr/>
         </p:nvSpPr>
@@ -17702,7 +18078,7 @@
       </p:sp>
       <p:sp>
         <p:nvSpPr>
-          <p:cNvPr id="329" name="Rectangle 328"/>
+          <p:cNvPr id="337" name="Rectangle 336"/>
           <p:cNvSpPr/>
           <p:nvPr/>
         </p:nvSpPr>
@@ -17746,7 +18122,7 @@
       </p:sp>
       <p:sp>
         <p:nvSpPr>
-          <p:cNvPr id="330" name="TextBox 329"/>
+          <p:cNvPr id="338" name="TextBox 337"/>
           <p:cNvSpPr txBox="1"/>
           <p:nvPr/>
         </p:nvSpPr>
@@ -17781,7 +18157,7 @@
       </p:sp>
       <p:cxnSp>
         <p:nvCxnSpPr>
-          <p:cNvPr id="331" name="Connector 330"/>
+          <p:cNvPr id="339" name="Connector 338"/>
           <p:cNvCxnSpPr/>
           <p:nvPr/>
         </p:nvCxnSpPr>
@@ -17816,7 +18192,7 @@
       </p:cxnSp>
       <p:sp>
         <p:nvSpPr>
-          <p:cNvPr id="332" name="TextBox 331"/>
+          <p:cNvPr id="340" name="TextBox 339"/>
           <p:cNvSpPr txBox="1"/>
           <p:nvPr/>
         </p:nvSpPr>
@@ -17851,7 +18227,7 @@
       </p:sp>
       <p:cxnSp>
         <p:nvCxnSpPr>
-          <p:cNvPr id="333" name="Connector 332"/>
+          <p:cNvPr id="341" name="Connector 340"/>
           <p:cNvCxnSpPr/>
           <p:nvPr/>
         </p:nvCxnSpPr>
@@ -17886,7 +18262,7 @@
       </p:cxnSp>
       <p:sp>
         <p:nvSpPr>
-          <p:cNvPr id="334" name="TextBox 333"/>
+          <p:cNvPr id="342" name="TextBox 341"/>
           <p:cNvSpPr txBox="1"/>
           <p:nvPr/>
         </p:nvSpPr>
@@ -17921,7 +18297,7 @@
       </p:sp>
       <p:cxnSp>
         <p:nvCxnSpPr>
-          <p:cNvPr id="335" name="Connector 334"/>
+          <p:cNvPr id="343" name="Connector 342"/>
           <p:cNvCxnSpPr/>
           <p:nvPr/>
         </p:nvCxnSpPr>
@@ -17957,7 +18333,7 @@
       </p:cxnSp>
       <p:sp>
         <p:nvSpPr>
-          <p:cNvPr id="336" name="TextBox 335"/>
+          <p:cNvPr id="344" name="TextBox 343"/>
           <p:cNvSpPr txBox="1"/>
           <p:nvPr/>
         </p:nvSpPr>
@@ -17992,7 +18368,7 @@
       </p:sp>
       <p:cxnSp>
         <p:nvCxnSpPr>
-          <p:cNvPr id="337" name="Connector 336"/>
+          <p:cNvPr id="345" name="Connector 344"/>
           <p:cNvCxnSpPr/>
           <p:nvPr/>
         </p:nvCxnSpPr>
@@ -18027,7 +18403,7 @@
       </p:cxnSp>
       <p:sp>
         <p:nvSpPr>
-          <p:cNvPr id="338" name="Freeform 337"/>
+          <p:cNvPr id="346" name="Freeform 345"/>
           <p:cNvSpPr/>
           <p:nvPr/>
         </p:nvSpPr>
@@ -18094,7 +18470,7 @@
       </p:sp>
       <p:sp>
         <p:nvSpPr>
-          <p:cNvPr id="339" name="TextBox 338"/>
+          <p:cNvPr id="347" name="TextBox 346"/>
           <p:cNvSpPr txBox="1"/>
           <p:nvPr/>
         </p:nvSpPr>
@@ -18129,7 +18505,7 @@
       </p:sp>
       <p:cxnSp>
         <p:nvCxnSpPr>
-          <p:cNvPr id="340" name="Connector 339"/>
+          <p:cNvPr id="348" name="Connector 347"/>
           <p:cNvCxnSpPr/>
           <p:nvPr/>
         </p:nvCxnSpPr>
@@ -18164,7 +18540,7 @@
       </p:cxnSp>
       <p:sp>
         <p:nvSpPr>
-          <p:cNvPr id="341" name="Freeform 340"/>
+          <p:cNvPr id="349" name="Freeform 348"/>
           <p:cNvSpPr/>
           <p:nvPr/>
         </p:nvSpPr>
@@ -18231,7 +18607,7 @@
       </p:sp>
       <p:cxnSp>
         <p:nvCxnSpPr>
-          <p:cNvPr id="342" name="Connector 341"/>
+          <p:cNvPr id="350" name="Connector 349"/>
           <p:cNvCxnSpPr/>
           <p:nvPr/>
         </p:nvCxnSpPr>
@@ -18266,7 +18642,7 @@
       </p:cxnSp>
       <p:sp>
         <p:nvSpPr>
-          <p:cNvPr id="343" name="Freeform 342"/>
+          <p:cNvPr id="351" name="Freeform 350"/>
           <p:cNvSpPr/>
           <p:nvPr/>
         </p:nvSpPr>
@@ -18351,7 +18727,7 @@
       </p:sp>
       <p:sp>
         <p:nvSpPr>
-          <p:cNvPr id="344" name="TextBox 343"/>
+          <p:cNvPr id="352" name="TextBox 351"/>
           <p:cNvSpPr txBox="1"/>
           <p:nvPr/>
         </p:nvSpPr>
@@ -18386,7 +18762,7 @@
       </p:sp>
       <p:sp>
         <p:nvSpPr>
-          <p:cNvPr id="345" name="TextBox 344"/>
+          <p:cNvPr id="353" name="TextBox 352"/>
           <p:cNvSpPr txBox="1"/>
           <p:nvPr/>
         </p:nvSpPr>
@@ -18421,7 +18797,7 @@
       </p:sp>
       <p:cxnSp>
         <p:nvCxnSpPr>
-          <p:cNvPr id="346" name="Connector 345"/>
+          <p:cNvPr id="354" name="Connector 353"/>
           <p:cNvCxnSpPr/>
           <p:nvPr/>
         </p:nvCxnSpPr>
@@ -18456,7 +18832,7 @@
       </p:cxnSp>
       <p:sp>
         <p:nvSpPr>
-          <p:cNvPr id="347" name="Freeform 346"/>
+          <p:cNvPr id="355" name="Freeform 354"/>
           <p:cNvSpPr/>
           <p:nvPr/>
         </p:nvSpPr>
@@ -18523,7 +18899,7 @@
       </p:sp>
       <p:cxnSp>
         <p:nvCxnSpPr>
-          <p:cNvPr id="348" name="Connector 347"/>
+          <p:cNvPr id="356" name="Connector 355"/>
           <p:cNvCxnSpPr/>
           <p:nvPr/>
         </p:nvCxnSpPr>
@@ -18558,7 +18934,7 @@
       </p:cxnSp>
       <p:sp>
         <p:nvSpPr>
-          <p:cNvPr id="349" name="Rectangle 348"/>
+          <p:cNvPr id="357" name="Rectangle 356"/>
           <p:cNvSpPr/>
           <p:nvPr/>
         </p:nvSpPr>
@@ -18604,7 +18980,7 @@
       </p:sp>
       <p:sp>
         <p:nvSpPr>
-          <p:cNvPr id="350" name="TextBox 349"/>
+          <p:cNvPr id="358" name="TextBox 357"/>
           <p:cNvSpPr txBox="1"/>
           <p:nvPr/>
         </p:nvSpPr>
@@ -18639,7 +19015,7 @@
       </p:sp>
       <p:sp>
         <p:nvSpPr>
-          <p:cNvPr id="351" name="TextBox 350"/>
+          <p:cNvPr id="359" name="TextBox 358"/>
           <p:cNvSpPr txBox="1"/>
           <p:nvPr/>
         </p:nvSpPr>
@@ -18674,7 +19050,7 @@
       </p:sp>
       <p:cxnSp>
         <p:nvCxnSpPr>
-          <p:cNvPr id="352" name="Connector 351"/>
+          <p:cNvPr id="360" name="Connector 359"/>
           <p:cNvCxnSpPr/>
           <p:nvPr/>
         </p:nvCxnSpPr>
@@ -18709,7 +19085,7 @@
       </p:cxnSp>
       <p:sp>
         <p:nvSpPr>
-          <p:cNvPr id="353" name="Freeform 352"/>
+          <p:cNvPr id="361" name="Freeform 360"/>
           <p:cNvSpPr/>
           <p:nvPr/>
         </p:nvSpPr>
@@ -18773,7 +19149,7 @@
       </p:sp>
       <p:cxnSp>
         <p:nvCxnSpPr>
-          <p:cNvPr id="354" name="Connector 353"/>
+          <p:cNvPr id="362" name="Connector 361"/>
           <p:cNvCxnSpPr/>
           <p:nvPr/>
         </p:nvCxnSpPr>
@@ -18808,7 +19184,7 @@
       </p:cxnSp>
       <p:sp>
         <p:nvSpPr>
-          <p:cNvPr id="355" name="TextBox 354"/>
+          <p:cNvPr id="363" name="TextBox 362"/>
           <p:cNvSpPr txBox="1"/>
           <p:nvPr/>
         </p:nvSpPr>
@@ -18843,7 +19219,7 @@
       </p:sp>
       <p:cxnSp>
         <p:nvCxnSpPr>
-          <p:cNvPr id="356" name="Connector 355"/>
+          <p:cNvPr id="364" name="Connector 363"/>
           <p:cNvCxnSpPr/>
           <p:nvPr/>
         </p:nvCxnSpPr>
@@ -18878,7 +19254,7 @@
       </p:cxnSp>
       <p:cxnSp>
         <p:nvCxnSpPr>
-          <p:cNvPr id="357" name="Connector 356"/>
+          <p:cNvPr id="365" name="Connector 364"/>
           <p:cNvCxnSpPr/>
           <p:nvPr/>
         </p:nvCxnSpPr>
@@ -18913,7 +19289,7 @@
       </p:cxnSp>
       <p:cxnSp>
         <p:nvCxnSpPr>
-          <p:cNvPr id="358" name="Connector 357"/>
+          <p:cNvPr id="366" name="Connector 365"/>
           <p:cNvCxnSpPr/>
           <p:nvPr/>
         </p:nvCxnSpPr>
@@ -18948,7 +19324,7 @@
       </p:cxnSp>
       <p:sp>
         <p:nvSpPr>
-          <p:cNvPr id="359" name="TextBox 358"/>
+          <p:cNvPr id="367" name="TextBox 366"/>
           <p:cNvSpPr txBox="1"/>
           <p:nvPr/>
         </p:nvSpPr>
@@ -18983,7 +19359,7 @@
       </p:sp>
       <p:sp>
         <p:nvSpPr>
-          <p:cNvPr id="360" name="Freeform 359"/>
+          <p:cNvPr id="368" name="Freeform 367"/>
           <p:cNvSpPr/>
           <p:nvPr/>
         </p:nvSpPr>
@@ -19050,7 +19426,7 @@
       </p:sp>
       <p:cxnSp>
         <p:nvCxnSpPr>
-          <p:cNvPr id="361" name="Connector 360"/>
+          <p:cNvPr id="369" name="Connector 368"/>
           <p:cNvCxnSpPr/>
           <p:nvPr/>
         </p:nvCxnSpPr>
@@ -19086,7 +19462,7 @@
       </p:cxnSp>
       <p:sp>
         <p:nvSpPr>
-          <p:cNvPr id="362" name="TextBox 361"/>
+          <p:cNvPr id="370" name="TextBox 369"/>
           <p:cNvSpPr txBox="1"/>
           <p:nvPr/>
         </p:nvSpPr>
@@ -19121,7 +19497,7 @@
       </p:sp>
       <p:sp>
         <p:nvSpPr>
-          <p:cNvPr id="363" name="Oval 362"/>
+          <p:cNvPr id="371" name="Oval 370"/>
           <p:cNvSpPr/>
           <p:nvPr/>
         </p:nvSpPr>
@@ -19188,7 +19564,7 @@
       </p:sp>
       <p:sp>
         <p:nvSpPr>
-          <p:cNvPr id="364" name="TextBox 363"/>
+          <p:cNvPr id="372" name="TextBox 371"/>
           <p:cNvSpPr txBox="1"/>
           <p:nvPr/>
         </p:nvSpPr>
@@ -19223,7 +19599,7 @@
       </p:sp>
       <p:sp>
         <p:nvSpPr>
-          <p:cNvPr id="365" name="Oval 364"/>
+          <p:cNvPr id="373" name="Oval 372"/>
           <p:cNvSpPr/>
           <p:nvPr/>
         </p:nvSpPr>
@@ -19290,7 +19666,7 @@
       </p:sp>
       <p:cxnSp>
         <p:nvCxnSpPr>
-          <p:cNvPr id="366" name="Connector 365"/>
+          <p:cNvPr id="374" name="Connector 373"/>
           <p:cNvCxnSpPr/>
           <p:nvPr/>
         </p:nvCxnSpPr>
@@ -19325,7 +19701,7 @@
       </p:cxnSp>
       <p:sp>
         <p:nvSpPr>
-          <p:cNvPr id="367" name="TextBox 366"/>
+          <p:cNvPr id="375" name="TextBox 374"/>
           <p:cNvSpPr txBox="1"/>
           <p:nvPr/>
         </p:nvSpPr>
@@ -19360,7 +19736,7 @@
       </p:sp>
       <p:sp>
         <p:nvSpPr>
-          <p:cNvPr id="368" name="Rectangle 367"/>
+          <p:cNvPr id="376" name="Rectangle 375"/>
           <p:cNvSpPr/>
           <p:nvPr/>
         </p:nvSpPr>
@@ -19406,7 +19782,7 @@
       </p:sp>
       <p:sp>
         <p:nvSpPr>
-          <p:cNvPr id="369" name="Oval 368"/>
+          <p:cNvPr id="377" name="Oval 376"/>
           <p:cNvSpPr/>
           <p:nvPr/>
         </p:nvSpPr>
@@ -19473,7 +19849,7 @@
       </p:sp>
       <p:cxnSp>
         <p:nvCxnSpPr>
-          <p:cNvPr id="370" name="Connector 369"/>
+          <p:cNvPr id="378" name="Connector 377"/>
           <p:cNvCxnSpPr/>
           <p:nvPr/>
         </p:nvCxnSpPr>
@@ -19508,7 +19884,7 @@
       </p:cxnSp>
       <p:sp>
         <p:nvSpPr>
-          <p:cNvPr id="371" name="TextBox 370"/>
+          <p:cNvPr id="379" name="TextBox 378"/>
           <p:cNvSpPr txBox="1"/>
           <p:nvPr/>
         </p:nvSpPr>
@@ -19543,7 +19919,7 @@
       </p:sp>
       <p:sp>
         <p:nvSpPr>
-          <p:cNvPr id="372" name="TextBox 371"/>
+          <p:cNvPr id="380" name="TextBox 379"/>
           <p:cNvSpPr txBox="1"/>
           <p:nvPr/>
         </p:nvSpPr>
@@ -19578,7 +19954,7 @@
       </p:sp>
       <p:sp>
         <p:nvSpPr>
-          <p:cNvPr id="373" name="TextBox 372"/>
+          <p:cNvPr id="381" name="TextBox 380"/>
           <p:cNvSpPr txBox="1"/>
           <p:nvPr/>
         </p:nvSpPr>
@@ -19613,7 +19989,7 @@
       </p:sp>
       <p:sp>
         <p:nvSpPr>
-          <p:cNvPr id="374" name="TextBox 373"/>
+          <p:cNvPr id="382" name="TextBox 381"/>
           <p:cNvSpPr txBox="1"/>
           <p:nvPr/>
         </p:nvSpPr>
@@ -19648,7 +20024,7 @@
       </p:sp>
       <p:cxnSp>
         <p:nvCxnSpPr>
-          <p:cNvPr id="375" name="Connector 374"/>
+          <p:cNvPr id="383" name="Connector 382"/>
           <p:cNvCxnSpPr/>
           <p:nvPr/>
         </p:nvCxnSpPr>
@@ -19683,7 +20059,7 @@
       </p:cxnSp>
       <p:sp>
         <p:nvSpPr>
-          <p:cNvPr id="376" name="TextBox 375"/>
+          <p:cNvPr id="384" name="TextBox 383"/>
           <p:cNvSpPr txBox="1"/>
           <p:nvPr/>
         </p:nvSpPr>
@@ -19718,7 +20094,7 @@
       </p:sp>
       <p:sp>
         <p:nvSpPr>
-          <p:cNvPr id="377" name="TextBox 376"/>
+          <p:cNvPr id="385" name="TextBox 384"/>
           <p:cNvSpPr txBox="1"/>
           <p:nvPr/>
         </p:nvSpPr>
@@ -19753,7 +20129,7 @@
       </p:sp>
       <p:sp>
         <p:nvSpPr>
-          <p:cNvPr id="378" name="TextBox 377"/>
+          <p:cNvPr id="386" name="TextBox 385"/>
           <p:cNvSpPr txBox="1"/>
           <p:nvPr/>
         </p:nvSpPr>
@@ -19788,7 +20164,7 @@
       </p:sp>
       <p:sp>
         <p:nvSpPr>
-          <p:cNvPr id="379" name="TextBox 378"/>
+          <p:cNvPr id="387" name="TextBox 386"/>
           <p:cNvSpPr txBox="1"/>
           <p:nvPr/>
         </p:nvSpPr>
@@ -19823,7 +20199,7 @@
       </p:sp>
       <p:sp>
         <p:nvSpPr>
-          <p:cNvPr id="380" name="TextBox 379"/>
+          <p:cNvPr id="388" name="TextBox 387"/>
           <p:cNvSpPr txBox="1"/>
           <p:nvPr/>
         </p:nvSpPr>
@@ -19858,7 +20234,7 @@
       </p:sp>
       <p:sp>
         <p:nvSpPr>
-          <p:cNvPr id="381" name="TextBox 380"/>
+          <p:cNvPr id="389" name="TextBox 388"/>
           <p:cNvSpPr txBox="1"/>
           <p:nvPr/>
         </p:nvSpPr>
@@ -19893,7 +20269,7 @@
       </p:sp>
       <p:sp>
         <p:nvSpPr>
-          <p:cNvPr id="382" name="TextBox 381"/>
+          <p:cNvPr id="390" name="TextBox 389"/>
           <p:cNvSpPr txBox="1"/>
           <p:nvPr/>
         </p:nvSpPr>
@@ -19928,7 +20304,7 @@
       </p:sp>
       <p:sp>
         <p:nvSpPr>
-          <p:cNvPr id="383" name="TextBox 382"/>
+          <p:cNvPr id="391" name="TextBox 390"/>
           <p:cNvSpPr txBox="1"/>
           <p:nvPr/>
         </p:nvSpPr>
@@ -19963,7 +20339,7 @@
       </p:sp>
       <p:sp>
         <p:nvSpPr>
-          <p:cNvPr id="384" name="TextBox 383"/>
+          <p:cNvPr id="392" name="TextBox 391"/>
           <p:cNvSpPr txBox="1"/>
           <p:nvPr/>
         </p:nvSpPr>
@@ -19998,7 +20374,7 @@
       </p:sp>
       <p:sp>
         <p:nvSpPr>
-          <p:cNvPr id="385" name="TextBox 384"/>
+          <p:cNvPr id="393" name="TextBox 392"/>
           <p:cNvSpPr txBox="1"/>
           <p:nvPr/>
         </p:nvSpPr>
@@ -20033,7 +20409,7 @@
       </p:sp>
       <p:sp>
         <p:nvSpPr>
-          <p:cNvPr id="386" name="TextBox 385"/>
+          <p:cNvPr id="394" name="TextBox 393"/>
           <p:cNvSpPr txBox="1"/>
           <p:nvPr/>
         </p:nvSpPr>
@@ -20068,7 +20444,7 @@
       </p:sp>
       <p:sp>
         <p:nvSpPr>
-          <p:cNvPr id="387" name="TextBox 386"/>
+          <p:cNvPr id="395" name="TextBox 394"/>
           <p:cNvSpPr txBox="1"/>
           <p:nvPr/>
         </p:nvSpPr>
@@ -20103,7 +20479,7 @@
       </p:sp>
       <p:sp>
         <p:nvSpPr>
-          <p:cNvPr id="388" name="TextBox 387"/>
+          <p:cNvPr id="396" name="TextBox 395"/>
           <p:cNvSpPr txBox="1"/>
           <p:nvPr/>
         </p:nvSpPr>
@@ -20138,7 +20514,7 @@
       </p:sp>
       <p:sp>
         <p:nvSpPr>
-          <p:cNvPr id="389" name="TextBox 388"/>
+          <p:cNvPr id="397" name="TextBox 396"/>
           <p:cNvSpPr txBox="1"/>
           <p:nvPr/>
         </p:nvSpPr>
@@ -20173,7 +20549,7 @@
       </p:sp>
       <p:sp>
         <p:nvSpPr>
-          <p:cNvPr id="390" name="TextBox 389"/>
+          <p:cNvPr id="398" name="TextBox 397"/>
           <p:cNvSpPr txBox="1"/>
           <p:nvPr/>
         </p:nvSpPr>
@@ -20208,7 +20584,7 @@
       </p:sp>
       <p:sp>
         <p:nvSpPr>
-          <p:cNvPr id="391" name="TextBox 390"/>
+          <p:cNvPr id="399" name="TextBox 398"/>
           <p:cNvSpPr txBox="1"/>
           <p:nvPr/>
         </p:nvSpPr>
@@ -20243,7 +20619,7 @@
       </p:sp>
       <p:sp>
         <p:nvSpPr>
-          <p:cNvPr id="392" name="TextBox 391"/>
+          <p:cNvPr id="400" name="TextBox 399"/>
           <p:cNvSpPr txBox="1"/>
           <p:nvPr/>
         </p:nvSpPr>
@@ -20278,7 +20654,7 @@
       </p:sp>
       <p:sp>
         <p:nvSpPr>
-          <p:cNvPr id="393" name="TextBox 392"/>
+          <p:cNvPr id="401" name="TextBox 400"/>
           <p:cNvSpPr txBox="1"/>
           <p:nvPr/>
         </p:nvSpPr>
@@ -20313,7 +20689,7 @@
       </p:sp>
       <p:sp>
         <p:nvSpPr>
-          <p:cNvPr id="394" name="TextBox 393"/>
+          <p:cNvPr id="402" name="TextBox 401"/>
           <p:cNvSpPr txBox="1"/>
           <p:nvPr/>
         </p:nvSpPr>
@@ -20348,7 +20724,7 @@
       </p:sp>
       <p:sp>
         <p:nvSpPr>
-          <p:cNvPr id="395" name="TextBox 394"/>
+          <p:cNvPr id="403" name="TextBox 402"/>
           <p:cNvSpPr txBox="1"/>
           <p:nvPr/>
         </p:nvSpPr>
@@ -20383,7 +20759,7 @@
       </p:sp>
       <p:sp>
         <p:nvSpPr>
-          <p:cNvPr id="396" name="TextBox 395"/>
+          <p:cNvPr id="404" name="TextBox 403"/>
           <p:cNvSpPr txBox="1"/>
           <p:nvPr/>
         </p:nvSpPr>
@@ -20418,7 +20794,7 @@
       </p:sp>
       <p:sp>
         <p:nvSpPr>
-          <p:cNvPr id="397" name="TextBox 396"/>
+          <p:cNvPr id="405" name="TextBox 404"/>
           <p:cNvSpPr txBox="1"/>
           <p:nvPr/>
         </p:nvSpPr>
@@ -20453,7 +20829,7 @@
       </p:sp>
       <p:sp>
         <p:nvSpPr>
-          <p:cNvPr id="398" name="TextBox 397"/>
+          <p:cNvPr id="406" name="TextBox 405"/>
           <p:cNvSpPr txBox="1"/>
           <p:nvPr/>
         </p:nvSpPr>
@@ -20488,7 +20864,7 @@
       </p:sp>
       <p:sp>
         <p:nvSpPr>
-          <p:cNvPr id="399" name="TextBox 398"/>
+          <p:cNvPr id="407" name="TextBox 406"/>
           <p:cNvSpPr txBox="1"/>
           <p:nvPr/>
         </p:nvSpPr>
@@ -20523,7 +20899,7 @@
       </p:sp>
       <p:sp>
         <p:nvSpPr>
-          <p:cNvPr id="400" name="TextBox 399"/>
+          <p:cNvPr id="408" name="TextBox 407"/>
           <p:cNvSpPr txBox="1"/>
           <p:nvPr/>
         </p:nvSpPr>
@@ -20558,7 +20934,7 @@
       </p:sp>
       <p:sp>
         <p:nvSpPr>
-          <p:cNvPr id="401" name="TextBox 400"/>
+          <p:cNvPr id="409" name="TextBox 408"/>
           <p:cNvSpPr txBox="1"/>
           <p:nvPr/>
         </p:nvSpPr>
@@ -20593,7 +20969,7 @@
       </p:sp>
       <p:sp>
         <p:nvSpPr>
-          <p:cNvPr id="402" name="TextBox 401"/>
+          <p:cNvPr id="410" name="TextBox 409"/>
           <p:cNvSpPr txBox="1"/>
           <p:nvPr/>
         </p:nvSpPr>
@@ -20628,7 +21004,7 @@
       </p:sp>
       <p:sp>
         <p:nvSpPr>
-          <p:cNvPr id="403" name="TextBox 402"/>
+          <p:cNvPr id="411" name="TextBox 410"/>
           <p:cNvSpPr txBox="1"/>
           <p:nvPr/>
         </p:nvSpPr>
@@ -20663,7 +21039,7 @@
       </p:sp>
       <p:sp>
         <p:nvSpPr>
-          <p:cNvPr id="404" name="TextBox 403"/>
+          <p:cNvPr id="412" name="TextBox 411"/>
           <p:cNvSpPr txBox="1"/>
           <p:nvPr/>
         </p:nvSpPr>
@@ -20696,286 +21072,6 @@
           </a:p>
         </p:txBody>
       </p:sp>
-      <p:cxnSp>
-        <p:nvCxnSpPr>
-          <p:cNvPr id="405" name="Connector 404"/>
-          <p:cNvCxnSpPr/>
-          <p:nvPr/>
-        </p:nvCxnSpPr>
-        <p:spPr>
-          <a:xfrm>
-            <a:off x="11585448" y="5733288"/>
-            <a:ext cx="2944368" cy="0"/>
-          </a:xfrm>
-          <a:prstGeom prst="line">
-            <a:avLst/>
-          </a:prstGeom>
-          <a:ln w="8890">
-            <a:solidFill>
-              <a:srgbClr val="000000"/>
-            </a:solidFill>
-          </a:ln>
-        </p:spPr>
-        <p:style>
-          <a:lnRef idx="2">
-            <a:schemeClr val="accent1"/>
-          </a:lnRef>
-          <a:fillRef idx="0">
-            <a:schemeClr val="accent1"/>
-          </a:fillRef>
-          <a:effectRef idx="1">
-            <a:schemeClr val="accent1"/>
-          </a:effectRef>
-          <a:fontRef idx="minor">
-            <a:schemeClr val="tx1"/>
-          </a:fontRef>
-        </p:style>
-      </p:cxnSp>
-      <p:cxnSp>
-        <p:nvCxnSpPr>
-          <p:cNvPr id="406" name="Connector 405"/>
-          <p:cNvCxnSpPr/>
-          <p:nvPr/>
-        </p:nvCxnSpPr>
-        <p:spPr>
-          <a:xfrm>
-            <a:off x="11585448" y="5907024"/>
-            <a:ext cx="2944368" cy="0"/>
-          </a:xfrm>
-          <a:prstGeom prst="line">
-            <a:avLst/>
-          </a:prstGeom>
-          <a:ln w="8890">
-            <a:solidFill>
-              <a:srgbClr val="000000"/>
-            </a:solidFill>
-          </a:ln>
-        </p:spPr>
-        <p:style>
-          <a:lnRef idx="2">
-            <a:schemeClr val="accent1"/>
-          </a:lnRef>
-          <a:fillRef idx="0">
-            <a:schemeClr val="accent1"/>
-          </a:fillRef>
-          <a:effectRef idx="1">
-            <a:schemeClr val="accent1"/>
-          </a:effectRef>
-          <a:fontRef idx="minor">
-            <a:schemeClr val="tx1"/>
-          </a:fontRef>
-        </p:style>
-      </p:cxnSp>
-      <p:cxnSp>
-        <p:nvCxnSpPr>
-          <p:cNvPr id="407" name="Connector 406"/>
-          <p:cNvCxnSpPr/>
-          <p:nvPr/>
-        </p:nvCxnSpPr>
-        <p:spPr>
-          <a:xfrm>
-            <a:off x="11585448" y="6080759"/>
-            <a:ext cx="2944368" cy="0"/>
-          </a:xfrm>
-          <a:prstGeom prst="line">
-            <a:avLst/>
-          </a:prstGeom>
-          <a:ln w="8890">
-            <a:solidFill>
-              <a:srgbClr val="000000"/>
-            </a:solidFill>
-          </a:ln>
-        </p:spPr>
-        <p:style>
-          <a:lnRef idx="2">
-            <a:schemeClr val="accent1"/>
-          </a:lnRef>
-          <a:fillRef idx="0">
-            <a:schemeClr val="accent1"/>
-          </a:fillRef>
-          <a:effectRef idx="1">
-            <a:schemeClr val="accent1"/>
-          </a:effectRef>
-          <a:fontRef idx="minor">
-            <a:schemeClr val="tx1"/>
-          </a:fontRef>
-        </p:style>
-      </p:cxnSp>
-      <p:cxnSp>
-        <p:nvCxnSpPr>
-          <p:cNvPr id="408" name="Connector 407"/>
-          <p:cNvCxnSpPr/>
-          <p:nvPr/>
-        </p:nvCxnSpPr>
-        <p:spPr>
-          <a:xfrm>
-            <a:off x="11585448" y="6254496"/>
-            <a:ext cx="2944368" cy="0"/>
-          </a:xfrm>
-          <a:prstGeom prst="line">
-            <a:avLst/>
-          </a:prstGeom>
-          <a:ln w="8890">
-            <a:solidFill>
-              <a:srgbClr val="000000"/>
-            </a:solidFill>
-          </a:ln>
-        </p:spPr>
-        <p:style>
-          <a:lnRef idx="2">
-            <a:schemeClr val="accent1"/>
-          </a:lnRef>
-          <a:fillRef idx="0">
-            <a:schemeClr val="accent1"/>
-          </a:fillRef>
-          <a:effectRef idx="1">
-            <a:schemeClr val="accent1"/>
-          </a:effectRef>
-          <a:fontRef idx="minor">
-            <a:schemeClr val="tx1"/>
-          </a:fontRef>
-        </p:style>
-      </p:cxnSp>
-      <p:cxnSp>
-        <p:nvCxnSpPr>
-          <p:cNvPr id="409" name="Connector 408"/>
-          <p:cNvCxnSpPr/>
-          <p:nvPr/>
-        </p:nvCxnSpPr>
-        <p:spPr>
-          <a:xfrm>
-            <a:off x="11585448" y="6428231"/>
-            <a:ext cx="2944368" cy="0"/>
-          </a:xfrm>
-          <a:prstGeom prst="line">
-            <a:avLst/>
-          </a:prstGeom>
-          <a:ln w="8890">
-            <a:solidFill>
-              <a:srgbClr val="000000"/>
-            </a:solidFill>
-          </a:ln>
-        </p:spPr>
-        <p:style>
-          <a:lnRef idx="2">
-            <a:schemeClr val="accent1"/>
-          </a:lnRef>
-          <a:fillRef idx="0">
-            <a:schemeClr val="accent1"/>
-          </a:fillRef>
-          <a:effectRef idx="1">
-            <a:schemeClr val="accent1"/>
-          </a:effectRef>
-          <a:fontRef idx="minor">
-            <a:schemeClr val="tx1"/>
-          </a:fontRef>
-        </p:style>
-      </p:cxnSp>
-      <p:cxnSp>
-        <p:nvCxnSpPr>
-          <p:cNvPr id="410" name="Connector 409"/>
-          <p:cNvCxnSpPr/>
-          <p:nvPr/>
-        </p:nvCxnSpPr>
-        <p:spPr>
-          <a:xfrm>
-            <a:off x="11585448" y="6601968"/>
-            <a:ext cx="2944368" cy="0"/>
-          </a:xfrm>
-          <a:prstGeom prst="line">
-            <a:avLst/>
-          </a:prstGeom>
-          <a:ln w="8890">
-            <a:solidFill>
-              <a:srgbClr val="000000"/>
-            </a:solidFill>
-          </a:ln>
-        </p:spPr>
-        <p:style>
-          <a:lnRef idx="2">
-            <a:schemeClr val="accent1"/>
-          </a:lnRef>
-          <a:fillRef idx="0">
-            <a:schemeClr val="accent1"/>
-          </a:fillRef>
-          <a:effectRef idx="1">
-            <a:schemeClr val="accent1"/>
-          </a:effectRef>
-          <a:fontRef idx="minor">
-            <a:schemeClr val="tx1"/>
-          </a:fontRef>
-        </p:style>
-      </p:cxnSp>
-      <p:cxnSp>
-        <p:nvCxnSpPr>
-          <p:cNvPr id="411" name="Connector 410"/>
-          <p:cNvCxnSpPr/>
-          <p:nvPr/>
-        </p:nvCxnSpPr>
-        <p:spPr>
-          <a:xfrm>
-            <a:off x="11585448" y="6775704"/>
-            <a:ext cx="2944368" cy="0"/>
-          </a:xfrm>
-          <a:prstGeom prst="line">
-            <a:avLst/>
-          </a:prstGeom>
-          <a:ln w="8890">
-            <a:solidFill>
-              <a:srgbClr val="000000"/>
-            </a:solidFill>
-          </a:ln>
-        </p:spPr>
-        <p:style>
-          <a:lnRef idx="2">
-            <a:schemeClr val="accent1"/>
-          </a:lnRef>
-          <a:fillRef idx="0">
-            <a:schemeClr val="accent1"/>
-          </a:fillRef>
-          <a:effectRef idx="1">
-            <a:schemeClr val="accent1"/>
-          </a:effectRef>
-          <a:fontRef idx="minor">
-            <a:schemeClr val="tx1"/>
-          </a:fontRef>
-        </p:style>
-      </p:cxnSp>
-      <p:cxnSp>
-        <p:nvCxnSpPr>
-          <p:cNvPr id="412" name="Connector 411"/>
-          <p:cNvCxnSpPr/>
-          <p:nvPr/>
-        </p:nvCxnSpPr>
-        <p:spPr>
-          <a:xfrm>
-            <a:off x="11585448" y="6949440"/>
-            <a:ext cx="2944368" cy="0"/>
-          </a:xfrm>
-          <a:prstGeom prst="line">
-            <a:avLst/>
-          </a:prstGeom>
-          <a:ln w="8890">
-            <a:solidFill>
-              <a:srgbClr val="000000"/>
-            </a:solidFill>
-          </a:ln>
-        </p:spPr>
-        <p:style>
-          <a:lnRef idx="2">
-            <a:schemeClr val="accent1"/>
-          </a:lnRef>
-          <a:fillRef idx="0">
-            <a:schemeClr val="accent1"/>
-          </a:fillRef>
-          <a:effectRef idx="1">
-            <a:schemeClr val="accent1"/>
-          </a:effectRef>
-          <a:fontRef idx="minor">
-            <a:schemeClr val="tx1"/>
-          </a:fontRef>
-        </p:style>
-      </p:cxnSp>
       <p:cxnSp>
         <p:nvCxnSpPr>
           <p:cNvPr id="413" name="Connector 412"/>
@@ -20985,7 +21081,7 @@
         <p:spPr>
           <a:xfrm>
             <a:off x="11585448" y="5733288"/>
-            <a:ext cx="0" cy="1216152"/>
+            <a:ext cx="2944368" cy="0"/>
           </a:xfrm>
           <a:prstGeom prst="line">
             <a:avLst/>
@@ -21019,8 +21115,8 @@
         </p:nvCxnSpPr>
         <p:spPr>
           <a:xfrm>
-            <a:off x="12152376" y="5733288"/>
-            <a:ext cx="0" cy="1216152"/>
+            <a:off x="11585448" y="5907024"/>
+            <a:ext cx="2944368" cy="0"/>
           </a:xfrm>
           <a:prstGeom prst="line">
             <a:avLst/>
@@ -21054,8 +21150,8 @@
         </p:nvCxnSpPr>
         <p:spPr>
           <a:xfrm>
-            <a:off x="13414247" y="5733288"/>
-            <a:ext cx="0" cy="1216152"/>
+            <a:off x="11585448" y="6080759"/>
+            <a:ext cx="2944368" cy="0"/>
           </a:xfrm>
           <a:prstGeom prst="line">
             <a:avLst/>
@@ -21089,8 +21185,8 @@
         </p:nvCxnSpPr>
         <p:spPr>
           <a:xfrm>
-            <a:off x="14164055" y="5733288"/>
-            <a:ext cx="0" cy="1216152"/>
+            <a:off x="11585448" y="6254496"/>
+            <a:ext cx="2944368" cy="0"/>
           </a:xfrm>
           <a:prstGeom prst="line">
             <a:avLst/>
@@ -21124,7 +21220,147 @@
         </p:nvCxnSpPr>
         <p:spPr>
           <a:xfrm>
-            <a:off x="14529815" y="5733288"/>
+            <a:off x="11585448" y="6428231"/>
+            <a:ext cx="2944368" cy="0"/>
+          </a:xfrm>
+          <a:prstGeom prst="line">
+            <a:avLst/>
+          </a:prstGeom>
+          <a:ln w="8890">
+            <a:solidFill>
+              <a:srgbClr val="000000"/>
+            </a:solidFill>
+          </a:ln>
+        </p:spPr>
+        <p:style>
+          <a:lnRef idx="2">
+            <a:schemeClr val="accent1"/>
+          </a:lnRef>
+          <a:fillRef idx="0">
+            <a:schemeClr val="accent1"/>
+          </a:fillRef>
+          <a:effectRef idx="1">
+            <a:schemeClr val="accent1"/>
+          </a:effectRef>
+          <a:fontRef idx="minor">
+            <a:schemeClr val="tx1"/>
+          </a:fontRef>
+        </p:style>
+      </p:cxnSp>
+      <p:cxnSp>
+        <p:nvCxnSpPr>
+          <p:cNvPr id="418" name="Connector 417"/>
+          <p:cNvCxnSpPr/>
+          <p:nvPr/>
+        </p:nvCxnSpPr>
+        <p:spPr>
+          <a:xfrm>
+            <a:off x="11585448" y="6601968"/>
+            <a:ext cx="2944368" cy="0"/>
+          </a:xfrm>
+          <a:prstGeom prst="line">
+            <a:avLst/>
+          </a:prstGeom>
+          <a:ln w="8890">
+            <a:solidFill>
+              <a:srgbClr val="000000"/>
+            </a:solidFill>
+          </a:ln>
+        </p:spPr>
+        <p:style>
+          <a:lnRef idx="2">
+            <a:schemeClr val="accent1"/>
+          </a:lnRef>
+          <a:fillRef idx="0">
+            <a:schemeClr val="accent1"/>
+          </a:fillRef>
+          <a:effectRef idx="1">
+            <a:schemeClr val="accent1"/>
+          </a:effectRef>
+          <a:fontRef idx="minor">
+            <a:schemeClr val="tx1"/>
+          </a:fontRef>
+        </p:style>
+      </p:cxnSp>
+      <p:cxnSp>
+        <p:nvCxnSpPr>
+          <p:cNvPr id="419" name="Connector 418"/>
+          <p:cNvCxnSpPr/>
+          <p:nvPr/>
+        </p:nvCxnSpPr>
+        <p:spPr>
+          <a:xfrm>
+            <a:off x="11585448" y="6775704"/>
+            <a:ext cx="2944368" cy="0"/>
+          </a:xfrm>
+          <a:prstGeom prst="line">
+            <a:avLst/>
+          </a:prstGeom>
+          <a:ln w="8890">
+            <a:solidFill>
+              <a:srgbClr val="000000"/>
+            </a:solidFill>
+          </a:ln>
+        </p:spPr>
+        <p:style>
+          <a:lnRef idx="2">
+            <a:schemeClr val="accent1"/>
+          </a:lnRef>
+          <a:fillRef idx="0">
+            <a:schemeClr val="accent1"/>
+          </a:fillRef>
+          <a:effectRef idx="1">
+            <a:schemeClr val="accent1"/>
+          </a:effectRef>
+          <a:fontRef idx="minor">
+            <a:schemeClr val="tx1"/>
+          </a:fontRef>
+        </p:style>
+      </p:cxnSp>
+      <p:cxnSp>
+        <p:nvCxnSpPr>
+          <p:cNvPr id="420" name="Connector 419"/>
+          <p:cNvCxnSpPr/>
+          <p:nvPr/>
+        </p:nvCxnSpPr>
+        <p:spPr>
+          <a:xfrm>
+            <a:off x="11585448" y="6949440"/>
+            <a:ext cx="2944368" cy="0"/>
+          </a:xfrm>
+          <a:prstGeom prst="line">
+            <a:avLst/>
+          </a:prstGeom>
+          <a:ln w="8890">
+            <a:solidFill>
+              <a:srgbClr val="000000"/>
+            </a:solidFill>
+          </a:ln>
+        </p:spPr>
+        <p:style>
+          <a:lnRef idx="2">
+            <a:schemeClr val="accent1"/>
+          </a:lnRef>
+          <a:fillRef idx="0">
+            <a:schemeClr val="accent1"/>
+          </a:fillRef>
+          <a:effectRef idx="1">
+            <a:schemeClr val="accent1"/>
+          </a:effectRef>
+          <a:fontRef idx="minor">
+            <a:schemeClr val="tx1"/>
+          </a:fontRef>
+        </p:style>
+      </p:cxnSp>
+      <p:cxnSp>
+        <p:nvCxnSpPr>
+          <p:cNvPr id="421" name="Connector 420"/>
+          <p:cNvCxnSpPr/>
+          <p:nvPr/>
+        </p:nvCxnSpPr>
+        <p:spPr>
+          <a:xfrm>
+            <a:off x="11585448" y="5733288"/>
             <a:ext cx="0" cy="1216152"/>
           </a:xfrm>
           <a:prstGeom prst="line">
@@ -21151,455 +21387,111 @@
           </a:fontRef>
         </p:style>
       </p:cxnSp>
-      <p:sp>
-        <p:nvSpPr>
-          <p:cNvPr id="418" name="TextBox 417"/>
-          <p:cNvSpPr txBox="1"/>
-          <p:nvPr/>
-        </p:nvSpPr>
-        <p:spPr>
-          <a:xfrm>
-            <a:off x="11585448" y="7040879"/>
-            <a:ext cx="1190345" cy="109728"/>
-          </a:xfrm>
-          <a:prstGeom prst="rect">
-            <a:avLst/>
-          </a:prstGeom>
-          <a:noFill/>
-        </p:spPr>
-        <p:txBody>
-          <a:bodyPr wrap="square" lIns="0" rIns="0" tIns="0" bIns="0" anchor="ctr">
-            <a:spAutoFit/>
-          </a:bodyPr>
-          <a:lstStyle/>
-          <a:p>
-            <a:pPr algn="l"/>
-            <a:r>
-              <a:rPr sz="520" b="0">
-                <a:solidFill>
-                  <a:srgbClr val="000000"/>
-                </a:solidFill>
-                <a:latin typeface="Arial"/>
-              </a:rPr>
-              <a:t>* ARMED WHEN FIRING.</a:t>
-            </a:r>
-          </a:p>
-        </p:txBody>
-      </p:sp>
-      <p:sp>
-        <p:nvSpPr>
-          <p:cNvPr id="419" name="TextBox 418"/>
-          <p:cNvSpPr txBox="1"/>
-          <p:nvPr/>
-        </p:nvSpPr>
-        <p:spPr>
-          <a:xfrm>
-            <a:off x="11585448" y="7159751"/>
-            <a:ext cx="2893649" cy="109728"/>
-          </a:xfrm>
-          <a:prstGeom prst="rect">
-            <a:avLst/>
-          </a:prstGeom>
-          <a:noFill/>
-        </p:spPr>
-        <p:txBody>
-          <a:bodyPr wrap="square" lIns="0" rIns="0" tIns="0" bIns="0" anchor="ctr">
-            <a:spAutoFit/>
-          </a:bodyPr>
-          <a:lstStyle/>
-          <a:p>
-            <a:pPr algn="l"/>
-            <a:r>
-              <a:rPr sz="520" b="0">
-                <a:solidFill>
-                  <a:srgbClr val="000000"/>
-                </a:solidFill>
-                <a:latin typeface="Arial"/>
-              </a:rPr>
-              <a:t>ANY TRIP: CLOSE XV-301 &amp; XV-302, OPEN XV-303 BLEED,</a:t>
-            </a:r>
-          </a:p>
-        </p:txBody>
-      </p:sp>
-      <p:sp>
-        <p:nvSpPr>
-          <p:cNvPr id="420" name="TextBox 419"/>
-          <p:cNvSpPr txBox="1"/>
-          <p:nvPr/>
-        </p:nvSpPr>
-        <p:spPr>
-          <a:xfrm>
-            <a:off x="11585448" y="7278623"/>
-            <a:ext cx="2728813" cy="109728"/>
-          </a:xfrm>
-          <a:prstGeom prst="rect">
-            <a:avLst/>
-          </a:prstGeom>
-          <a:noFill/>
-        </p:spPr>
-        <p:txBody>
-          <a:bodyPr wrap="square" lIns="0" rIns="0" tIns="0" bIns="0" anchor="ctr">
-            <a:spAutoFit/>
-          </a:bodyPr>
-          <a:lstStyle/>
-          <a:p>
-            <a:pPr algn="l"/>
-            <a:r>
-              <a:rPr sz="520" b="0">
-                <a:solidFill>
-                  <a:srgbClr val="000000"/>
-                </a:solidFill>
-                <a:latin typeface="Arial"/>
-              </a:rPr>
-              <a:t>CLOSE FV-300, OPEN FV-200 &amp; HV-400 (POST-PURGE).</a:t>
-            </a:r>
-          </a:p>
-        </p:txBody>
-      </p:sp>
-      <p:sp>
-        <p:nvSpPr>
-          <p:cNvPr id="421" name="TextBox 420"/>
-          <p:cNvSpPr txBox="1"/>
-          <p:nvPr/>
-        </p:nvSpPr>
-        <p:spPr>
-          <a:xfrm>
-            <a:off x="11585448" y="7397496"/>
-            <a:ext cx="2728813" cy="109728"/>
-          </a:xfrm>
-          <a:prstGeom prst="rect">
-            <a:avLst/>
-          </a:prstGeom>
-          <a:noFill/>
-        </p:spPr>
-        <p:txBody>
-          <a:bodyPr wrap="square" lIns="0" rIns="0" tIns="0" bIns="0" anchor="ctr">
-            <a:spAutoFit/>
-          </a:bodyPr>
-          <a:lstStyle/>
-          <a:p>
-            <a:pPr algn="l"/>
-            <a:r>
-              <a:rPr sz="520" b="0">
-                <a:solidFill>
-                  <a:srgbClr val="000000"/>
-                </a:solidFill>
-                <a:latin typeface="Arial"/>
-              </a:rPr>
-              <a:t>RESET ONLY FROM BMS AFTER 300 s PURGE; LIGHT-OFF</a:t>
-            </a:r>
-          </a:p>
-        </p:txBody>
-      </p:sp>
-      <p:sp>
-        <p:nvSpPr>
-          <p:cNvPr id="422" name="TextBox 421"/>
-          <p:cNvSpPr txBox="1"/>
-          <p:nvPr/>
-        </p:nvSpPr>
-        <p:spPr>
-          <a:xfrm>
-            <a:off x="11585448" y="7516368"/>
-            <a:ext cx="2618922" cy="109728"/>
-          </a:xfrm>
-          <a:prstGeom prst="rect">
-            <a:avLst/>
-          </a:prstGeom>
-          <a:noFill/>
-        </p:spPr>
-        <p:txBody>
-          <a:bodyPr wrap="square" lIns="0" rIns="0" tIns="0" bIns="0" anchor="ctr">
-            <a:spAutoFit/>
-          </a:bodyPr>
-          <a:lstStyle/>
-          <a:p>
-            <a:pPr algn="l"/>
-            <a:r>
-              <a:rPr sz="520" b="0">
-                <a:solidFill>
-                  <a:srgbClr val="000000"/>
-                </a:solidFill>
-                <a:latin typeface="Arial"/>
-              </a:rPr>
-              <a:t>AT LOW FIRE (TIC-030 MAN 10-20 %), 10 s TRIAL.</a:t>
-            </a:r>
-          </a:p>
-        </p:txBody>
-      </p:sp>
-      <p:sp>
-        <p:nvSpPr>
-          <p:cNvPr id="423" name="TextBox 422"/>
-          <p:cNvSpPr txBox="1"/>
-          <p:nvPr/>
-        </p:nvSpPr>
-        <p:spPr>
-          <a:xfrm>
-            <a:off x="457200" y="8732520"/>
-            <a:ext cx="5486400" cy="1554480"/>
-          </a:xfrm>
-          <a:prstGeom prst="rect">
-            <a:avLst/>
-          </a:prstGeom>
-          <a:noFill/>
-        </p:spPr>
-        <p:txBody>
-          <a:bodyPr wrap="square" lIns="0" rIns="0" tIns="0" bIns="0">
-            <a:spAutoFit/>
-          </a:bodyPr>
-          <a:lstStyle/>
-          <a:p>
-            <a:pPr algn="l"/>
-            <a:r>
-              <a:rPr sz="550" b="1">
-                <a:solidFill>
-                  <a:srgbClr val="000000"/>
-                </a:solidFill>
-                <a:latin typeface="Arial"/>
-              </a:rPr>
-              <a:t>GENERAL NOTES:</a:t>
-            </a:r>
-          </a:p>
-          <a:p>
-            <a:pPr algn="l"/>
-            <a:r>
-              <a:rPr sz="550" b="0">
-                <a:solidFill>
-                  <a:srgbClr val="000000"/>
-                </a:solidFill>
-                <a:latin typeface="Arial"/>
-              </a:rPr>
-              <a:t>1. DESIGN BASIS: NATURAL DRAFT FIRED HEATER VER 1 OTS MODEL, DESIGN CASE. PRESSURES kPa g, DRAFT mmH₂O.</a:t>
-            </a:r>
-          </a:p>
-          <a:p>
-            <a:pPr algn="l"/>
-            <a:r>
-              <a:rPr sz="550" b="0">
-                <a:solidFill>
-                  <a:srgbClr val="000000"/>
-                </a:solidFill>
-                <a:latin typeface="Arial"/>
-              </a:rPr>
-              <a:t>    FEED 6.8 L/s = 19 584 kg/h (0.80 kg/L): 40 → 180 (E-100) → 233 (CROSSOVER) → 350 °C; PUMP DISCH. ≈ 1030, OUTLET ≈ 545.</a:t>
-            </a:r>
-          </a:p>
-          <a:p>
-            <a:pPr algn="l"/>
-            <a:r>
-              <a:rPr sz="550" b="0">
-                <a:solidFill>
-                  <a:srgbClr val="000000"/>
-                </a:solidFill>
-                <a:latin typeface="Arial"/>
-              </a:rPr>
-              <a:t>    FUEL 243 kg/h, LHV 42 MJ/kg: FIRED 2.84 MW, ABSORBED 2.31 MW (81.5 %). AIR 3 892 kg/h (11 % EXCESS).</a:t>
-            </a:r>
-          </a:p>
-          <a:p>
-            <a:pPr algn="l"/>
-            <a:r>
-              <a:rPr sz="550" b="0">
-                <a:solidFill>
-                  <a:srgbClr val="000000"/>
-                </a:solidFill>
-                <a:latin typeface="Arial"/>
-              </a:rPr>
-              <a:t>    FLUE GAS 4 380 kg/h AT 400 °C (INCL. ≈ 245 kg/h TRAMP AIR). DRAFT: ARCH -2.5, FLOOR -6.0, WINDBOX 5.25.</a:t>
-            </a:r>
-          </a:p>
-          <a:p>
-            <a:pPr algn="l"/>
-            <a:r>
-              <a:rPr sz="550" b="0">
-                <a:solidFill>
-                  <a:srgbClr val="000000"/>
-                </a:solidFill>
-                <a:latin typeface="Arial"/>
-              </a:rPr>
-              <a:t>2. LINE SIZES PRELIMINARY FROM VELOCITY (LIQUID 1.5-2.5 m/s, AIR DUCT 10 m/s) - TBC BY HYDRAULIC CALCULATION.</a:t>
-            </a:r>
-          </a:p>
-          <a:p>
-            <a:pPr algn="l"/>
-            <a:r>
-              <a:rPr sz="550" b="0">
-                <a:solidFill>
-                  <a:srgbClr val="000000"/>
-                </a:solidFill>
-                <a:latin typeface="Arial"/>
-              </a:rPr>
-              <a:t>3. PRESSURE INSTRUMENTS C/W ROOT AND TEST VALVES (TYP., NOT SHOWN). PUMP CASING VENTS/DRAINS TYP., NOT SHOWN.</a:t>
-            </a:r>
-          </a:p>
-          <a:p>
-            <a:pPr algn="l"/>
-            <a:r>
-              <a:rPr sz="550" b="0">
-                <a:solidFill>
-                  <a:srgbClr val="000000"/>
-                </a:solidFill>
-                <a:latin typeface="Arial"/>
-              </a:rPr>
-              <a:t>4. XV-301 / XV-302 / XV-303 FORM A DOUBLE BLOCK AND BLEED, OPERATED BY SIS-100 (BMS); SIGNALS NOT SHOWN.</a:t>
-            </a:r>
-          </a:p>
-          <a:p>
-            <a:pPr algn="l"/>
-            <a:r>
-              <a:rPr sz="550" b="0">
-                <a:solidFill>
-                  <a:srgbClr val="000000"/>
-                </a:solidFill>
-                <a:latin typeface="Arial"/>
-              </a:rPr>
-              <a:t>5. FV-010 FAILS OPEN SO THE COIL KEEPS FLOW ON AIR OR SIGNAL FAILURE; FV-300 FAILS CLOSED; FV-200 &amp; HV-400 FAIL OPEN.</a:t>
-            </a:r>
-          </a:p>
-          <a:p>
-            <a:pPr algn="l"/>
-            <a:r>
-              <a:rPr sz="550" b="0">
-                <a:solidFill>
-                  <a:srgbClr val="000000"/>
-                </a:solidFill>
-                <a:latin typeface="Arial"/>
-              </a:rPr>
-              <a:t>6. RADIANT AND CONVECTION COILS SHOWN SCHEMATICALLY; TUBE COUNT AND PASSES PER DESIGN TAB (SINGLE PASS).</a:t>
-            </a:r>
-          </a:p>
-          <a:p>
-            <a:pPr algn="l"/>
-            <a:r>
-              <a:rPr sz="550" b="0">
-                <a:solidFill>
-                  <a:srgbClr val="000000"/>
-                </a:solidFill>
-                <a:latin typeface="Arial"/>
-              </a:rPr>
-              <a:t>7. FT-008 SERVES FIC-003, FIAL-008 AND FSLL-008 (HAZOP GAP: ADD FT-008B FOR THE TRIP - HOLD).</a:t>
-            </a:r>
-          </a:p>
-        </p:txBody>
-      </p:sp>
-      <p:sp>
-        <p:nvSpPr>
-          <p:cNvPr id="424" name="TextBox 423"/>
-          <p:cNvSpPr txBox="1"/>
-          <p:nvPr/>
-        </p:nvSpPr>
-        <p:spPr>
-          <a:xfrm>
-            <a:off x="6035040" y="8732520"/>
-            <a:ext cx="5577840" cy="1554480"/>
-          </a:xfrm>
-          <a:prstGeom prst="rect">
-            <a:avLst/>
-          </a:prstGeom>
-          <a:noFill/>
-        </p:spPr>
-        <p:txBody>
-          <a:bodyPr wrap="square" lIns="0" rIns="0" tIns="0" bIns="0">
-            <a:spAutoFit/>
-          </a:bodyPr>
-          <a:lstStyle/>
-          <a:p>
-            <a:pPr algn="l"/>
-            <a:r>
-              <a:rPr sz="550" b="1">
-                <a:solidFill>
-                  <a:srgbClr val="000000"/>
-                </a:solidFill>
-                <a:latin typeface="Arial"/>
-              </a:rPr>
-              <a:t>NOTES (CONT.):</a:t>
-            </a:r>
-          </a:p>
-          <a:p>
-            <a:pPr algn="l"/>
-            <a:r>
-              <a:rPr sz="550" b="0">
-                <a:solidFill>
-                  <a:srgbClr val="000000"/>
-                </a:solidFill>
-                <a:latin typeface="Arial"/>
-              </a:rPr>
-              <a:t>8. TIC-030 MOVES FUEL ONLY. REV A: FIC-005 ON OWN SET POINT. REV B OPTION: FY-005 AIR/FUEL RATIO ON FI-001 + AIC-027 O₂ TRIM.</a:t>
-            </a:r>
-          </a:p>
-          <a:p>
-            <a:pPr algn="l"/>
-            <a:r>
-              <a:rPr sz="550" b="0">
-                <a:solidFill>
-                  <a:srgbClr val="000000"/>
-                </a:solidFill>
-                <a:latin typeface="Arial"/>
-              </a:rPr>
-              <a:t>9. PSV-101 PROTECTS E-100 FEED SIDE (BLOCKED-IN WITH HOT FLUID, TUBE RUPTURE). SET PRESSURE AND SIZE TBC.</a:t>
-            </a:r>
-          </a:p>
-          <a:p>
-            <a:pPr algn="l"/>
-            <a:r>
-              <a:rPr sz="550" b="0">
-                <a:solidFill>
-                  <a:srgbClr val="000000"/>
-                </a:solidFill>
-                <a:latin typeface="Arial"/>
-              </a:rPr>
-              <a:t>10. PI-019 = FUEL HEADER (≈ 1940 kPa g). PT-020 = GUN PRESSURE (≈ 600 kPa g), DOWNSTREAM OF FV-300.</a:t>
-            </a:r>
-          </a:p>
-          <a:p>
-            <a:pPr algn="l"/>
-            <a:r>
-              <a:rPr sz="550" b="0">
-                <a:solidFill>
-                  <a:srgbClr val="000000"/>
-                </a:solidFill>
-                <a:latin typeface="Arial"/>
-              </a:rPr>
-              <a:t>11. BS-005 UV FLAME SCANNER ON THE BURNER; LIGHT-OFF AND PURGE PER BMS SEQUENCE (LEGEND PANEL).</a:t>
-            </a:r>
-          </a:p>
-          <a:p>
-            <a:pPr algn="l"/>
-            <a:r>
-              <a:rPr sz="550" b="0">
-                <a:solidFill>
-                  <a:srgbClr val="000000"/>
-                </a:solidFill>
-                <a:latin typeface="Arial"/>
-              </a:rPr>
-              <a:t>12. HV-221 SNUFFING STEAM, NORMALLY CLOSED; OPEN ONLY FOR A FIREBOX FIRE. EXPLOSION DOOR ON RADIANT WALL.</a:t>
-            </a:r>
-          </a:p>
-          <a:p>
-            <a:pPr algn="l"/>
-            <a:r>
-              <a:rPr sz="550" b="0">
-                <a:solidFill>
-                  <a:srgbClr val="000000"/>
-                </a:solidFill>
-                <a:latin typeface="Arial"/>
-              </a:rPr>
-              <a:t>13. LOW-POINT DRAIN ON 3"-P-105 AND HIGH-POINT VENT AT COIL INLET FOR HYDROTEST AND DECOKING.</a:t>
-            </a:r>
-          </a:p>
-          <a:p>
-            <a:pPr algn="l"/>
-            <a:r>
-              <a:rPr sz="550" b="0">
-                <a:solidFill>
-                  <a:srgbClr val="000000"/>
-                </a:solidFill>
-                <a:latin typeface="Arial"/>
-              </a:rPr>
-              <a:t>14. ALARM SET POINTS: SEE WORKBOOK (ALARM TABLE); TRIP SET POINTS: INTERLOCK SCHEDULE.</a:t>
-            </a:r>
-          </a:p>
-        </p:txBody>
-      </p:sp>
+      <p:cxnSp>
+        <p:nvCxnSpPr>
+          <p:cNvPr id="422" name="Connector 421"/>
+          <p:cNvCxnSpPr/>
+          <p:nvPr/>
+        </p:nvCxnSpPr>
+        <p:spPr>
+          <a:xfrm>
+            <a:off x="12152376" y="5733288"/>
+            <a:ext cx="0" cy="1216152"/>
+          </a:xfrm>
+          <a:prstGeom prst="line">
+            <a:avLst/>
+          </a:prstGeom>
+          <a:ln w="8890">
+            <a:solidFill>
+              <a:srgbClr val="000000"/>
+            </a:solidFill>
+          </a:ln>
+        </p:spPr>
+        <p:style>
+          <a:lnRef idx="2">
+            <a:schemeClr val="accent1"/>
+          </a:lnRef>
+          <a:fillRef idx="0">
+            <a:schemeClr val="accent1"/>
+          </a:fillRef>
+          <a:effectRef idx="1">
+            <a:schemeClr val="accent1"/>
+          </a:effectRef>
+          <a:fontRef idx="minor">
+            <a:schemeClr val="tx1"/>
+          </a:fontRef>
+        </p:style>
+      </p:cxnSp>
+      <p:cxnSp>
+        <p:nvCxnSpPr>
+          <p:cNvPr id="423" name="Connector 422"/>
+          <p:cNvCxnSpPr/>
+          <p:nvPr/>
+        </p:nvCxnSpPr>
+        <p:spPr>
+          <a:xfrm>
+            <a:off x="13414247" y="5733288"/>
+            <a:ext cx="0" cy="1216152"/>
+          </a:xfrm>
+          <a:prstGeom prst="line">
+            <a:avLst/>
+          </a:prstGeom>
+          <a:ln w="8890">
+            <a:solidFill>
+              <a:srgbClr val="000000"/>
+            </a:solidFill>
+          </a:ln>
+        </p:spPr>
+        <p:style>
+          <a:lnRef idx="2">
+            <a:schemeClr val="accent1"/>
+          </a:lnRef>
+          <a:fillRef idx="0">
+            <a:schemeClr val="accent1"/>
+          </a:fillRef>
+          <a:effectRef idx="1">
+            <a:schemeClr val="accent1"/>
+          </a:effectRef>
+          <a:fontRef idx="minor">
+            <a:schemeClr val="tx1"/>
+          </a:fontRef>
+        </p:style>
+      </p:cxnSp>
+      <p:cxnSp>
+        <p:nvCxnSpPr>
+          <p:cNvPr id="424" name="Connector 423"/>
+          <p:cNvCxnSpPr/>
+          <p:nvPr/>
+        </p:nvCxnSpPr>
+        <p:spPr>
+          <a:xfrm>
+            <a:off x="14164055" y="5733288"/>
+            <a:ext cx="0" cy="1216152"/>
+          </a:xfrm>
+          <a:prstGeom prst="line">
+            <a:avLst/>
+          </a:prstGeom>
+          <a:ln w="8890">
+            <a:solidFill>
+              <a:srgbClr val="000000"/>
+            </a:solidFill>
+          </a:ln>
+        </p:spPr>
+        <p:style>
+          <a:lnRef idx="2">
+            <a:schemeClr val="accent1"/>
+          </a:lnRef>
+          <a:fillRef idx="0">
+            <a:schemeClr val="accent1"/>
+          </a:fillRef>
+          <a:effectRef idx="1">
+            <a:schemeClr val="accent1"/>
+          </a:effectRef>
+          <a:fontRef idx="minor">
+            <a:schemeClr val="tx1"/>
+          </a:fontRef>
+        </p:style>
+      </p:cxnSp>
       <p:cxnSp>
         <p:nvCxnSpPr>
           <p:cNvPr id="425" name="Connector 424"/>
@@ -21608,8 +21500,8 @@
         </p:nvCxnSpPr>
         <p:spPr>
           <a:xfrm>
-            <a:off x="11750040" y="8641080"/>
-            <a:ext cx="3054095" cy="0"/>
+            <a:off x="14529815" y="5733288"/>
+            <a:ext cx="0" cy="1216152"/>
           </a:xfrm>
           <a:prstGeom prst="line">
             <a:avLst/>
@@ -21635,251 +21527,455 @@
           </a:fontRef>
         </p:style>
       </p:cxnSp>
-      <p:cxnSp>
-        <p:nvCxnSpPr>
-          <p:cNvPr id="426" name="Connector 425"/>
-          <p:cNvCxnSpPr/>
-          <p:nvPr/>
-        </p:nvCxnSpPr>
-        <p:spPr>
-          <a:xfrm>
-            <a:off x="11750040" y="8771382"/>
-            <a:ext cx="3054095" cy="0"/>
-          </a:xfrm>
-          <a:prstGeom prst="line">
-            <a:avLst/>
-          </a:prstGeom>
-          <a:ln w="8890">
-            <a:solidFill>
-              <a:srgbClr val="000000"/>
-            </a:solidFill>
-          </a:ln>
-        </p:spPr>
-        <p:style>
-          <a:lnRef idx="2">
-            <a:schemeClr val="accent1"/>
-          </a:lnRef>
-          <a:fillRef idx="0">
-            <a:schemeClr val="accent1"/>
-          </a:fillRef>
-          <a:effectRef idx="1">
-            <a:schemeClr val="accent1"/>
-          </a:effectRef>
-          <a:fontRef idx="minor">
-            <a:schemeClr val="tx1"/>
-          </a:fontRef>
-        </p:style>
-      </p:cxnSp>
-      <p:cxnSp>
-        <p:nvCxnSpPr>
-          <p:cNvPr id="427" name="Connector 426"/>
-          <p:cNvCxnSpPr/>
-          <p:nvPr/>
-        </p:nvCxnSpPr>
-        <p:spPr>
-          <a:xfrm>
-            <a:off x="11750040" y="8901684"/>
-            <a:ext cx="3054095" cy="0"/>
-          </a:xfrm>
-          <a:prstGeom prst="line">
-            <a:avLst/>
-          </a:prstGeom>
-          <a:ln w="8890">
-            <a:solidFill>
-              <a:srgbClr val="000000"/>
-            </a:solidFill>
-          </a:ln>
-        </p:spPr>
-        <p:style>
-          <a:lnRef idx="2">
-            <a:schemeClr val="accent1"/>
-          </a:lnRef>
-          <a:fillRef idx="0">
-            <a:schemeClr val="accent1"/>
-          </a:fillRef>
-          <a:effectRef idx="1">
-            <a:schemeClr val="accent1"/>
-          </a:effectRef>
-          <a:fontRef idx="minor">
-            <a:schemeClr val="tx1"/>
-          </a:fontRef>
-        </p:style>
-      </p:cxnSp>
-      <p:cxnSp>
-        <p:nvCxnSpPr>
-          <p:cNvPr id="428" name="Connector 427"/>
-          <p:cNvCxnSpPr/>
-          <p:nvPr/>
-        </p:nvCxnSpPr>
-        <p:spPr>
-          <a:xfrm>
-            <a:off x="11750040" y="9031986"/>
-            <a:ext cx="3054095" cy="0"/>
-          </a:xfrm>
-          <a:prstGeom prst="line">
-            <a:avLst/>
-          </a:prstGeom>
-          <a:ln w="8890">
-            <a:solidFill>
-              <a:srgbClr val="000000"/>
-            </a:solidFill>
-          </a:ln>
-        </p:spPr>
-        <p:style>
-          <a:lnRef idx="2">
-            <a:schemeClr val="accent1"/>
-          </a:lnRef>
-          <a:fillRef idx="0">
-            <a:schemeClr val="accent1"/>
-          </a:fillRef>
-          <a:effectRef idx="1">
-            <a:schemeClr val="accent1"/>
-          </a:effectRef>
-          <a:fontRef idx="minor">
-            <a:schemeClr val="tx1"/>
-          </a:fontRef>
-        </p:style>
-      </p:cxnSp>
-      <p:cxnSp>
-        <p:nvCxnSpPr>
-          <p:cNvPr id="429" name="Connector 428"/>
-          <p:cNvCxnSpPr/>
-          <p:nvPr/>
-        </p:nvCxnSpPr>
-        <p:spPr>
-          <a:xfrm>
-            <a:off x="11750040" y="9162288"/>
-            <a:ext cx="3054095" cy="0"/>
-          </a:xfrm>
-          <a:prstGeom prst="line">
-            <a:avLst/>
-          </a:prstGeom>
-          <a:ln w="8890">
-            <a:solidFill>
-              <a:srgbClr val="000000"/>
-            </a:solidFill>
-          </a:ln>
-        </p:spPr>
-        <p:style>
-          <a:lnRef idx="2">
-            <a:schemeClr val="accent1"/>
-          </a:lnRef>
-          <a:fillRef idx="0">
-            <a:schemeClr val="accent1"/>
-          </a:fillRef>
-          <a:effectRef idx="1">
-            <a:schemeClr val="accent1"/>
-          </a:effectRef>
-          <a:fontRef idx="minor">
-            <a:schemeClr val="tx1"/>
-          </a:fontRef>
-        </p:style>
-      </p:cxnSp>
-      <p:cxnSp>
-        <p:nvCxnSpPr>
-          <p:cNvPr id="430" name="Connector 429"/>
-          <p:cNvCxnSpPr/>
-          <p:nvPr/>
-        </p:nvCxnSpPr>
-        <p:spPr>
-          <a:xfrm>
-            <a:off x="11750040" y="8641080"/>
-            <a:ext cx="0" cy="521208"/>
-          </a:xfrm>
-          <a:prstGeom prst="line">
-            <a:avLst/>
-          </a:prstGeom>
-          <a:ln w="8890">
-            <a:solidFill>
-              <a:srgbClr val="000000"/>
-            </a:solidFill>
-          </a:ln>
-        </p:spPr>
-        <p:style>
-          <a:lnRef idx="2">
-            <a:schemeClr val="accent1"/>
-          </a:lnRef>
-          <a:fillRef idx="0">
-            <a:schemeClr val="accent1"/>
-          </a:fillRef>
-          <a:effectRef idx="1">
-            <a:schemeClr val="accent1"/>
-          </a:effectRef>
-          <a:fontRef idx="minor">
-            <a:schemeClr val="tx1"/>
-          </a:fontRef>
-        </p:style>
-      </p:cxnSp>
-      <p:cxnSp>
-        <p:nvCxnSpPr>
-          <p:cNvPr id="431" name="Connector 430"/>
-          <p:cNvCxnSpPr/>
-          <p:nvPr/>
-        </p:nvCxnSpPr>
-        <p:spPr>
-          <a:xfrm>
-            <a:off x="12070080" y="8641080"/>
-            <a:ext cx="0" cy="521208"/>
-          </a:xfrm>
-          <a:prstGeom prst="line">
-            <a:avLst/>
-          </a:prstGeom>
-          <a:ln w="8890">
-            <a:solidFill>
-              <a:srgbClr val="000000"/>
-            </a:solidFill>
-          </a:ln>
-        </p:spPr>
-        <p:style>
-          <a:lnRef idx="2">
-            <a:schemeClr val="accent1"/>
-          </a:lnRef>
-          <a:fillRef idx="0">
-            <a:schemeClr val="accent1"/>
-          </a:fillRef>
-          <a:effectRef idx="1">
-            <a:schemeClr val="accent1"/>
-          </a:effectRef>
-          <a:fontRef idx="minor">
-            <a:schemeClr val="tx1"/>
-          </a:fontRef>
-        </p:style>
-      </p:cxnSp>
-      <p:cxnSp>
-        <p:nvCxnSpPr>
-          <p:cNvPr id="432" name="Connector 431"/>
-          <p:cNvCxnSpPr/>
-          <p:nvPr/>
-        </p:nvCxnSpPr>
-        <p:spPr>
-          <a:xfrm>
-            <a:off x="14026896" y="8641080"/>
-            <a:ext cx="0" cy="521208"/>
-          </a:xfrm>
-          <a:prstGeom prst="line">
-            <a:avLst/>
-          </a:prstGeom>
-          <a:ln w="8890">
-            <a:solidFill>
-              <a:srgbClr val="000000"/>
-            </a:solidFill>
-          </a:ln>
-        </p:spPr>
-        <p:style>
-          <a:lnRef idx="2">
-            <a:schemeClr val="accent1"/>
-          </a:lnRef>
-          <a:fillRef idx="0">
-            <a:schemeClr val="accent1"/>
-          </a:fillRef>
-          <a:effectRef idx="1">
-            <a:schemeClr val="accent1"/>
-          </a:effectRef>
-          <a:fontRef idx="minor">
-            <a:schemeClr val="tx1"/>
-          </a:fontRef>
-        </p:style>
-      </p:cxnSp>
+      <p:sp>
+        <p:nvSpPr>
+          <p:cNvPr id="426" name="TextBox 425"/>
+          <p:cNvSpPr txBox="1"/>
+          <p:nvPr/>
+        </p:nvSpPr>
+        <p:spPr>
+          <a:xfrm>
+            <a:off x="11585448" y="7040879"/>
+            <a:ext cx="1190345" cy="109728"/>
+          </a:xfrm>
+          <a:prstGeom prst="rect">
+            <a:avLst/>
+          </a:prstGeom>
+          <a:noFill/>
+        </p:spPr>
+        <p:txBody>
+          <a:bodyPr wrap="square" lIns="0" rIns="0" tIns="0" bIns="0" anchor="ctr">
+            <a:spAutoFit/>
+          </a:bodyPr>
+          <a:lstStyle/>
+          <a:p>
+            <a:pPr algn="l"/>
+            <a:r>
+              <a:rPr sz="520" b="0">
+                <a:solidFill>
+                  <a:srgbClr val="000000"/>
+                </a:solidFill>
+                <a:latin typeface="Arial"/>
+              </a:rPr>
+              <a:t>* ARMED WHEN FIRING.</a:t>
+            </a:r>
+          </a:p>
+        </p:txBody>
+      </p:sp>
+      <p:sp>
+        <p:nvSpPr>
+          <p:cNvPr id="427" name="TextBox 426"/>
+          <p:cNvSpPr txBox="1"/>
+          <p:nvPr/>
+        </p:nvSpPr>
+        <p:spPr>
+          <a:xfrm>
+            <a:off x="11585448" y="7159751"/>
+            <a:ext cx="2893649" cy="109728"/>
+          </a:xfrm>
+          <a:prstGeom prst="rect">
+            <a:avLst/>
+          </a:prstGeom>
+          <a:noFill/>
+        </p:spPr>
+        <p:txBody>
+          <a:bodyPr wrap="square" lIns="0" rIns="0" tIns="0" bIns="0" anchor="ctr">
+            <a:spAutoFit/>
+          </a:bodyPr>
+          <a:lstStyle/>
+          <a:p>
+            <a:pPr algn="l"/>
+            <a:r>
+              <a:rPr sz="520" b="0">
+                <a:solidFill>
+                  <a:srgbClr val="000000"/>
+                </a:solidFill>
+                <a:latin typeface="Arial"/>
+              </a:rPr>
+              <a:t>ANY TRIP: CLOSE XV-301 &amp; XV-302, OPEN XV-303 BLEED,</a:t>
+            </a:r>
+          </a:p>
+        </p:txBody>
+      </p:sp>
+      <p:sp>
+        <p:nvSpPr>
+          <p:cNvPr id="428" name="TextBox 427"/>
+          <p:cNvSpPr txBox="1"/>
+          <p:nvPr/>
+        </p:nvSpPr>
+        <p:spPr>
+          <a:xfrm>
+            <a:off x="11585448" y="7278623"/>
+            <a:ext cx="2728813" cy="109728"/>
+          </a:xfrm>
+          <a:prstGeom prst="rect">
+            <a:avLst/>
+          </a:prstGeom>
+          <a:noFill/>
+        </p:spPr>
+        <p:txBody>
+          <a:bodyPr wrap="square" lIns="0" rIns="0" tIns="0" bIns="0" anchor="ctr">
+            <a:spAutoFit/>
+          </a:bodyPr>
+          <a:lstStyle/>
+          <a:p>
+            <a:pPr algn="l"/>
+            <a:r>
+              <a:rPr sz="520" b="0">
+                <a:solidFill>
+                  <a:srgbClr val="000000"/>
+                </a:solidFill>
+                <a:latin typeface="Arial"/>
+              </a:rPr>
+              <a:t>CLOSE FV-300, OPEN FV-200 &amp; HV-400 (POST-PURGE).</a:t>
+            </a:r>
+          </a:p>
+        </p:txBody>
+      </p:sp>
+      <p:sp>
+        <p:nvSpPr>
+          <p:cNvPr id="429" name="TextBox 428"/>
+          <p:cNvSpPr txBox="1"/>
+          <p:nvPr/>
+        </p:nvSpPr>
+        <p:spPr>
+          <a:xfrm>
+            <a:off x="11585448" y="7397496"/>
+            <a:ext cx="2728813" cy="109728"/>
+          </a:xfrm>
+          <a:prstGeom prst="rect">
+            <a:avLst/>
+          </a:prstGeom>
+          <a:noFill/>
+        </p:spPr>
+        <p:txBody>
+          <a:bodyPr wrap="square" lIns="0" rIns="0" tIns="0" bIns="0" anchor="ctr">
+            <a:spAutoFit/>
+          </a:bodyPr>
+          <a:lstStyle/>
+          <a:p>
+            <a:pPr algn="l"/>
+            <a:r>
+              <a:rPr sz="520" b="0">
+                <a:solidFill>
+                  <a:srgbClr val="000000"/>
+                </a:solidFill>
+                <a:latin typeface="Arial"/>
+              </a:rPr>
+              <a:t>RESET ONLY FROM BMS AFTER 300 s PURGE; LIGHT-OFF</a:t>
+            </a:r>
+          </a:p>
+        </p:txBody>
+      </p:sp>
+      <p:sp>
+        <p:nvSpPr>
+          <p:cNvPr id="430" name="TextBox 429"/>
+          <p:cNvSpPr txBox="1"/>
+          <p:nvPr/>
+        </p:nvSpPr>
+        <p:spPr>
+          <a:xfrm>
+            <a:off x="11585448" y="7516368"/>
+            <a:ext cx="2618922" cy="109728"/>
+          </a:xfrm>
+          <a:prstGeom prst="rect">
+            <a:avLst/>
+          </a:prstGeom>
+          <a:noFill/>
+        </p:spPr>
+        <p:txBody>
+          <a:bodyPr wrap="square" lIns="0" rIns="0" tIns="0" bIns="0" anchor="ctr">
+            <a:spAutoFit/>
+          </a:bodyPr>
+          <a:lstStyle/>
+          <a:p>
+            <a:pPr algn="l"/>
+            <a:r>
+              <a:rPr sz="520" b="0">
+                <a:solidFill>
+                  <a:srgbClr val="000000"/>
+                </a:solidFill>
+                <a:latin typeface="Arial"/>
+              </a:rPr>
+              <a:t>AT LOW FIRE (TIC-030 MAN 10-20 %), 10 s TRIAL.</a:t>
+            </a:r>
+          </a:p>
+        </p:txBody>
+      </p:sp>
+      <p:sp>
+        <p:nvSpPr>
+          <p:cNvPr id="431" name="TextBox 430"/>
+          <p:cNvSpPr txBox="1"/>
+          <p:nvPr/>
+        </p:nvSpPr>
+        <p:spPr>
+          <a:xfrm>
+            <a:off x="457200" y="8732520"/>
+            <a:ext cx="5486400" cy="1554480"/>
+          </a:xfrm>
+          <a:prstGeom prst="rect">
+            <a:avLst/>
+          </a:prstGeom>
+          <a:noFill/>
+        </p:spPr>
+        <p:txBody>
+          <a:bodyPr wrap="square" lIns="0" rIns="0" tIns="0" bIns="0">
+            <a:spAutoFit/>
+          </a:bodyPr>
+          <a:lstStyle/>
+          <a:p>
+            <a:pPr algn="l"/>
+            <a:r>
+              <a:rPr sz="550" b="1">
+                <a:solidFill>
+                  <a:srgbClr val="000000"/>
+                </a:solidFill>
+                <a:latin typeface="Arial"/>
+              </a:rPr>
+              <a:t>GENERAL NOTES:</a:t>
+            </a:r>
+          </a:p>
+          <a:p>
+            <a:pPr algn="l"/>
+            <a:r>
+              <a:rPr sz="550" b="0">
+                <a:solidFill>
+                  <a:srgbClr val="000000"/>
+                </a:solidFill>
+                <a:latin typeface="Arial"/>
+              </a:rPr>
+              <a:t>1. DESIGN BASIS: NATURAL DRAFT FIRED HEATER VER 1 OTS MODEL, DESIGN CASE. PRESSURES kPa g, DRAFT mmH₂O.</a:t>
+            </a:r>
+          </a:p>
+          <a:p>
+            <a:pPr algn="l"/>
+            <a:r>
+              <a:rPr sz="550" b="0">
+                <a:solidFill>
+                  <a:srgbClr val="000000"/>
+                </a:solidFill>
+                <a:latin typeface="Arial"/>
+              </a:rPr>
+              <a:t>    FEED 6.8 L/s = 19 584 kg/h (0.80 kg/L): 40 → 180 (E-100) → 233 (CROSSOVER) → 350 °C; PUMP DISCH. ≈ 1030, OUTLET ≈ 545.</a:t>
+            </a:r>
+          </a:p>
+          <a:p>
+            <a:pPr algn="l"/>
+            <a:r>
+              <a:rPr sz="550" b="0">
+                <a:solidFill>
+                  <a:srgbClr val="000000"/>
+                </a:solidFill>
+                <a:latin typeface="Arial"/>
+              </a:rPr>
+              <a:t>    FUEL 243 kg/h, LHV 42 MJ/kg: FIRED 2.84 MW, ABSORBED 2.31 MW (81.5 %). AIR 3 892 kg/h (11 % EXCESS).</a:t>
+            </a:r>
+          </a:p>
+          <a:p>
+            <a:pPr algn="l"/>
+            <a:r>
+              <a:rPr sz="550" b="0">
+                <a:solidFill>
+                  <a:srgbClr val="000000"/>
+                </a:solidFill>
+                <a:latin typeface="Arial"/>
+              </a:rPr>
+              <a:t>    FLUE GAS 4 380 kg/h AT 400 °C (INCL. ≈ 245 kg/h TRAMP AIR). DRAFT: ARCH -2.5, FLOOR -6.0, WINDBOX 5.25.</a:t>
+            </a:r>
+          </a:p>
+          <a:p>
+            <a:pPr algn="l"/>
+            <a:r>
+              <a:rPr sz="550" b="0">
+                <a:solidFill>
+                  <a:srgbClr val="000000"/>
+                </a:solidFill>
+                <a:latin typeface="Arial"/>
+              </a:rPr>
+              <a:t>2. LINE SIZES PRELIMINARY FROM VELOCITY (LIQUID 1.5-2.5 m/s, AIR DUCT 10 m/s) - TBC BY HYDRAULIC CALCULATION.</a:t>
+            </a:r>
+          </a:p>
+          <a:p>
+            <a:pPr algn="l"/>
+            <a:r>
+              <a:rPr sz="550" b="0">
+                <a:solidFill>
+                  <a:srgbClr val="000000"/>
+                </a:solidFill>
+                <a:latin typeface="Arial"/>
+              </a:rPr>
+              <a:t>3. PRESSURE INSTRUMENTS C/W ROOT AND TEST VALVES (TYP., NOT SHOWN). PUMP CASING VENTS/DRAINS TYP., NOT SHOWN.</a:t>
+            </a:r>
+          </a:p>
+          <a:p>
+            <a:pPr algn="l"/>
+            <a:r>
+              <a:rPr sz="550" b="0">
+                <a:solidFill>
+                  <a:srgbClr val="000000"/>
+                </a:solidFill>
+                <a:latin typeface="Arial"/>
+              </a:rPr>
+              <a:t>4. XV-301 / XV-302 / XV-303 FORM A DOUBLE BLOCK AND BLEED, OPERATED BY SIS-100 (BMS); SIGNALS NOT SHOWN.</a:t>
+            </a:r>
+          </a:p>
+          <a:p>
+            <a:pPr algn="l"/>
+            <a:r>
+              <a:rPr sz="550" b="0">
+                <a:solidFill>
+                  <a:srgbClr val="000000"/>
+                </a:solidFill>
+                <a:latin typeface="Arial"/>
+              </a:rPr>
+              <a:t>5. FV-010 FAILS OPEN SO THE COIL KEEPS FLOW ON AIR OR SIGNAL FAILURE; FV-300 FAILS CLOSED; FV-200 &amp; HV-400 FAIL OPEN.</a:t>
+            </a:r>
+          </a:p>
+          <a:p>
+            <a:pPr algn="l"/>
+            <a:r>
+              <a:rPr sz="550" b="0">
+                <a:solidFill>
+                  <a:srgbClr val="000000"/>
+                </a:solidFill>
+                <a:latin typeface="Arial"/>
+              </a:rPr>
+              <a:t>6. RADIANT AND CONVECTION COILS SHOWN SCHEMATICALLY; TUBE COUNT AND PASSES PER DESIGN TAB (SINGLE PASS).</a:t>
+            </a:r>
+          </a:p>
+          <a:p>
+            <a:pPr algn="l"/>
+            <a:r>
+              <a:rPr sz="550" b="0">
+                <a:solidFill>
+                  <a:srgbClr val="000000"/>
+                </a:solidFill>
+                <a:latin typeface="Arial"/>
+              </a:rPr>
+              <a:t>7. FT-008 SERVES FIC-003, FIAL-008 AND FSLL-008 (HAZOP GAP: ADD FT-008B FOR THE TRIP - HOLD).</a:t>
+            </a:r>
+          </a:p>
+        </p:txBody>
+      </p:sp>
+      <p:sp>
+        <p:nvSpPr>
+          <p:cNvPr id="432" name="TextBox 431"/>
+          <p:cNvSpPr txBox="1"/>
+          <p:nvPr/>
+        </p:nvSpPr>
+        <p:spPr>
+          <a:xfrm>
+            <a:off x="6035040" y="8732520"/>
+            <a:ext cx="5577840" cy="1554480"/>
+          </a:xfrm>
+          <a:prstGeom prst="rect">
+            <a:avLst/>
+          </a:prstGeom>
+          <a:noFill/>
+        </p:spPr>
+        <p:txBody>
+          <a:bodyPr wrap="square" lIns="0" rIns="0" tIns="0" bIns="0">
+            <a:spAutoFit/>
+          </a:bodyPr>
+          <a:lstStyle/>
+          <a:p>
+            <a:pPr algn="l"/>
+            <a:r>
+              <a:rPr sz="550" b="1">
+                <a:solidFill>
+                  <a:srgbClr val="000000"/>
+                </a:solidFill>
+                <a:latin typeface="Arial"/>
+              </a:rPr>
+              <a:t>NOTES (CONT.):</a:t>
+            </a:r>
+          </a:p>
+          <a:p>
+            <a:pPr algn="l"/>
+            <a:r>
+              <a:rPr sz="550" b="0">
+                <a:solidFill>
+                  <a:srgbClr val="000000"/>
+                </a:solidFill>
+                <a:latin typeface="Arial"/>
+              </a:rPr>
+              <a:t>8. TIC-030 MOVES FUEL ONLY. REV A: FIC-005 ON OWN SET POINT. REV B OPTION: FY-005 AIR/FUEL RATIO ON FI-001 + AIC-027 O₂ TRIM.</a:t>
+            </a:r>
+          </a:p>
+          <a:p>
+            <a:pPr algn="l"/>
+            <a:r>
+              <a:rPr sz="550" b="0">
+                <a:solidFill>
+                  <a:srgbClr val="000000"/>
+                </a:solidFill>
+                <a:latin typeface="Arial"/>
+              </a:rPr>
+              <a:t>9. PSV-101 PROTECTS E-100 FEED SIDE; SET 1700 kPa g, F ORIFICE, GOVERNED BY FIRE (RELIEF LOAD BASIS NDFH-V1-PE-RLB-001).</a:t>
+            </a:r>
+          </a:p>
+          <a:p>
+            <a:pPr algn="l"/>
+            <a:r>
+              <a:rPr sz="550" b="0">
+                <a:solidFill>
+                  <a:srgbClr val="000000"/>
+                </a:solidFill>
+                <a:latin typeface="Arial"/>
+              </a:rPr>
+              <a:t>10. PI-019 = FUEL HEADER (≈ 1940 kPa g). PT-020 = GUN PRESSURE (≈ 600 kPa g), DOWNSTREAM OF FV-300.</a:t>
+            </a:r>
+          </a:p>
+          <a:p>
+            <a:pPr algn="l"/>
+            <a:r>
+              <a:rPr sz="550" b="0">
+                <a:solidFill>
+                  <a:srgbClr val="000000"/>
+                </a:solidFill>
+                <a:latin typeface="Arial"/>
+              </a:rPr>
+              <a:t>11. BS-005 UV FLAME SCANNER ON THE BURNER; LIGHT-OFF AND PURGE PER BMS SEQUENCE (LEGEND PANEL).</a:t>
+            </a:r>
+          </a:p>
+          <a:p>
+            <a:pPr algn="l"/>
+            <a:r>
+              <a:rPr sz="550" b="0">
+                <a:solidFill>
+                  <a:srgbClr val="000000"/>
+                </a:solidFill>
+                <a:latin typeface="Arial"/>
+              </a:rPr>
+              <a:t>12. HV-221 SNUFFING STEAM, NORMALLY CLOSED; OPEN ONLY FOR A FIREBOX FIRE. EXPLOSION DOOR ON RADIANT WALL.</a:t>
+            </a:r>
+          </a:p>
+          <a:p>
+            <a:pPr algn="l"/>
+            <a:r>
+              <a:rPr sz="550" b="0">
+                <a:solidFill>
+                  <a:srgbClr val="000000"/>
+                </a:solidFill>
+                <a:latin typeface="Arial"/>
+              </a:rPr>
+              <a:t>13. V-108 HIGH-POINT VENT AT COIL INLET (NC); V-109 E-100 CHANNEL DRAIN (LC); V-110 PSV-101 INLET (CSO). REV E: HAND VALVES TAGGED FOR THE 3-D PLANT.</a:t>
+            </a:r>
+          </a:p>
+          <a:p>
+            <a:pPr algn="l"/>
+            <a:r>
+              <a:rPr sz="550" b="0">
+                <a:solidFill>
+                  <a:srgbClr val="000000"/>
+                </a:solidFill>
+                <a:latin typeface="Arial"/>
+              </a:rPr>
+              <a:t>14. ALARM SET POINTS: SEE WORKBOOK (ALARM TABLE); TRIP SET POINTS: INTERLOCK SCHEDULE.</a:t>
+            </a:r>
+          </a:p>
+        </p:txBody>
+      </p:sp>
       <p:cxnSp>
         <p:nvCxnSpPr>
           <p:cNvPr id="433" name="Connector 432"/>
@@ -21888,6 +21984,321 @@
         </p:nvCxnSpPr>
         <p:spPr>
           <a:xfrm>
+            <a:off x="11750040" y="8641080"/>
+            <a:ext cx="3054095" cy="0"/>
+          </a:xfrm>
+          <a:prstGeom prst="line">
+            <a:avLst/>
+          </a:prstGeom>
+          <a:ln w="8890">
+            <a:solidFill>
+              <a:srgbClr val="000000"/>
+            </a:solidFill>
+          </a:ln>
+        </p:spPr>
+        <p:style>
+          <a:lnRef idx="2">
+            <a:schemeClr val="accent1"/>
+          </a:lnRef>
+          <a:fillRef idx="0">
+            <a:schemeClr val="accent1"/>
+          </a:fillRef>
+          <a:effectRef idx="1">
+            <a:schemeClr val="accent1"/>
+          </a:effectRef>
+          <a:fontRef idx="minor">
+            <a:schemeClr val="tx1"/>
+          </a:fontRef>
+        </p:style>
+      </p:cxnSp>
+      <p:cxnSp>
+        <p:nvCxnSpPr>
+          <p:cNvPr id="434" name="Connector 433"/>
+          <p:cNvCxnSpPr/>
+          <p:nvPr/>
+        </p:nvCxnSpPr>
+        <p:spPr>
+          <a:xfrm>
+            <a:off x="11750040" y="8745321"/>
+            <a:ext cx="3054095" cy="0"/>
+          </a:xfrm>
+          <a:prstGeom prst="line">
+            <a:avLst/>
+          </a:prstGeom>
+          <a:ln w="8890">
+            <a:solidFill>
+              <a:srgbClr val="000000"/>
+            </a:solidFill>
+          </a:ln>
+        </p:spPr>
+        <p:style>
+          <a:lnRef idx="2">
+            <a:schemeClr val="accent1"/>
+          </a:lnRef>
+          <a:fillRef idx="0">
+            <a:schemeClr val="accent1"/>
+          </a:fillRef>
+          <a:effectRef idx="1">
+            <a:schemeClr val="accent1"/>
+          </a:effectRef>
+          <a:fontRef idx="minor">
+            <a:schemeClr val="tx1"/>
+          </a:fontRef>
+        </p:style>
+      </p:cxnSp>
+      <p:cxnSp>
+        <p:nvCxnSpPr>
+          <p:cNvPr id="435" name="Connector 434"/>
+          <p:cNvCxnSpPr/>
+          <p:nvPr/>
+        </p:nvCxnSpPr>
+        <p:spPr>
+          <a:xfrm>
+            <a:off x="11750040" y="8849563"/>
+            <a:ext cx="3054095" cy="0"/>
+          </a:xfrm>
+          <a:prstGeom prst="line">
+            <a:avLst/>
+          </a:prstGeom>
+          <a:ln w="8890">
+            <a:solidFill>
+              <a:srgbClr val="000000"/>
+            </a:solidFill>
+          </a:ln>
+        </p:spPr>
+        <p:style>
+          <a:lnRef idx="2">
+            <a:schemeClr val="accent1"/>
+          </a:lnRef>
+          <a:fillRef idx="0">
+            <a:schemeClr val="accent1"/>
+          </a:fillRef>
+          <a:effectRef idx="1">
+            <a:schemeClr val="accent1"/>
+          </a:effectRef>
+          <a:fontRef idx="minor">
+            <a:schemeClr val="tx1"/>
+          </a:fontRef>
+        </p:style>
+      </p:cxnSp>
+      <p:cxnSp>
+        <p:nvCxnSpPr>
+          <p:cNvPr id="436" name="Connector 435"/>
+          <p:cNvCxnSpPr/>
+          <p:nvPr/>
+        </p:nvCxnSpPr>
+        <p:spPr>
+          <a:xfrm>
+            <a:off x="11750040" y="8953804"/>
+            <a:ext cx="3054095" cy="0"/>
+          </a:xfrm>
+          <a:prstGeom prst="line">
+            <a:avLst/>
+          </a:prstGeom>
+          <a:ln w="8890">
+            <a:solidFill>
+              <a:srgbClr val="000000"/>
+            </a:solidFill>
+          </a:ln>
+        </p:spPr>
+        <p:style>
+          <a:lnRef idx="2">
+            <a:schemeClr val="accent1"/>
+          </a:lnRef>
+          <a:fillRef idx="0">
+            <a:schemeClr val="accent1"/>
+          </a:fillRef>
+          <a:effectRef idx="1">
+            <a:schemeClr val="accent1"/>
+          </a:effectRef>
+          <a:fontRef idx="minor">
+            <a:schemeClr val="tx1"/>
+          </a:fontRef>
+        </p:style>
+      </p:cxnSp>
+      <p:cxnSp>
+        <p:nvCxnSpPr>
+          <p:cNvPr id="437" name="Connector 436"/>
+          <p:cNvCxnSpPr/>
+          <p:nvPr/>
+        </p:nvCxnSpPr>
+        <p:spPr>
+          <a:xfrm>
+            <a:off x="11750040" y="9058046"/>
+            <a:ext cx="3054095" cy="0"/>
+          </a:xfrm>
+          <a:prstGeom prst="line">
+            <a:avLst/>
+          </a:prstGeom>
+          <a:ln w="8890">
+            <a:solidFill>
+              <a:srgbClr val="000000"/>
+            </a:solidFill>
+          </a:ln>
+        </p:spPr>
+        <p:style>
+          <a:lnRef idx="2">
+            <a:schemeClr val="accent1"/>
+          </a:lnRef>
+          <a:fillRef idx="0">
+            <a:schemeClr val="accent1"/>
+          </a:fillRef>
+          <a:effectRef idx="1">
+            <a:schemeClr val="accent1"/>
+          </a:effectRef>
+          <a:fontRef idx="minor">
+            <a:schemeClr val="tx1"/>
+          </a:fontRef>
+        </p:style>
+      </p:cxnSp>
+      <p:cxnSp>
+        <p:nvCxnSpPr>
+          <p:cNvPr id="438" name="Connector 437"/>
+          <p:cNvCxnSpPr/>
+          <p:nvPr/>
+        </p:nvCxnSpPr>
+        <p:spPr>
+          <a:xfrm>
+            <a:off x="11750040" y="9162288"/>
+            <a:ext cx="3054095" cy="0"/>
+          </a:xfrm>
+          <a:prstGeom prst="line">
+            <a:avLst/>
+          </a:prstGeom>
+          <a:ln w="8890">
+            <a:solidFill>
+              <a:srgbClr val="000000"/>
+            </a:solidFill>
+          </a:ln>
+        </p:spPr>
+        <p:style>
+          <a:lnRef idx="2">
+            <a:schemeClr val="accent1"/>
+          </a:lnRef>
+          <a:fillRef idx="0">
+            <a:schemeClr val="accent1"/>
+          </a:fillRef>
+          <a:effectRef idx="1">
+            <a:schemeClr val="accent1"/>
+          </a:effectRef>
+          <a:fontRef idx="minor">
+            <a:schemeClr val="tx1"/>
+          </a:fontRef>
+        </p:style>
+      </p:cxnSp>
+      <p:cxnSp>
+        <p:nvCxnSpPr>
+          <p:cNvPr id="439" name="Connector 438"/>
+          <p:cNvCxnSpPr/>
+          <p:nvPr/>
+        </p:nvCxnSpPr>
+        <p:spPr>
+          <a:xfrm>
+            <a:off x="11750040" y="8641080"/>
+            <a:ext cx="0" cy="521208"/>
+          </a:xfrm>
+          <a:prstGeom prst="line">
+            <a:avLst/>
+          </a:prstGeom>
+          <a:ln w="8890">
+            <a:solidFill>
+              <a:srgbClr val="000000"/>
+            </a:solidFill>
+          </a:ln>
+        </p:spPr>
+        <p:style>
+          <a:lnRef idx="2">
+            <a:schemeClr val="accent1"/>
+          </a:lnRef>
+          <a:fillRef idx="0">
+            <a:schemeClr val="accent1"/>
+          </a:fillRef>
+          <a:effectRef idx="1">
+            <a:schemeClr val="accent1"/>
+          </a:effectRef>
+          <a:fontRef idx="minor">
+            <a:schemeClr val="tx1"/>
+          </a:fontRef>
+        </p:style>
+      </p:cxnSp>
+      <p:cxnSp>
+        <p:nvCxnSpPr>
+          <p:cNvPr id="440" name="Connector 439"/>
+          <p:cNvCxnSpPr/>
+          <p:nvPr/>
+        </p:nvCxnSpPr>
+        <p:spPr>
+          <a:xfrm>
+            <a:off x="12070080" y="8641080"/>
+            <a:ext cx="0" cy="521208"/>
+          </a:xfrm>
+          <a:prstGeom prst="line">
+            <a:avLst/>
+          </a:prstGeom>
+          <a:ln w="8890">
+            <a:solidFill>
+              <a:srgbClr val="000000"/>
+            </a:solidFill>
+          </a:ln>
+        </p:spPr>
+        <p:style>
+          <a:lnRef idx="2">
+            <a:schemeClr val="accent1"/>
+          </a:lnRef>
+          <a:fillRef idx="0">
+            <a:schemeClr val="accent1"/>
+          </a:fillRef>
+          <a:effectRef idx="1">
+            <a:schemeClr val="accent1"/>
+          </a:effectRef>
+          <a:fontRef idx="minor">
+            <a:schemeClr val="tx1"/>
+          </a:fontRef>
+        </p:style>
+      </p:cxnSp>
+      <p:cxnSp>
+        <p:nvCxnSpPr>
+          <p:cNvPr id="441" name="Connector 440"/>
+          <p:cNvCxnSpPr/>
+          <p:nvPr/>
+        </p:nvCxnSpPr>
+        <p:spPr>
+          <a:xfrm>
+            <a:off x="14026896" y="8641080"/>
+            <a:ext cx="0" cy="521208"/>
+          </a:xfrm>
+          <a:prstGeom prst="line">
+            <a:avLst/>
+          </a:prstGeom>
+          <a:ln w="8890">
+            <a:solidFill>
+              <a:srgbClr val="000000"/>
+            </a:solidFill>
+          </a:ln>
+        </p:spPr>
+        <p:style>
+          <a:lnRef idx="2">
+            <a:schemeClr val="accent1"/>
+          </a:lnRef>
+          <a:fillRef idx="0">
+            <a:schemeClr val="accent1"/>
+          </a:fillRef>
+          <a:effectRef idx="1">
+            <a:schemeClr val="accent1"/>
+          </a:effectRef>
+          <a:fontRef idx="minor">
+            <a:schemeClr val="tx1"/>
+          </a:fontRef>
+        </p:style>
+      </p:cxnSp>
+      <p:cxnSp>
+        <p:nvCxnSpPr>
+          <p:cNvPr id="442" name="Connector 441"/>
+          <p:cNvCxnSpPr/>
+          <p:nvPr/>
+        </p:nvCxnSpPr>
+        <p:spPr>
+          <a:xfrm>
             <a:off x="14804135" y="8641080"/>
             <a:ext cx="0" cy="521208"/>
           </a:xfrm>
@@ -21917,14 +22328,14 @@
       </p:cxnSp>
       <p:sp>
         <p:nvSpPr>
-          <p:cNvPr id="434" name="TextBox 433"/>
+          <p:cNvPr id="443" name="TextBox 442"/>
           <p:cNvSpPr txBox="1"/>
           <p:nvPr/>
         </p:nvSpPr>
         <p:spPr>
           <a:xfrm>
             <a:off x="11750040" y="8641080"/>
-            <a:ext cx="320040" cy="130301"/>
+            <a:ext cx="320040" cy="104241"/>
           </a:xfrm>
           <a:prstGeom prst="rect">
             <a:avLst/>
@@ -21952,14 +22363,14 @@
       </p:sp>
       <p:sp>
         <p:nvSpPr>
-          <p:cNvPr id="435" name="TextBox 434"/>
+          <p:cNvPr id="444" name="TextBox 443"/>
           <p:cNvSpPr txBox="1"/>
           <p:nvPr/>
         </p:nvSpPr>
         <p:spPr>
           <a:xfrm>
             <a:off x="12070080" y="8641080"/>
-            <a:ext cx="1956816" cy="130301"/>
+            <a:ext cx="1956816" cy="104241"/>
           </a:xfrm>
           <a:prstGeom prst="rect">
             <a:avLst/>
@@ -21987,14 +22398,14 @@
       </p:sp>
       <p:sp>
         <p:nvSpPr>
-          <p:cNvPr id="436" name="TextBox 435"/>
+          <p:cNvPr id="445" name="TextBox 444"/>
           <p:cNvSpPr txBox="1"/>
           <p:nvPr/>
         </p:nvSpPr>
         <p:spPr>
           <a:xfrm>
             <a:off x="14026896" y="8641080"/>
-            <a:ext cx="777240" cy="130301"/>
+            <a:ext cx="777240" cy="104241"/>
           </a:xfrm>
           <a:prstGeom prst="rect">
             <a:avLst/>
@@ -22022,14 +22433,14 @@
       </p:sp>
       <p:sp>
         <p:nvSpPr>
-          <p:cNvPr id="437" name="TextBox 436"/>
+          <p:cNvPr id="446" name="TextBox 445"/>
           <p:cNvSpPr txBox="1"/>
           <p:nvPr/>
         </p:nvSpPr>
         <p:spPr>
           <a:xfrm>
-            <a:off x="11750040" y="8771382"/>
-            <a:ext cx="320040" cy="130301"/>
+            <a:off x="11750040" y="8745321"/>
+            <a:ext cx="320040" cy="104241"/>
           </a:xfrm>
           <a:prstGeom prst="rect">
             <a:avLst/>
@@ -22057,14 +22468,14 @@
       </p:sp>
       <p:sp>
         <p:nvSpPr>
-          <p:cNvPr id="438" name="TextBox 437"/>
+          <p:cNvPr id="447" name="TextBox 446"/>
           <p:cNvSpPr txBox="1"/>
           <p:nvPr/>
         </p:nvSpPr>
         <p:spPr>
           <a:xfrm>
-            <a:off x="12070080" y="8771382"/>
-            <a:ext cx="1956816" cy="130301"/>
+            <a:off x="12070080" y="8745321"/>
+            <a:ext cx="1956816" cy="104241"/>
           </a:xfrm>
           <a:prstGeom prst="rect">
             <a:avLst/>
@@ -22092,14 +22503,14 @@
       </p:sp>
       <p:sp>
         <p:nvSpPr>
-          <p:cNvPr id="439" name="TextBox 438"/>
+          <p:cNvPr id="448" name="TextBox 447"/>
           <p:cNvSpPr txBox="1"/>
           <p:nvPr/>
         </p:nvSpPr>
         <p:spPr>
           <a:xfrm>
-            <a:off x="14026896" y="8771382"/>
-            <a:ext cx="777240" cy="130301"/>
+            <a:off x="14026896" y="8745321"/>
+            <a:ext cx="777240" cy="104241"/>
           </a:xfrm>
           <a:prstGeom prst="rect">
             <a:avLst/>
@@ -22127,14 +22538,14 @@
       </p:sp>
       <p:sp>
         <p:nvSpPr>
-          <p:cNvPr id="440" name="TextBox 439"/>
+          <p:cNvPr id="449" name="TextBox 448"/>
           <p:cNvSpPr txBox="1"/>
           <p:nvPr/>
         </p:nvSpPr>
         <p:spPr>
           <a:xfrm>
-            <a:off x="11750040" y="8901684"/>
-            <a:ext cx="320040" cy="130301"/>
+            <a:off x="11750040" y="8849563"/>
+            <a:ext cx="320040" cy="104241"/>
           </a:xfrm>
           <a:prstGeom prst="rect">
             <a:avLst/>
@@ -22162,14 +22573,14 @@
       </p:sp>
       <p:sp>
         <p:nvSpPr>
-          <p:cNvPr id="441" name="TextBox 440"/>
+          <p:cNvPr id="450" name="TextBox 449"/>
           <p:cNvSpPr txBox="1"/>
           <p:nvPr/>
         </p:nvSpPr>
         <p:spPr>
           <a:xfrm>
-            <a:off x="12070080" y="8901684"/>
-            <a:ext cx="1956816" cy="130301"/>
+            <a:off x="12070080" y="8849563"/>
+            <a:ext cx="1956816" cy="104241"/>
           </a:xfrm>
           <a:prstGeom prst="rect">
             <a:avLst/>
@@ -22197,14 +22608,14 @@
       </p:sp>
       <p:sp>
         <p:nvSpPr>
-          <p:cNvPr id="442" name="TextBox 441"/>
+          <p:cNvPr id="451" name="TextBox 450"/>
           <p:cNvSpPr txBox="1"/>
           <p:nvPr/>
         </p:nvSpPr>
         <p:spPr>
           <a:xfrm>
-            <a:off x="14026896" y="8901684"/>
-            <a:ext cx="777240" cy="130301"/>
+            <a:off x="14026896" y="8849563"/>
+            <a:ext cx="777240" cy="104241"/>
           </a:xfrm>
           <a:prstGeom prst="rect">
             <a:avLst/>
@@ -22232,14 +22643,14 @@
       </p:sp>
       <p:sp>
         <p:nvSpPr>
-          <p:cNvPr id="443" name="TextBox 442"/>
+          <p:cNvPr id="452" name="TextBox 451"/>
           <p:cNvSpPr txBox="1"/>
           <p:nvPr/>
         </p:nvSpPr>
         <p:spPr>
           <a:xfrm>
-            <a:off x="11750040" y="9031986"/>
-            <a:ext cx="320040" cy="130301"/>
+            <a:off x="11750040" y="8953804"/>
+            <a:ext cx="320040" cy="104241"/>
           </a:xfrm>
           <a:prstGeom prst="rect">
             <a:avLst/>
@@ -22267,14 +22678,14 @@
       </p:sp>
       <p:sp>
         <p:nvSpPr>
-          <p:cNvPr id="444" name="TextBox 443"/>
+          <p:cNvPr id="453" name="TextBox 452"/>
           <p:cNvSpPr txBox="1"/>
           <p:nvPr/>
         </p:nvSpPr>
         <p:spPr>
           <a:xfrm>
-            <a:off x="12070080" y="9031986"/>
-            <a:ext cx="1956816" cy="130301"/>
+            <a:off x="12070080" y="8953804"/>
+            <a:ext cx="1956816" cy="104241"/>
           </a:xfrm>
           <a:prstGeom prst="rect">
             <a:avLst/>
@@ -22302,14 +22713,14 @@
       </p:sp>
       <p:sp>
         <p:nvSpPr>
-          <p:cNvPr id="445" name="TextBox 444"/>
+          <p:cNvPr id="454" name="TextBox 453"/>
           <p:cNvSpPr txBox="1"/>
           <p:nvPr/>
         </p:nvSpPr>
         <p:spPr>
           <a:xfrm>
-            <a:off x="14026896" y="9031986"/>
-            <a:ext cx="777240" cy="130301"/>
+            <a:off x="14026896" y="8953804"/>
+            <a:ext cx="777240" cy="104241"/>
           </a:xfrm>
           <a:prstGeom prst="rect">
             <a:avLst/>
@@ -22337,7 +22748,112 @@
       </p:sp>
       <p:sp>
         <p:nvSpPr>
-          <p:cNvPr id="446" name="Rectangle 445"/>
+          <p:cNvPr id="455" name="TextBox 454"/>
+          <p:cNvSpPr txBox="1"/>
+          <p:nvPr/>
+        </p:nvSpPr>
+        <p:spPr>
+          <a:xfrm>
+            <a:off x="11750040" y="9058046"/>
+            <a:ext cx="320040" cy="104241"/>
+          </a:xfrm>
+          <a:prstGeom prst="rect">
+            <a:avLst/>
+          </a:prstGeom>
+          <a:noFill/>
+        </p:spPr>
+        <p:txBody>
+          <a:bodyPr wrap="none" lIns="0" rIns="0" tIns="0" bIns="0" anchor="ctr">
+            <a:spAutoFit/>
+          </a:bodyPr>
+          <a:lstStyle/>
+          <a:p>
+            <a:pPr algn="ctr"/>
+            <a:r>
+              <a:rPr sz="500" b="0">
+                <a:solidFill>
+                  <a:srgbClr val="000000"/>
+                </a:solidFill>
+                <a:latin typeface="Arial"/>
+              </a:rPr>
+              <a:t>E</a:t>
+            </a:r>
+          </a:p>
+        </p:txBody>
+      </p:sp>
+      <p:sp>
+        <p:nvSpPr>
+          <p:cNvPr id="456" name="TextBox 455"/>
+          <p:cNvSpPr txBox="1"/>
+          <p:nvPr/>
+        </p:nvSpPr>
+        <p:spPr>
+          <a:xfrm>
+            <a:off x="12070080" y="9058046"/>
+            <a:ext cx="1956816" cy="104241"/>
+          </a:xfrm>
+          <a:prstGeom prst="rect">
+            <a:avLst/>
+          </a:prstGeom>
+          <a:noFill/>
+        </p:spPr>
+        <p:txBody>
+          <a:bodyPr wrap="none" lIns="0" rIns="0" tIns="0" bIns="0" anchor="ctr">
+            <a:spAutoFit/>
+          </a:bodyPr>
+          <a:lstStyle/>
+          <a:p>
+            <a:pPr algn="ctr"/>
+            <a:r>
+              <a:rPr sz="500" b="0">
+                <a:solidFill>
+                  <a:srgbClr val="000000"/>
+                </a:solidFill>
+                <a:latin typeface="Arial"/>
+              </a:rPr>
+              <a:t>HAND VALVES V-108 TO V-110, V-401, V-402 TAGGED</a:t>
+            </a:r>
+          </a:p>
+        </p:txBody>
+      </p:sp>
+      <p:sp>
+        <p:nvSpPr>
+          <p:cNvPr id="457" name="TextBox 456"/>
+          <p:cNvSpPr txBox="1"/>
+          <p:nvPr/>
+        </p:nvSpPr>
+        <p:spPr>
+          <a:xfrm>
+            <a:off x="14026896" y="9058046"/>
+            <a:ext cx="777240" cy="104241"/>
+          </a:xfrm>
+          <a:prstGeom prst="rect">
+            <a:avLst/>
+          </a:prstGeom>
+          <a:noFill/>
+        </p:spPr>
+        <p:txBody>
+          <a:bodyPr wrap="none" lIns="0" rIns="0" tIns="0" bIns="0" anchor="ctr">
+            <a:spAutoFit/>
+          </a:bodyPr>
+          <a:lstStyle/>
+          <a:p>
+            <a:pPr algn="ctr"/>
+            <a:r>
+              <a:rPr sz="500" b="0">
+                <a:solidFill>
+                  <a:srgbClr val="000000"/>
+                </a:solidFill>
+                <a:latin typeface="Arial"/>
+              </a:rPr>
+              <a:t>25-OCT-26</a:t>
+            </a:r>
+          </a:p>
+        </p:txBody>
+      </p:sp>
+      <p:sp>
+        <p:nvSpPr>
+          <p:cNvPr id="458" name="Rectangle 457"/>
           <p:cNvSpPr/>
           <p:nvPr/>
         </p:nvSpPr>
@@ -22383,7 +22899,7 @@
       </p:sp>
       <p:cxnSp>
         <p:nvCxnSpPr>
-          <p:cNvPr id="447" name="Connector 446"/>
+          <p:cNvPr id="459" name="Connector 458"/>
           <p:cNvCxnSpPr/>
           <p:nvPr/>
         </p:nvCxnSpPr>
@@ -22418,7 +22934,7 @@
       </p:cxnSp>
       <p:cxnSp>
         <p:nvCxnSpPr>
-          <p:cNvPr id="448" name="Connector 447"/>
+          <p:cNvPr id="460" name="Connector 459"/>
           <p:cNvCxnSpPr/>
           <p:nvPr/>
         </p:nvCxnSpPr>
@@ -22453,7 +22969,7 @@
       </p:cxnSp>
       <p:cxnSp>
         <p:nvCxnSpPr>
-          <p:cNvPr id="449" name="Connector 448"/>
+          <p:cNvPr id="461" name="Connector 460"/>
           <p:cNvCxnSpPr/>
           <p:nvPr/>
         </p:nvCxnSpPr>
@@ -22488,7 +23004,7 @@
       </p:cxnSp>
       <p:sp>
         <p:nvSpPr>
-          <p:cNvPr id="450" name="TextBox 449"/>
+          <p:cNvPr id="462" name="TextBox 461"/>
           <p:cNvSpPr txBox="1"/>
           <p:nvPr/>
         </p:nvSpPr>
@@ -22523,7 +23039,7 @@
       </p:sp>
       <p:sp>
         <p:nvSpPr>
-          <p:cNvPr id="451" name="TextBox 450"/>
+          <p:cNvPr id="463" name="TextBox 462"/>
           <p:cNvSpPr txBox="1"/>
           <p:nvPr/>
         </p:nvSpPr>
@@ -22558,7 +23074,7 @@
       </p:sp>
       <p:cxnSp>
         <p:nvCxnSpPr>
-          <p:cNvPr id="452" name="Connector 451"/>
+          <p:cNvPr id="464" name="Connector 463"/>
           <p:cNvCxnSpPr/>
           <p:nvPr/>
         </p:nvCxnSpPr>
@@ -22593,7 +23109,7 @@
       </p:cxnSp>
       <p:cxnSp>
         <p:nvCxnSpPr>
-          <p:cNvPr id="453" name="Connector 452"/>
+          <p:cNvPr id="465" name="Connector 464"/>
           <p:cNvCxnSpPr/>
           <p:nvPr/>
         </p:nvCxnSpPr>
@@ -22628,7 +23144,7 @@
       </p:cxnSp>
       <p:cxnSp>
         <p:nvCxnSpPr>
-          <p:cNvPr id="454" name="Connector 453"/>
+          <p:cNvPr id="466" name="Connector 465"/>
           <p:cNvCxnSpPr/>
           <p:nvPr/>
         </p:nvCxnSpPr>
@@ -22663,7 +23179,7 @@
       </p:cxnSp>
       <p:sp>
         <p:nvSpPr>
-          <p:cNvPr id="455" name="TextBox 454"/>
+          <p:cNvPr id="467" name="TextBox 466"/>
           <p:cNvSpPr txBox="1"/>
           <p:nvPr/>
         </p:nvSpPr>
@@ -22710,7 +23226,7 @@
       </p:sp>
       <p:sp>
         <p:nvSpPr>
-          <p:cNvPr id="456" name="TextBox 455"/>
+          <p:cNvPr id="468" name="TextBox 467"/>
           <p:cNvSpPr txBox="1"/>
           <p:nvPr/>
         </p:nvSpPr>
@@ -22745,7 +23261,7 @@
       </p:sp>
       <p:sp>
         <p:nvSpPr>
-          <p:cNvPr id="457" name="TextBox 456"/>
+          <p:cNvPr id="469" name="TextBox 468"/>
           <p:cNvSpPr txBox="1"/>
           <p:nvPr/>
         </p:nvSpPr>
@@ -22780,7 +23296,7 @@
       </p:sp>
       <p:sp>
         <p:nvSpPr>
-          <p:cNvPr id="458" name="TextBox 457"/>
+          <p:cNvPr id="470" name="TextBox 469"/>
           <p:cNvSpPr txBox="1"/>
           <p:nvPr/>
         </p:nvSpPr>
@@ -22808,14 +23324,14 @@
                 </a:solidFill>
                 <a:latin typeface="Arial"/>
               </a:rPr>
-              <a:t>DATE: 29-SEP-26</a:t>
-            </a:r>
-          </a:p>
-        </p:txBody>
-      </p:sp>
-      <p:sp>
-        <p:nvSpPr>
-          <p:cNvPr id="459" name="TextBox 458"/>
+              <a:t>DATE: 25-OCT-26</a:t>
+            </a:r>
+          </a:p>
+        </p:txBody>
+      </p:sp>
+      <p:sp>
+        <p:nvSpPr>
+          <p:cNvPr id="471" name="TextBox 470"/>
           <p:cNvSpPr txBox="1"/>
           <p:nvPr/>
         </p:nvSpPr>
@@ -22862,7 +23378,7 @@
       </p:sp>
       <p:sp>
         <p:nvSpPr>
-          <p:cNvPr id="460" name="TextBox 459"/>
+          <p:cNvPr id="472" name="TextBox 471"/>
           <p:cNvSpPr txBox="1"/>
           <p:nvPr/>
         </p:nvSpPr>
@@ -22902,14 +23418,14 @@
                 </a:solidFill>
                 <a:latin typeface="Arial"/>
               </a:rPr>
-              <a:t>D</a:t>
-            </a:r>
-          </a:p>
-        </p:txBody>
-      </p:sp>
-      <p:sp>
-        <p:nvSpPr>
-          <p:cNvPr id="461" name="TextBox 460"/>
+              <a:t>E</a:t>
+            </a:r>
+          </a:p>
+        </p:txBody>
+      </p:sp>
+      <p:sp>
+        <p:nvSpPr>
+          <p:cNvPr id="473" name="TextBox 472"/>
           <p:cNvSpPr txBox="1"/>
           <p:nvPr/>
         </p:nvSpPr>
@@ -22956,7 +23472,7 @@
       </p:sp>
       <p:sp>
         <p:nvSpPr>
-          <p:cNvPr id="462" name="TextBox 461"/>
+          <p:cNvPr id="474" name="TextBox 473"/>
           <p:cNvSpPr txBox="1"/>
           <p:nvPr/>
         </p:nvSpPr>
